--- a/BigVeri_SaldiriTespiti_Sunum.pptx
+++ b/BigVeri_SaldiriTespiti_Sunum.pptx
@@ -7842,6 +7842,164 @@
                 <a:latin typeface="Calibri"/>
               </a:rPr>
               <a:t>Otomatik karar sistemleri şeffaflık, hesap verebilirlik ve açıklanabilirlik (XAI) gerektirir. Her yanlış sınıflandırma, somut bir insanı etkiler; bu nedenle model kararları açıklanabilir olmalıdır.</a:t>
+            </a:r>
+          </a:p>
+        </p:txBody>
+      </p:sp>
+      <p:sp>
+        <p:nvSpPr>
+          <p:cNvPr id="19" name="Rectangle 18"/>
+          <p:cNvSpPr/>
+          <p:nvPr/>
+        </p:nvSpPr>
+        <p:spPr>
+          <a:xfrm>
+            <a:off x="365760" y="5806440"/>
+            <a:ext cx="11460175" cy="868680"/>
+          </a:xfrm>
+          <a:prstGeom prst="rect">
+            <a:avLst/>
+          </a:prstGeom>
+          <a:solidFill>
+            <a:srgbClr val="F57F17"/>
+          </a:solidFill>
+          <a:ln>
+            <a:noFill/>
+          </a:ln>
+        </p:spPr>
+        <p:style>
+          <a:lnRef idx="1">
+            <a:schemeClr val="accent1"/>
+          </a:lnRef>
+          <a:fillRef idx="3">
+            <a:schemeClr val="accent1"/>
+          </a:fillRef>
+          <a:effectRef idx="2">
+            <a:schemeClr val="accent1"/>
+          </a:effectRef>
+          <a:fontRef idx="minor">
+            <a:schemeClr val="lt1"/>
+          </a:fontRef>
+        </p:style>
+        <p:txBody>
+          <a:bodyPr rtlCol="0" anchor="ctr"/>
+          <a:lstStyle/>
+          <a:p>
+            <a:pPr algn="ctr"/>
+          </a:p>
+        </p:txBody>
+      </p:sp>
+      <p:sp>
+        <p:nvSpPr>
+          <p:cNvPr id="20" name="Rectangle 19"/>
+          <p:cNvSpPr/>
+          <p:nvPr/>
+        </p:nvSpPr>
+        <p:spPr>
+          <a:xfrm>
+            <a:off x="384048" y="5824728"/>
+            <a:ext cx="11423599" cy="832103"/>
+          </a:xfrm>
+          <a:prstGeom prst="rect">
+            <a:avLst/>
+          </a:prstGeom>
+          <a:solidFill>
+            <a:srgbClr val="FFF9C4"/>
+          </a:solidFill>
+          <a:ln w="25400">
+            <a:solidFill>
+              <a:srgbClr val="F57F17"/>
+            </a:solidFill>
+          </a:ln>
+        </p:spPr>
+        <p:style>
+          <a:lnRef idx="1">
+            <a:schemeClr val="accent1"/>
+          </a:lnRef>
+          <a:fillRef idx="3">
+            <a:schemeClr val="accent1"/>
+          </a:fillRef>
+          <a:effectRef idx="2">
+            <a:schemeClr val="accent1"/>
+          </a:effectRef>
+          <a:fontRef idx="minor">
+            <a:schemeClr val="lt1"/>
+          </a:fontRef>
+        </p:style>
+        <p:txBody>
+          <a:bodyPr rtlCol="0" anchor="ctr"/>
+          <a:lstStyle/>
+          <a:p>
+            <a:pPr algn="ctr"/>
+          </a:p>
+        </p:txBody>
+      </p:sp>
+      <p:sp>
+        <p:nvSpPr>
+          <p:cNvPr id="21" name="TextBox 20"/>
+          <p:cNvSpPr txBox="1"/>
+          <p:nvPr/>
+        </p:nvSpPr>
+        <p:spPr>
+          <a:xfrm>
+            <a:off x="548640" y="5888736"/>
+            <a:ext cx="1828800" cy="347472"/>
+          </a:xfrm>
+          <a:prstGeom prst="rect">
+            <a:avLst/>
+          </a:prstGeom>
+          <a:noFill/>
+        </p:spPr>
+        <p:txBody>
+          <a:bodyPr wrap="square" lIns="45720" rIns="45720" tIns="27432" bIns="27432">
+            <a:spAutoFit/>
+          </a:bodyPr>
+          <a:lstStyle/>
+          <a:p>
+            <a:pPr algn="l"/>
+            <a:r>
+              <a:rPr sz="1200" b="1" i="0">
+                <a:solidFill>
+                  <a:srgbClr val="F57F17"/>
+                </a:solidFill>
+                <a:latin typeface="Calibri"/>
+              </a:rPr>
+              <a:t>TEMEL ÇIKARIM:</a:t>
+            </a:r>
+          </a:p>
+        </p:txBody>
+      </p:sp>
+      <p:sp>
+        <p:nvSpPr>
+          <p:cNvPr id="22" name="TextBox 21"/>
+          <p:cNvSpPr txBox="1"/>
+          <p:nvPr/>
+        </p:nvSpPr>
+        <p:spPr>
+          <a:xfrm>
+            <a:off x="2468880" y="5888736"/>
+            <a:ext cx="9357055" cy="685800"/>
+          </a:xfrm>
+          <a:prstGeom prst="rect">
+            <a:avLst/>
+          </a:prstGeom>
+          <a:noFill/>
+        </p:spPr>
+        <p:txBody>
+          <a:bodyPr wrap="square" lIns="45720" rIns="45720" tIns="27432" bIns="27432">
+            <a:spAutoFit/>
+          </a:bodyPr>
+          <a:lstStyle/>
+          <a:p>
+            <a:pPr algn="l"/>
+            <a:r>
+              <a:rPr sz="1100" b="0" i="1">
+                <a:solidFill>
+                  <a:srgbClr val="1A237E"/>
+                </a:solidFill>
+                <a:latin typeface="Calibri"/>
+              </a:rPr>
+              <a:t>Eşik değeri (varsayılan 0.5) sabit tutulmamalıdır. Güvenlik öncelikli ortamlarda eşik düşürülerek recall artırılır (daha az kaçan saldırı); mahremiyet öncelikli ortamlarda eşik yükseltilerek yanlış pozitif azaltılır. Bu seçim bağlama özel, bilinçli ve etik olarak gerekçelendirilmiş bir karar olmalıdır.</a:t>
             </a:r>
           </a:p>
         </p:txBody>
@@ -12732,6 +12890,652 @@
                 <a:latin typeface="Calibri"/>
               </a:rPr>
               <a:t>Metodoloji: Analiz Boru Hattı</a:t>
+            </a:r>
+          </a:p>
+        </p:txBody>
+      </p:sp>
+      <p:sp>
+        <p:nvSpPr>
+          <p:cNvPr id="31" name="Rectangle 30"/>
+          <p:cNvSpPr/>
+          <p:nvPr/>
+        </p:nvSpPr>
+        <p:spPr>
+          <a:xfrm>
+            <a:off x="3383280" y="886968"/>
+            <a:ext cx="8442655" cy="5577840"/>
+          </a:xfrm>
+          <a:prstGeom prst="rect">
+            <a:avLst/>
+          </a:prstGeom>
+          <a:solidFill>
+            <a:srgbClr val="E8EAF6"/>
+          </a:solidFill>
+          <a:ln w="12700">
+            <a:solidFill>
+              <a:srgbClr val="1A237E"/>
+            </a:solidFill>
+          </a:ln>
+        </p:spPr>
+        <p:style>
+          <a:lnRef idx="1">
+            <a:schemeClr val="accent1"/>
+          </a:lnRef>
+          <a:fillRef idx="3">
+            <a:schemeClr val="accent1"/>
+          </a:fillRef>
+          <a:effectRef idx="2">
+            <a:schemeClr val="accent1"/>
+          </a:effectRef>
+          <a:fontRef idx="minor">
+            <a:schemeClr val="lt1"/>
+          </a:fontRef>
+        </p:style>
+        <p:txBody>
+          <a:bodyPr rtlCol="0" anchor="ctr"/>
+          <a:lstStyle/>
+          <a:p>
+            <a:pPr algn="ctr"/>
+          </a:p>
+        </p:txBody>
+      </p:sp>
+      <p:sp>
+        <p:nvSpPr>
+          <p:cNvPr id="32" name="TextBox 31"/>
+          <p:cNvSpPr txBox="1"/>
+          <p:nvPr/>
+        </p:nvSpPr>
+        <p:spPr>
+          <a:xfrm>
+            <a:off x="3493008" y="996695"/>
+            <a:ext cx="8223199" cy="411480"/>
+          </a:xfrm>
+          <a:prstGeom prst="rect">
+            <a:avLst/>
+          </a:prstGeom>
+          <a:noFill/>
+        </p:spPr>
+        <p:txBody>
+          <a:bodyPr wrap="square" lIns="45720" rIns="45720" tIns="27432" bIns="27432">
+            <a:spAutoFit/>
+          </a:bodyPr>
+          <a:lstStyle/>
+          <a:p>
+            <a:pPr algn="l"/>
+            <a:r>
+              <a:rPr sz="1500" b="1" i="0">
+                <a:solidFill>
+                  <a:srgbClr val="1A237E"/>
+                </a:solidFill>
+                <a:latin typeface="Calibri"/>
+              </a:rPr>
+              <a:t>Neden Random Forest?</a:t>
+            </a:r>
+          </a:p>
+        </p:txBody>
+      </p:sp>
+      <p:sp>
+        <p:nvSpPr>
+          <p:cNvPr id="33" name="Rectangle 32"/>
+          <p:cNvSpPr/>
+          <p:nvPr/>
+        </p:nvSpPr>
+        <p:spPr>
+          <a:xfrm>
+            <a:off x="3493008" y="1481328"/>
+            <a:ext cx="8223199" cy="73152"/>
+          </a:xfrm>
+          <a:prstGeom prst="rect">
+            <a:avLst/>
+          </a:prstGeom>
+          <a:solidFill>
+            <a:srgbClr val="1565C0"/>
+          </a:solidFill>
+          <a:ln>
+            <a:noFill/>
+          </a:ln>
+        </p:spPr>
+        <p:style>
+          <a:lnRef idx="1">
+            <a:schemeClr val="accent1"/>
+          </a:lnRef>
+          <a:fillRef idx="3">
+            <a:schemeClr val="accent1"/>
+          </a:fillRef>
+          <a:effectRef idx="2">
+            <a:schemeClr val="accent1"/>
+          </a:effectRef>
+          <a:fontRef idx="minor">
+            <a:schemeClr val="lt1"/>
+          </a:fontRef>
+        </p:style>
+        <p:txBody>
+          <a:bodyPr rtlCol="0" anchor="ctr"/>
+          <a:lstStyle/>
+          <a:p>
+            <a:pPr algn="ctr"/>
+          </a:p>
+        </p:txBody>
+      </p:sp>
+      <p:sp>
+        <p:nvSpPr>
+          <p:cNvPr id="34" name="TextBox 33"/>
+          <p:cNvSpPr txBox="1"/>
+          <p:nvPr/>
+        </p:nvSpPr>
+        <p:spPr>
+          <a:xfrm>
+            <a:off x="3493008" y="1536192"/>
+            <a:ext cx="8223199" cy="274320"/>
+          </a:xfrm>
+          <a:prstGeom prst="rect">
+            <a:avLst/>
+          </a:prstGeom>
+          <a:noFill/>
+        </p:spPr>
+        <p:txBody>
+          <a:bodyPr wrap="square" lIns="45720" rIns="45720" tIns="27432" bIns="27432">
+            <a:spAutoFit/>
+          </a:bodyPr>
+          <a:lstStyle/>
+          <a:p>
+            <a:pPr algn="l"/>
+            <a:r>
+              <a:rPr sz="1200" b="1" i="0">
+                <a:solidFill>
+                  <a:srgbClr val="1565C0"/>
+                </a:solidFill>
+                <a:latin typeface="Calibri"/>
+              </a:rPr>
+              <a:t>Aşırı öğrenmeye direnç</a:t>
+            </a:r>
+          </a:p>
+        </p:txBody>
+      </p:sp>
+      <p:sp>
+        <p:nvSpPr>
+          <p:cNvPr id="35" name="TextBox 34"/>
+          <p:cNvSpPr txBox="1"/>
+          <p:nvPr/>
+        </p:nvSpPr>
+        <p:spPr>
+          <a:xfrm>
+            <a:off x="3566160" y="1801368"/>
+            <a:ext cx="8076895" cy="457200"/>
+          </a:xfrm>
+          <a:prstGeom prst="rect">
+            <a:avLst/>
+          </a:prstGeom>
+          <a:noFill/>
+        </p:spPr>
+        <p:txBody>
+          <a:bodyPr wrap="square" lIns="45720" rIns="45720" tIns="27432" bIns="27432">
+            <a:spAutoFit/>
+          </a:bodyPr>
+          <a:lstStyle/>
+          <a:p>
+            <a:pPr algn="l"/>
+            <a:r>
+              <a:rPr sz="1100" b="0" i="0">
+                <a:solidFill>
+                  <a:srgbClr val="1A237E"/>
+                </a:solidFill>
+                <a:latin typeface="Calibri"/>
+              </a:rPr>
+              <a:t>Yüzlerce ağacın oylama ortalaması alındığından tek ağaca göre çok daha kararlıdır.</a:t>
+            </a:r>
+          </a:p>
+        </p:txBody>
+      </p:sp>
+      <p:sp>
+        <p:nvSpPr>
+          <p:cNvPr id="36" name="Rectangle 35"/>
+          <p:cNvSpPr/>
+          <p:nvPr/>
+        </p:nvSpPr>
+        <p:spPr>
+          <a:xfrm>
+            <a:off x="3493008" y="2377440"/>
+            <a:ext cx="8223199" cy="73152"/>
+          </a:xfrm>
+          <a:prstGeom prst="rect">
+            <a:avLst/>
+          </a:prstGeom>
+          <a:solidFill>
+            <a:srgbClr val="1565C0"/>
+          </a:solidFill>
+          <a:ln>
+            <a:noFill/>
+          </a:ln>
+        </p:spPr>
+        <p:style>
+          <a:lnRef idx="1">
+            <a:schemeClr val="accent1"/>
+          </a:lnRef>
+          <a:fillRef idx="3">
+            <a:schemeClr val="accent1"/>
+          </a:fillRef>
+          <a:effectRef idx="2">
+            <a:schemeClr val="accent1"/>
+          </a:effectRef>
+          <a:fontRef idx="minor">
+            <a:schemeClr val="lt1"/>
+          </a:fontRef>
+        </p:style>
+        <p:txBody>
+          <a:bodyPr rtlCol="0" anchor="ctr"/>
+          <a:lstStyle/>
+          <a:p>
+            <a:pPr algn="ctr"/>
+          </a:p>
+        </p:txBody>
+      </p:sp>
+      <p:sp>
+        <p:nvSpPr>
+          <p:cNvPr id="37" name="TextBox 36"/>
+          <p:cNvSpPr txBox="1"/>
+          <p:nvPr/>
+        </p:nvSpPr>
+        <p:spPr>
+          <a:xfrm>
+            <a:off x="3493008" y="2432304"/>
+            <a:ext cx="8223199" cy="274320"/>
+          </a:xfrm>
+          <a:prstGeom prst="rect">
+            <a:avLst/>
+          </a:prstGeom>
+          <a:noFill/>
+        </p:spPr>
+        <p:txBody>
+          <a:bodyPr wrap="square" lIns="45720" rIns="45720" tIns="27432" bIns="27432">
+            <a:spAutoFit/>
+          </a:bodyPr>
+          <a:lstStyle/>
+          <a:p>
+            <a:pPr algn="l"/>
+            <a:r>
+              <a:rPr sz="1200" b="1" i="0">
+                <a:solidFill>
+                  <a:srgbClr val="1565C0"/>
+                </a:solidFill>
+                <a:latin typeface="Calibri"/>
+              </a:rPr>
+              <a:t>Dağılım varsayımı yok</a:t>
+            </a:r>
+          </a:p>
+        </p:txBody>
+      </p:sp>
+      <p:sp>
+        <p:nvSpPr>
+          <p:cNvPr id="38" name="TextBox 37"/>
+          <p:cNvSpPr txBox="1"/>
+          <p:nvPr/>
+        </p:nvSpPr>
+        <p:spPr>
+          <a:xfrm>
+            <a:off x="3566160" y="2697480"/>
+            <a:ext cx="8076895" cy="457200"/>
+          </a:xfrm>
+          <a:prstGeom prst="rect">
+            <a:avLst/>
+          </a:prstGeom>
+          <a:noFill/>
+        </p:spPr>
+        <p:txBody>
+          <a:bodyPr wrap="square" lIns="45720" rIns="45720" tIns="27432" bIns="27432">
+            <a:spAutoFit/>
+          </a:bodyPr>
+          <a:lstStyle/>
+          <a:p>
+            <a:pPr algn="l"/>
+            <a:r>
+              <a:rPr sz="1100" b="0" i="0">
+                <a:solidFill>
+                  <a:srgbClr val="1A237E"/>
+                </a:solidFill>
+                <a:latin typeface="Calibri"/>
+              </a:rPr>
+              <a:t>Lojistik regresyon gibi özellik dağılımı varsayımına ihtiyaç duymaz.</a:t>
+            </a:r>
+          </a:p>
+        </p:txBody>
+      </p:sp>
+      <p:sp>
+        <p:nvSpPr>
+          <p:cNvPr id="39" name="Rectangle 38"/>
+          <p:cNvSpPr/>
+          <p:nvPr/>
+        </p:nvSpPr>
+        <p:spPr>
+          <a:xfrm>
+            <a:off x="3493008" y="3273552"/>
+            <a:ext cx="8223199" cy="73152"/>
+          </a:xfrm>
+          <a:prstGeom prst="rect">
+            <a:avLst/>
+          </a:prstGeom>
+          <a:solidFill>
+            <a:srgbClr val="1565C0"/>
+          </a:solidFill>
+          <a:ln>
+            <a:noFill/>
+          </a:ln>
+        </p:spPr>
+        <p:style>
+          <a:lnRef idx="1">
+            <a:schemeClr val="accent1"/>
+          </a:lnRef>
+          <a:fillRef idx="3">
+            <a:schemeClr val="accent1"/>
+          </a:fillRef>
+          <a:effectRef idx="2">
+            <a:schemeClr val="accent1"/>
+          </a:effectRef>
+          <a:fontRef idx="minor">
+            <a:schemeClr val="lt1"/>
+          </a:fontRef>
+        </p:style>
+        <p:txBody>
+          <a:bodyPr rtlCol="0" anchor="ctr"/>
+          <a:lstStyle/>
+          <a:p>
+            <a:pPr algn="ctr"/>
+          </a:p>
+        </p:txBody>
+      </p:sp>
+      <p:sp>
+        <p:nvSpPr>
+          <p:cNvPr id="40" name="TextBox 39"/>
+          <p:cNvSpPr txBox="1"/>
+          <p:nvPr/>
+        </p:nvSpPr>
+        <p:spPr>
+          <a:xfrm>
+            <a:off x="3493008" y="3328416"/>
+            <a:ext cx="8223199" cy="274320"/>
+          </a:xfrm>
+          <a:prstGeom prst="rect">
+            <a:avLst/>
+          </a:prstGeom>
+          <a:noFill/>
+        </p:spPr>
+        <p:txBody>
+          <a:bodyPr wrap="square" lIns="45720" rIns="45720" tIns="27432" bIns="27432">
+            <a:spAutoFit/>
+          </a:bodyPr>
+          <a:lstStyle/>
+          <a:p>
+            <a:pPr algn="l"/>
+            <a:r>
+              <a:rPr sz="1200" b="1" i="0">
+                <a:solidFill>
+                  <a:srgbClr val="1565C0"/>
+                </a:solidFill>
+                <a:latin typeface="Calibri"/>
+              </a:rPr>
+              <a:t>Karma özellik tipleri</a:t>
+            </a:r>
+          </a:p>
+        </p:txBody>
+      </p:sp>
+      <p:sp>
+        <p:nvSpPr>
+          <p:cNvPr id="41" name="TextBox 40"/>
+          <p:cNvSpPr txBox="1"/>
+          <p:nvPr/>
+        </p:nvSpPr>
+        <p:spPr>
+          <a:xfrm>
+            <a:off x="3566160" y="3593592"/>
+            <a:ext cx="8076895" cy="457200"/>
+          </a:xfrm>
+          <a:prstGeom prst="rect">
+            <a:avLst/>
+          </a:prstGeom>
+          <a:noFill/>
+        </p:spPr>
+        <p:txBody>
+          <a:bodyPr wrap="square" lIns="45720" rIns="45720" tIns="27432" bIns="27432">
+            <a:spAutoFit/>
+          </a:bodyPr>
+          <a:lstStyle/>
+          <a:p>
+            <a:pPr algn="l"/>
+            <a:r>
+              <a:rPr sz="1100" b="0" i="0">
+                <a:solidFill>
+                  <a:srgbClr val="1A237E"/>
+                </a:solidFill>
+                <a:latin typeface="Calibri"/>
+              </a:rPr>
+              <a:t>Sayısal + kodlanmış kategorik özellikleri aynı anda işleyebilir.</a:t>
+            </a:r>
+          </a:p>
+        </p:txBody>
+      </p:sp>
+      <p:sp>
+        <p:nvSpPr>
+          <p:cNvPr id="42" name="Rectangle 41"/>
+          <p:cNvSpPr/>
+          <p:nvPr/>
+        </p:nvSpPr>
+        <p:spPr>
+          <a:xfrm>
+            <a:off x="3493008" y="4169664"/>
+            <a:ext cx="8223199" cy="73152"/>
+          </a:xfrm>
+          <a:prstGeom prst="rect">
+            <a:avLst/>
+          </a:prstGeom>
+          <a:solidFill>
+            <a:srgbClr val="1565C0"/>
+          </a:solidFill>
+          <a:ln>
+            <a:noFill/>
+          </a:ln>
+        </p:spPr>
+        <p:style>
+          <a:lnRef idx="1">
+            <a:schemeClr val="accent1"/>
+          </a:lnRef>
+          <a:fillRef idx="3">
+            <a:schemeClr val="accent1"/>
+          </a:fillRef>
+          <a:effectRef idx="2">
+            <a:schemeClr val="accent1"/>
+          </a:effectRef>
+          <a:fontRef idx="minor">
+            <a:schemeClr val="lt1"/>
+          </a:fontRef>
+        </p:style>
+        <p:txBody>
+          <a:bodyPr rtlCol="0" anchor="ctr"/>
+          <a:lstStyle/>
+          <a:p>
+            <a:pPr algn="ctr"/>
+          </a:p>
+        </p:txBody>
+      </p:sp>
+      <p:sp>
+        <p:nvSpPr>
+          <p:cNvPr id="43" name="TextBox 42"/>
+          <p:cNvSpPr txBox="1"/>
+          <p:nvPr/>
+        </p:nvSpPr>
+        <p:spPr>
+          <a:xfrm>
+            <a:off x="3493008" y="4224528"/>
+            <a:ext cx="8223199" cy="274320"/>
+          </a:xfrm>
+          <a:prstGeom prst="rect">
+            <a:avLst/>
+          </a:prstGeom>
+          <a:noFill/>
+        </p:spPr>
+        <p:txBody>
+          <a:bodyPr wrap="square" lIns="45720" rIns="45720" tIns="27432" bIns="27432">
+            <a:spAutoFit/>
+          </a:bodyPr>
+          <a:lstStyle/>
+          <a:p>
+            <a:pPr algn="l"/>
+            <a:r>
+              <a:rPr sz="1200" b="1" i="0">
+                <a:solidFill>
+                  <a:srgbClr val="1565C0"/>
+                </a:solidFill>
+                <a:latin typeface="Calibri"/>
+              </a:rPr>
+              <a:t>Yorumlanabilirlik</a:t>
+            </a:r>
+          </a:p>
+        </p:txBody>
+      </p:sp>
+      <p:sp>
+        <p:nvSpPr>
+          <p:cNvPr id="44" name="TextBox 43"/>
+          <p:cNvSpPr txBox="1"/>
+          <p:nvPr/>
+        </p:nvSpPr>
+        <p:spPr>
+          <a:xfrm>
+            <a:off x="3566160" y="4489704"/>
+            <a:ext cx="8076895" cy="457200"/>
+          </a:xfrm>
+          <a:prstGeom prst="rect">
+            <a:avLst/>
+          </a:prstGeom>
+          <a:noFill/>
+        </p:spPr>
+        <p:txBody>
+          <a:bodyPr wrap="square" lIns="45720" rIns="45720" tIns="27432" bIns="27432">
+            <a:spAutoFit/>
+          </a:bodyPr>
+          <a:lstStyle/>
+          <a:p>
+            <a:pPr algn="l"/>
+            <a:r>
+              <a:rPr sz="1100" b="0" i="0">
+                <a:solidFill>
+                  <a:srgbClr val="1A237E"/>
+                </a:solidFill>
+                <a:latin typeface="Calibri"/>
+              </a:rPr>
+              <a:t>Feature importance skoru sayesinde hangi özelliğin ne kadar katkı verdiği ölçülür.</a:t>
+            </a:r>
+          </a:p>
+        </p:txBody>
+      </p:sp>
+      <p:sp>
+        <p:nvSpPr>
+          <p:cNvPr id="45" name="Rectangle 44"/>
+          <p:cNvSpPr/>
+          <p:nvPr/>
+        </p:nvSpPr>
+        <p:spPr>
+          <a:xfrm>
+            <a:off x="3493008" y="5065776"/>
+            <a:ext cx="8223199" cy="73152"/>
+          </a:xfrm>
+          <a:prstGeom prst="rect">
+            <a:avLst/>
+          </a:prstGeom>
+          <a:solidFill>
+            <a:srgbClr val="1565C0"/>
+          </a:solidFill>
+          <a:ln>
+            <a:noFill/>
+          </a:ln>
+        </p:spPr>
+        <p:style>
+          <a:lnRef idx="1">
+            <a:schemeClr val="accent1"/>
+          </a:lnRef>
+          <a:fillRef idx="3">
+            <a:schemeClr val="accent1"/>
+          </a:fillRef>
+          <a:effectRef idx="2">
+            <a:schemeClr val="accent1"/>
+          </a:effectRef>
+          <a:fontRef idx="minor">
+            <a:schemeClr val="lt1"/>
+          </a:fontRef>
+        </p:style>
+        <p:txBody>
+          <a:bodyPr rtlCol="0" anchor="ctr"/>
+          <a:lstStyle/>
+          <a:p>
+            <a:pPr algn="ctr"/>
+          </a:p>
+        </p:txBody>
+      </p:sp>
+      <p:sp>
+        <p:nvSpPr>
+          <p:cNvPr id="46" name="TextBox 45"/>
+          <p:cNvSpPr txBox="1"/>
+          <p:nvPr/>
+        </p:nvSpPr>
+        <p:spPr>
+          <a:xfrm>
+            <a:off x="3493008" y="5120640"/>
+            <a:ext cx="8223199" cy="274320"/>
+          </a:xfrm>
+          <a:prstGeom prst="rect">
+            <a:avLst/>
+          </a:prstGeom>
+          <a:noFill/>
+        </p:spPr>
+        <p:txBody>
+          <a:bodyPr wrap="square" lIns="45720" rIns="45720" tIns="27432" bIns="27432">
+            <a:spAutoFit/>
+          </a:bodyPr>
+          <a:lstStyle/>
+          <a:p>
+            <a:pPr algn="l"/>
+            <a:r>
+              <a:rPr sz="1200" b="1" i="0">
+                <a:solidFill>
+                  <a:srgbClr val="1565C0"/>
+                </a:solidFill>
+                <a:latin typeface="Calibri"/>
+              </a:rPr>
+              <a:t>StandardScaler notu</a:t>
+            </a:r>
+          </a:p>
+        </p:txBody>
+      </p:sp>
+      <p:sp>
+        <p:nvSpPr>
+          <p:cNvPr id="47" name="TextBox 46"/>
+          <p:cNvSpPr txBox="1"/>
+          <p:nvPr/>
+        </p:nvSpPr>
+        <p:spPr>
+          <a:xfrm>
+            <a:off x="3566160" y="5385816"/>
+            <a:ext cx="8076895" cy="457200"/>
+          </a:xfrm>
+          <a:prstGeom prst="rect">
+            <a:avLst/>
+          </a:prstGeom>
+          <a:noFill/>
+        </p:spPr>
+        <p:txBody>
+          <a:bodyPr wrap="square" lIns="45720" rIns="45720" tIns="27432" bIns="27432">
+            <a:spAutoFit/>
+          </a:bodyPr>
+          <a:lstStyle/>
+          <a:p>
+            <a:pPr algn="l"/>
+            <a:r>
+              <a:rPr sz="1100" b="0" i="0">
+                <a:solidFill>
+                  <a:srgbClr val="1A237E"/>
+                </a:solidFill>
+                <a:latin typeface="Calibri"/>
+              </a:rPr>
+              <a:t>RF ölçeğe duyarsızdır; scaler pipeline standardizasyonu
+için eklenmiştir, modelin zorunluluğundan değil.</a:t>
             </a:r>
           </a:p>
         </p:txBody>

--- a/BigVeri_SaldiriTespiti_Sunum.pptx
+++ b/BigVeri_SaldiriTespiti_Sunum.pptx
@@ -4,27 +4,23 @@
   <p:sldMasterIdLst>
     <p:sldMasterId id="2147483648" r:id="rId1"/>
   </p:sldMasterIdLst>
-  <p:notesMasterIdLst>
-    <p:notesMasterId r:id="rId17"/>
-  </p:notesMasterIdLst>
   <p:sldIdLst>
-    <p:sldId id="256" r:id="rId2"/>
-    <p:sldId id="257" r:id="rId3"/>
-    <p:sldId id="258" r:id="rId4"/>
-    <p:sldId id="259" r:id="rId5"/>
-    <p:sldId id="260" r:id="rId6"/>
-    <p:sldId id="261" r:id="rId7"/>
-    <p:sldId id="262" r:id="rId8"/>
-    <p:sldId id="263" r:id="rId9"/>
-    <p:sldId id="264" r:id="rId10"/>
-    <p:sldId id="265" r:id="rId11"/>
-    <p:sldId id="266" r:id="rId12"/>
-    <p:sldId id="267" r:id="rId13"/>
-    <p:sldId id="268" r:id="rId14"/>
-    <p:sldId id="269" r:id="rId15"/>
-    <p:sldId id="270" r:id="rId16"/>
+    <p:sldId id="256" r:id="rId7"/>
+    <p:sldId id="257" r:id="rId9"/>
+    <p:sldId id="258" r:id="rId10"/>
+    <p:sldId id="259" r:id="rId11"/>
+    <p:sldId id="260" r:id="rId12"/>
+    <p:sldId id="261" r:id="rId13"/>
+    <p:sldId id="262" r:id="rId14"/>
+    <p:sldId id="263" r:id="rId15"/>
+    <p:sldId id="264" r:id="rId16"/>
+    <p:sldId id="265" r:id="rId17"/>
+    <p:sldId id="266" r:id="rId18"/>
+    <p:sldId id="267" r:id="rId19"/>
+    <p:sldId id="268" r:id="rId20"/>
+    <p:sldId id="269" r:id="rId21"/>
   </p:sldIdLst>
-  <p:sldSz cx="12192000" cy="6858000"/>
+  <p:sldSz cx="12191695" cy="6858000" type="screen4x3"/>
   <p:notesSz cx="6858000" cy="9144000"/>
   <p:defaultTextStyle>
     <a:defPPr>
@@ -121,258 +117,11 @@
       </a:defRPr>
     </a:lvl9pPr>
   </p:defaultTextStyle>
-  <p:extLst>
-    <p:ext uri="{EFAFB233-063F-42B5-8137-9DF3F51BA10A}">
-      <p15:sldGuideLst xmlns:p15="http://schemas.microsoft.com/office/powerpoint/2012/main"/>
-    </p:ext>
-  </p:extLst>
 </p:presentation>
 </file>
 
-<file path=ppt/revisionInfo.xml><?xml version="1.0" encoding="utf-8"?>
-<p1510:revInfo xmlns:a="http://schemas.openxmlformats.org/drawingml/2006/main" xmlns:r="http://schemas.openxmlformats.org/officeDocument/2006/relationships" xmlns:p1510="http://schemas.microsoft.com/office/powerpoint/2015/10/main">
-  <p1510:revLst>
-    <p1510:client id="{1248C51C-0D6D-4C92-A6F4-A791AAA784A2}" v="6" dt="2026-05-26T18:39:16.950"/>
-  </p1510:revLst>
-</p1510:revInfo>
-</file>
-
-<file path=ppt/changesInfos/changesInfo1.xml><?xml version="1.0" encoding="utf-8"?>
-<pc:chgInfo xmlns:a="http://schemas.openxmlformats.org/drawingml/2006/main" xmlns:r="http://schemas.openxmlformats.org/officeDocument/2006/relationships" xmlns:ac="http://schemas.microsoft.com/office/drawing/2013/main/command" xmlns:pc="http://schemas.microsoft.com/office/powerpoint/2013/main/command">
-  <pc:docChgLst>
-    <pc:chgData name="Nesibe Şeyma Can" userId="27782137dc423866" providerId="LiveId" clId="{1B49244D-AA4F-44AB-9AC2-08ADD29ACCCA}"/>
-    <pc:docChg chg="undo custSel addSld modSld">
-      <pc:chgData name="Nesibe Şeyma Can" userId="27782137dc423866" providerId="LiveId" clId="{1B49244D-AA4F-44AB-9AC2-08ADD29ACCCA}" dt="2026-05-26T18:41:18.136" v="135" actId="1076"/>
-      <pc:docMkLst>
-        <pc:docMk/>
-      </pc:docMkLst>
-      <pc:sldChg chg="delSp modSp mod">
-        <pc:chgData name="Nesibe Şeyma Can" userId="27782137dc423866" providerId="LiveId" clId="{1B49244D-AA4F-44AB-9AC2-08ADD29ACCCA}" dt="2026-05-26T18:38:52.295" v="85"/>
-        <pc:sldMkLst>
-          <pc:docMk/>
-          <pc:sldMk cId="0" sldId="256"/>
-        </pc:sldMkLst>
-        <pc:spChg chg="mod">
-          <ac:chgData name="Nesibe Şeyma Can" userId="27782137dc423866" providerId="LiveId" clId="{1B49244D-AA4F-44AB-9AC2-08ADD29ACCCA}" dt="2026-05-26T18:38:41.860" v="84" actId="255"/>
-          <ac:spMkLst>
-            <pc:docMk/>
-            <pc:sldMk cId="0" sldId="256"/>
-            <ac:spMk id="3" creationId="{00000000-0000-0000-0000-000000000000}"/>
-          </ac:spMkLst>
-        </pc:spChg>
-        <pc:spChg chg="mod">
-          <ac:chgData name="Nesibe Şeyma Can" userId="27782137dc423866" providerId="LiveId" clId="{1B49244D-AA4F-44AB-9AC2-08ADD29ACCCA}" dt="2026-05-26T18:38:52.295" v="85"/>
-          <ac:spMkLst>
-            <pc:docMk/>
-            <pc:sldMk cId="0" sldId="256"/>
-            <ac:spMk id="5" creationId="{00000000-0000-0000-0000-000000000000}"/>
-          </ac:spMkLst>
-        </pc:spChg>
-        <pc:spChg chg="del mod">
-          <ac:chgData name="Nesibe Şeyma Can" userId="27782137dc423866" providerId="LiveId" clId="{1B49244D-AA4F-44AB-9AC2-08ADD29ACCCA}" dt="2026-05-26T18:37:40.021" v="45" actId="21"/>
-          <ac:spMkLst>
-            <pc:docMk/>
-            <pc:sldMk cId="0" sldId="256"/>
-            <ac:spMk id="9" creationId="{00000000-0000-0000-0000-000000000000}"/>
-          </ac:spMkLst>
-        </pc:spChg>
-      </pc:sldChg>
-      <pc:sldChg chg="addSp delSp modSp mod chgLayout">
-        <pc:chgData name="Nesibe Şeyma Can" userId="27782137dc423866" providerId="LiveId" clId="{1B49244D-AA4F-44AB-9AC2-08ADD29ACCCA}" dt="2026-05-26T18:33:41.877" v="34" actId="6264"/>
-        <pc:sldMkLst>
-          <pc:docMk/>
-          <pc:sldMk cId="0" sldId="261"/>
-        </pc:sldMkLst>
-        <pc:picChg chg="del mod">
-          <ac:chgData name="Nesibe Şeyma Can" userId="27782137dc423866" providerId="LiveId" clId="{1B49244D-AA4F-44AB-9AC2-08ADD29ACCCA}" dt="2026-05-26T18:31:45.473" v="16" actId="478"/>
-          <ac:picMkLst>
-            <pc:docMk/>
-            <pc:sldMk cId="0" sldId="261"/>
-            <ac:picMk id="5" creationId="{00000000-0000-0000-0000-000000000000}"/>
-          </ac:picMkLst>
-        </pc:picChg>
-        <pc:picChg chg="add del mod">
-          <ac:chgData name="Nesibe Şeyma Can" userId="27782137dc423866" providerId="LiveId" clId="{1B49244D-AA4F-44AB-9AC2-08ADD29ACCCA}" dt="2026-05-26T18:30:37.861" v="10" actId="21"/>
-          <ac:picMkLst>
-            <pc:docMk/>
-            <pc:sldMk cId="0" sldId="261"/>
-            <ac:picMk id="6" creationId="{00000000-0000-0000-0000-000000000000}"/>
-          </ac:picMkLst>
-        </pc:picChg>
-        <pc:picChg chg="add mod">
-          <ac:chgData name="Nesibe Şeyma Can" userId="27782137dc423866" providerId="LiveId" clId="{1B49244D-AA4F-44AB-9AC2-08ADD29ACCCA}" dt="2026-05-26T18:30:47.581" v="11" actId="1076"/>
-          <ac:picMkLst>
-            <pc:docMk/>
-            <pc:sldMk cId="0" sldId="261"/>
-            <ac:picMk id="9" creationId="{EB5297E9-208D-A723-E8A8-0FDE7D14448A}"/>
-          </ac:picMkLst>
-        </pc:picChg>
-        <pc:picChg chg="add mod modCrop">
-          <ac:chgData name="Nesibe Şeyma Can" userId="27782137dc423866" providerId="LiveId" clId="{1B49244D-AA4F-44AB-9AC2-08ADD29ACCCA}" dt="2026-05-26T18:32:58.326" v="32" actId="1076"/>
-          <ac:picMkLst>
-            <pc:docMk/>
-            <pc:sldMk cId="0" sldId="261"/>
-            <ac:picMk id="11" creationId="{46803A2C-2A8D-0222-4253-81FE1EB13CA5}"/>
-          </ac:picMkLst>
-        </pc:picChg>
-        <pc:picChg chg="add mod modCrop">
-          <ac:chgData name="Nesibe Şeyma Can" userId="27782137dc423866" providerId="LiveId" clId="{1B49244D-AA4F-44AB-9AC2-08ADD29ACCCA}" dt="2026-05-26T18:33:09.174" v="33" actId="1076"/>
-          <ac:picMkLst>
-            <pc:docMk/>
-            <pc:sldMk cId="0" sldId="261"/>
-            <ac:picMk id="13" creationId="{B505C1A3-2F9B-D481-74EE-19AFC09CE091}"/>
-          </ac:picMkLst>
-        </pc:picChg>
-      </pc:sldChg>
-      <pc:sldChg chg="addSp delSp modSp mod">
-        <pc:chgData name="Nesibe Şeyma Can" userId="27782137dc423866" providerId="LiveId" clId="{1B49244D-AA4F-44AB-9AC2-08ADD29ACCCA}" dt="2026-05-26T18:34:43.124" v="38" actId="21"/>
-        <pc:sldMkLst>
-          <pc:docMk/>
-          <pc:sldMk cId="0" sldId="262"/>
-        </pc:sldMkLst>
-        <pc:spChg chg="del">
-          <ac:chgData name="Nesibe Şeyma Can" userId="27782137dc423866" providerId="LiveId" clId="{1B49244D-AA4F-44AB-9AC2-08ADD29ACCCA}" dt="2026-05-26T18:34:43.124" v="38" actId="21"/>
-          <ac:spMkLst>
-            <pc:docMk/>
-            <pc:sldMk cId="0" sldId="262"/>
-            <ac:spMk id="2" creationId="{00000000-0000-0000-0000-000000000000}"/>
-          </ac:spMkLst>
-        </pc:spChg>
-        <pc:spChg chg="del mod">
-          <ac:chgData name="Nesibe Şeyma Can" userId="27782137dc423866" providerId="LiveId" clId="{1B49244D-AA4F-44AB-9AC2-08ADD29ACCCA}" dt="2026-05-26T18:34:40.871" v="37" actId="21"/>
-          <ac:spMkLst>
-            <pc:docMk/>
-            <pc:sldMk cId="0" sldId="262"/>
-            <ac:spMk id="3" creationId="{00000000-0000-0000-0000-000000000000}"/>
-          </ac:spMkLst>
-        </pc:spChg>
-        <pc:spChg chg="mod">
-          <ac:chgData name="Nesibe Şeyma Can" userId="27782137dc423866" providerId="LiveId" clId="{1B49244D-AA4F-44AB-9AC2-08ADD29ACCCA}" dt="2026-05-26T18:34:22.119" v="35" actId="1076"/>
-          <ac:spMkLst>
-            <pc:docMk/>
-            <pc:sldMk cId="0" sldId="262"/>
-            <ac:spMk id="8" creationId="{00000000-0000-0000-0000-000000000000}"/>
-          </ac:spMkLst>
-        </pc:spChg>
-        <pc:spChg chg="mod">
-          <ac:chgData name="Nesibe Şeyma Can" userId="27782137dc423866" providerId="LiveId" clId="{1B49244D-AA4F-44AB-9AC2-08ADD29ACCCA}" dt="2026-05-26T18:34:22.119" v="35" actId="1076"/>
-          <ac:spMkLst>
-            <pc:docMk/>
-            <pc:sldMk cId="0" sldId="262"/>
-            <ac:spMk id="12" creationId="{00000000-0000-0000-0000-000000000000}"/>
-          </ac:spMkLst>
-        </pc:spChg>
-        <pc:spChg chg="mod">
-          <ac:chgData name="Nesibe Şeyma Can" userId="27782137dc423866" providerId="LiveId" clId="{1B49244D-AA4F-44AB-9AC2-08ADD29ACCCA}" dt="2026-05-26T18:34:22.119" v="35" actId="1076"/>
-          <ac:spMkLst>
-            <pc:docMk/>
-            <pc:sldMk cId="0" sldId="262"/>
-            <ac:spMk id="14" creationId="{00000000-0000-0000-0000-000000000000}"/>
-          </ac:spMkLst>
-        </pc:spChg>
-        <pc:spChg chg="mod">
-          <ac:chgData name="Nesibe Şeyma Can" userId="27782137dc423866" providerId="LiveId" clId="{1B49244D-AA4F-44AB-9AC2-08ADD29ACCCA}" dt="2026-05-26T18:34:22.119" v="35" actId="1076"/>
-          <ac:spMkLst>
-            <pc:docMk/>
-            <pc:sldMk cId="0" sldId="262"/>
-            <ac:spMk id="15" creationId="{00000000-0000-0000-0000-000000000000}"/>
-          </ac:spMkLst>
-        </pc:spChg>
-        <pc:spChg chg="mod">
-          <ac:chgData name="Nesibe Şeyma Can" userId="27782137dc423866" providerId="LiveId" clId="{1B49244D-AA4F-44AB-9AC2-08ADD29ACCCA}" dt="2026-05-26T18:34:22.119" v="35" actId="1076"/>
-          <ac:spMkLst>
-            <pc:docMk/>
-            <pc:sldMk cId="0" sldId="262"/>
-            <ac:spMk id="18" creationId="{00000000-0000-0000-0000-000000000000}"/>
-          </ac:spMkLst>
-        </pc:spChg>
-        <pc:spChg chg="mod">
-          <ac:chgData name="Nesibe Şeyma Can" userId="27782137dc423866" providerId="LiveId" clId="{1B49244D-AA4F-44AB-9AC2-08ADD29ACCCA}" dt="2026-05-26T18:34:22.119" v="35" actId="1076"/>
-          <ac:spMkLst>
-            <pc:docMk/>
-            <pc:sldMk cId="0" sldId="262"/>
-            <ac:spMk id="21" creationId="{00000000-0000-0000-0000-000000000000}"/>
-          </ac:spMkLst>
-        </pc:spChg>
-        <pc:spChg chg="mod">
-          <ac:chgData name="Nesibe Şeyma Can" userId="27782137dc423866" providerId="LiveId" clId="{1B49244D-AA4F-44AB-9AC2-08ADD29ACCCA}" dt="2026-05-26T18:34:22.119" v="35" actId="1076"/>
-          <ac:spMkLst>
-            <pc:docMk/>
-            <pc:sldMk cId="0" sldId="262"/>
-            <ac:spMk id="25" creationId="{00000000-0000-0000-0000-000000000000}"/>
-          </ac:spMkLst>
-        </pc:spChg>
-        <pc:spChg chg="mod">
-          <ac:chgData name="Nesibe Şeyma Can" userId="27782137dc423866" providerId="LiveId" clId="{1B49244D-AA4F-44AB-9AC2-08ADD29ACCCA}" dt="2026-05-26T18:34:22.119" v="35" actId="1076"/>
-          <ac:spMkLst>
-            <pc:docMk/>
-            <pc:sldMk cId="0" sldId="262"/>
-            <ac:spMk id="26" creationId="{00000000-0000-0000-0000-000000000000}"/>
-          </ac:spMkLst>
-        </pc:spChg>
-        <pc:spChg chg="mod">
-          <ac:chgData name="Nesibe Şeyma Can" userId="27782137dc423866" providerId="LiveId" clId="{1B49244D-AA4F-44AB-9AC2-08ADD29ACCCA}" dt="2026-05-26T18:34:22.119" v="35" actId="1076"/>
-          <ac:spMkLst>
-            <pc:docMk/>
-            <pc:sldMk cId="0" sldId="262"/>
-            <ac:spMk id="28" creationId="{00000000-0000-0000-0000-000000000000}"/>
-          </ac:spMkLst>
-        </pc:spChg>
-        <pc:spChg chg="add mod">
-          <ac:chgData name="Nesibe Şeyma Can" userId="27782137dc423866" providerId="LiveId" clId="{1B49244D-AA4F-44AB-9AC2-08ADD29ACCCA}" dt="2026-05-26T18:34:37.573" v="36" actId="571"/>
-          <ac:spMkLst>
-            <pc:docMk/>
-            <pc:sldMk cId="0" sldId="262"/>
-            <ac:spMk id="29" creationId="{3E63E23E-796E-A83F-BE98-90D8F8520684}"/>
-          </ac:spMkLst>
-        </pc:spChg>
-        <pc:spChg chg="add mod">
-          <ac:chgData name="Nesibe Şeyma Can" userId="27782137dc423866" providerId="LiveId" clId="{1B49244D-AA4F-44AB-9AC2-08ADD29ACCCA}" dt="2026-05-26T18:34:37.573" v="36" actId="571"/>
-          <ac:spMkLst>
-            <pc:docMk/>
-            <pc:sldMk cId="0" sldId="262"/>
-            <ac:spMk id="30" creationId="{FE616E97-FC74-CC51-EE3C-53E3DB62A451}"/>
-          </ac:spMkLst>
-        </pc:spChg>
-      </pc:sldChg>
-      <pc:sldChg chg="addSp delSp modSp new mod">
-        <pc:chgData name="Nesibe Şeyma Can" userId="27782137dc423866" providerId="LiveId" clId="{1B49244D-AA4F-44AB-9AC2-08ADD29ACCCA}" dt="2026-05-26T18:41:18.136" v="135" actId="1076"/>
-        <pc:sldMkLst>
-          <pc:docMk/>
-          <pc:sldMk cId="4041353641" sldId="270"/>
-        </pc:sldMkLst>
-        <pc:spChg chg="add del mod">
-          <ac:chgData name="Nesibe Şeyma Can" userId="27782137dc423866" providerId="LiveId" clId="{1B49244D-AA4F-44AB-9AC2-08ADD29ACCCA}" dt="2026-05-26T18:36:50.849" v="42" actId="21"/>
-          <ac:spMkLst>
-            <pc:docMk/>
-            <pc:sldMk cId="4041353641" sldId="270"/>
-            <ac:spMk id="2" creationId="{ABEF4E29-CB8F-51B2-0BD6-1E3566972052}"/>
-          </ac:spMkLst>
-        </pc:spChg>
-        <pc:spChg chg="add mod">
-          <ac:chgData name="Nesibe Şeyma Can" userId="27782137dc423866" providerId="LiveId" clId="{1B49244D-AA4F-44AB-9AC2-08ADD29ACCCA}" dt="2026-05-26T18:41:18.136" v="135" actId="1076"/>
-          <ac:spMkLst>
-            <pc:docMk/>
-            <pc:sldMk cId="4041353641" sldId="270"/>
-            <ac:spMk id="5" creationId="{E11C3298-CECF-4392-2130-E82EFABC5219}"/>
-          </ac:spMkLst>
-        </pc:spChg>
-        <pc:picChg chg="add mod">
-          <ac:chgData name="Nesibe Şeyma Can" userId="27782137dc423866" providerId="LiveId" clId="{1B49244D-AA4F-44AB-9AC2-08ADD29ACCCA}" dt="2026-05-26T18:41:07.970" v="134" actId="34135"/>
-          <ac:picMkLst>
-            <pc:docMk/>
-            <pc:sldMk cId="4041353641" sldId="270"/>
-            <ac:picMk id="4" creationId="{D5558003-E0AD-26E6-1F89-0D65BE56AD32}"/>
-          </ac:picMkLst>
-        </pc:picChg>
-      </pc:sldChg>
-    </pc:docChg>
-  </pc:docChgLst>
-</pc:chgInfo>
-</file>
-
 <file path=ppt/notesMasters/notesMaster1.xml><?xml version="1.0" encoding="utf-8"?>
-<p:notesMaster xmlns:a="http://schemas.openxmlformats.org/drawingml/2006/main" xmlns:r="http://schemas.openxmlformats.org/officeDocument/2006/relationships" xmlns:p="http://schemas.openxmlformats.org/presentationml/2006/main">
+<p:notesMaster xmlns:a="http://schemas.openxmlformats.org/drawingml/2006/main" xmlns:p="http://schemas.openxmlformats.org/presentationml/2006/main" xmlns:r="http://schemas.openxmlformats.org/officeDocument/2006/relationships">
   <p:cSld>
     <p:bg>
       <p:bgRef idx="1001">
@@ -393,16 +142,241 @@
           <a:chExt cx="0" cy="0"/>
         </a:xfrm>
       </p:grpSpPr>
+      <p:sp>
+        <p:nvSpPr>
+          <p:cNvPr id="2" name="Header Placeholder 1"/>
+          <p:cNvSpPr>
+            <a:spLocks noGrp="1"/>
+          </p:cNvSpPr>
+          <p:nvPr>
+            <p:ph type="hdr" sz="quarter"/>
+          </p:nvPr>
+        </p:nvSpPr>
+        <p:spPr>
+          <a:xfrm>
+            <a:off x="0" y="0"/>
+            <a:ext cx="2971800" cy="457200"/>
+          </a:xfrm>
+          <a:prstGeom prst="rect">
+            <a:avLst/>
+          </a:prstGeom>
+        </p:spPr>
+        <p:txBody>
+          <a:bodyPr vert="horz" lIns="91440" tIns="45720" rIns="91440" bIns="45720" rtlCol="0"/>
+          <a:lstStyle>
+            <a:lvl1pPr algn="l">
+              <a:defRPr sz="1200"/>
+            </a:lvl1pPr>
+          </a:lstStyle>
+          <a:p>
+            <a:endParaRPr lang="en-US"/>
+          </a:p>
+        </p:txBody>
+      </p:sp>
+      <p:sp>
+        <p:nvSpPr>
+          <p:cNvPr id="3" name="Date Placeholder 2"/>
+          <p:cNvSpPr>
+            <a:spLocks noGrp="1"/>
+          </p:cNvSpPr>
+          <p:nvPr>
+            <p:ph type="dt" idx="1"/>
+          </p:nvPr>
+        </p:nvSpPr>
+        <p:spPr>
+          <a:xfrm>
+            <a:off x="3884613" y="0"/>
+            <a:ext cx="2971800" cy="457200"/>
+          </a:xfrm>
+          <a:prstGeom prst="rect">
+            <a:avLst/>
+          </a:prstGeom>
+        </p:spPr>
+        <p:txBody>
+          <a:bodyPr vert="horz" lIns="91440" tIns="45720" rIns="91440" bIns="45720" rtlCol="0"/>
+          <a:lstStyle>
+            <a:lvl1pPr algn="r">
+              <a:defRPr sz="1200"/>
+            </a:lvl1pPr>
+          </a:lstStyle>
+          <a:p>
+            <a:fld id="{0F89C1C7-3DCD-1040-A9CF-14679D8B5DDD}" type="datetimeFigureOut">
+              <a:rPr lang="en-US" smtClean="0"/>
+              <a:t>10/17/16</a:t>
+            </a:fld>
+            <a:endParaRPr lang="en-US"/>
+          </a:p>
+        </p:txBody>
+      </p:sp>
+      <p:sp>
+        <p:nvSpPr>
+          <p:cNvPr id="4" name="Slide Image Placeholder 3"/>
+          <p:cNvSpPr>
+            <a:spLocks noGrp="1" noRot="1" noChangeAspect="1"/>
+          </p:cNvSpPr>
+          <p:nvPr>
+            <p:ph type="sldImg" idx="2"/>
+          </p:nvPr>
+        </p:nvSpPr>
+        <p:spPr>
+          <a:xfrm>
+            <a:off x="1143000" y="685800"/>
+            <a:ext cx="4572000" cy="3429000"/>
+          </a:xfrm>
+          <a:prstGeom prst="rect">
+            <a:avLst/>
+          </a:prstGeom>
+          <a:noFill/>
+          <a:ln w="12700">
+            <a:solidFill>
+              <a:prstClr val="black"/>
+            </a:solidFill>
+          </a:ln>
+        </p:spPr>
+        <p:txBody>
+          <a:bodyPr vert="horz" lIns="91440" tIns="45720" rIns="91440" bIns="45720" rtlCol="0" anchor="ctr"/>
+          <a:lstStyle/>
+          <a:p>
+            <a:endParaRPr lang="en-US"/>
+          </a:p>
+        </p:txBody>
+      </p:sp>
+      <p:sp>
+        <p:nvSpPr>
+          <p:cNvPr id="5" name="Notes Placeholder 4"/>
+          <p:cNvSpPr>
+            <a:spLocks noGrp="1"/>
+          </p:cNvSpPr>
+          <p:nvPr>
+            <p:ph type="body" sz="quarter" idx="3"/>
+          </p:nvPr>
+        </p:nvSpPr>
+        <p:spPr>
+          <a:xfrm>
+            <a:off x="685800" y="4343400"/>
+            <a:ext cx="5486400" cy="4114800"/>
+          </a:xfrm>
+          <a:prstGeom prst="rect">
+            <a:avLst/>
+          </a:prstGeom>
+        </p:spPr>
+        <p:txBody>
+          <a:bodyPr vert="horz" lIns="91440" tIns="45720" rIns="91440" bIns="45720" rtlCol="0"/>
+          <a:lstStyle/>
+          <a:p>
+            <a:pPr lvl="0"/>
+            <a:r>
+              <a:rPr lang="en-US" smtClean="0"/>
+              <a:t>Click to edit Master text styles</a:t>
+            </a:r>
+          </a:p>
+          <a:p>
+            <a:pPr lvl="1"/>
+            <a:r>
+              <a:rPr lang="en-US" smtClean="0"/>
+              <a:t>Second level</a:t>
+            </a:r>
+          </a:p>
+          <a:p>
+            <a:pPr lvl="2"/>
+            <a:r>
+              <a:rPr lang="en-US" smtClean="0"/>
+              <a:t>Third level</a:t>
+            </a:r>
+          </a:p>
+          <a:p>
+            <a:pPr lvl="3"/>
+            <a:r>
+              <a:rPr lang="en-US" smtClean="0"/>
+              <a:t>Fourth level</a:t>
+            </a:r>
+          </a:p>
+          <a:p>
+            <a:pPr lvl="4"/>
+            <a:r>
+              <a:rPr lang="en-US" smtClean="0"/>
+              <a:t>Fifth level</a:t>
+            </a:r>
+            <a:endParaRPr lang="en-US"/>
+          </a:p>
+        </p:txBody>
+      </p:sp>
+      <p:sp>
+        <p:nvSpPr>
+          <p:cNvPr id="6" name="Footer Placeholder 5"/>
+          <p:cNvSpPr>
+            <a:spLocks noGrp="1"/>
+          </p:cNvSpPr>
+          <p:nvPr>
+            <p:ph type="ftr" sz="quarter" idx="4"/>
+          </p:nvPr>
+        </p:nvSpPr>
+        <p:spPr>
+          <a:xfrm>
+            <a:off x="0" y="8685213"/>
+            <a:ext cx="2971800" cy="457200"/>
+          </a:xfrm>
+          <a:prstGeom prst="rect">
+            <a:avLst/>
+          </a:prstGeom>
+        </p:spPr>
+        <p:txBody>
+          <a:bodyPr vert="horz" lIns="91440" tIns="45720" rIns="91440" bIns="45720" rtlCol="0" anchor="b"/>
+          <a:lstStyle>
+            <a:lvl1pPr algn="l">
+              <a:defRPr sz="1200"/>
+            </a:lvl1pPr>
+          </a:lstStyle>
+          <a:p>
+            <a:endParaRPr lang="en-US"/>
+          </a:p>
+        </p:txBody>
+      </p:sp>
+      <p:sp>
+        <p:nvSpPr>
+          <p:cNvPr id="7" name="Slide Number Placeholder 6"/>
+          <p:cNvSpPr>
+            <a:spLocks noGrp="1"/>
+          </p:cNvSpPr>
+          <p:nvPr>
+            <p:ph type="sldNum" sz="quarter" idx="5"/>
+          </p:nvPr>
+        </p:nvSpPr>
+        <p:spPr>
+          <a:xfrm>
+            <a:off x="3884613" y="8685213"/>
+            <a:ext cx="2971800" cy="457200"/>
+          </a:xfrm>
+          <a:prstGeom prst="rect">
+            <a:avLst/>
+          </a:prstGeom>
+        </p:spPr>
+        <p:txBody>
+          <a:bodyPr vert="horz" lIns="91440" tIns="45720" rIns="91440" bIns="45720" rtlCol="0" anchor="b"/>
+          <a:lstStyle>
+            <a:lvl1pPr algn="r">
+              <a:defRPr sz="1200"/>
+            </a:lvl1pPr>
+          </a:lstStyle>
+          <a:p>
+            <a:fld id="{BB5E49A5-4136-284D-997B-48E1D791AD67}" type="slidenum">
+              <a:rPr lang="en-US" smtClean="0"/>
+              <a:t>‹#›</a:t>
+            </a:fld>
+            <a:endParaRPr lang="en-US"/>
+          </a:p>
+        </p:txBody>
+      </p:sp>
     </p:spTree>
     <p:extLst>
       <p:ext uri="{BB962C8B-B14F-4D97-AF65-F5344CB8AC3E}">
-        <p14:creationId xmlns:p14="http://schemas.microsoft.com/office/powerpoint/2010/main" val="122642532"/>
+        <p14:creationId xmlns:p14="http://schemas.microsoft.com/office/powerpoint/2010/main" val="2623252185"/>
       </p:ext>
     </p:extLst>
   </p:cSld>
   <p:clrMap bg1="lt1" tx1="dk1" bg2="lt2" tx2="dk2" accent1="accent1" accent2="accent2" accent3="accent3" accent4="accent4" accent5="accent5" accent6="accent6" hlink="hlink" folHlink="folHlink"/>
   <p:notesStyle>
-    <a:lvl1pPr marL="0" algn="l" defTabSz="914400" rtl="0" eaLnBrk="1" latinLnBrk="0" hangingPunct="1">
+    <a:lvl1pPr marL="0" algn="l" defTabSz="457200" rtl="0" eaLnBrk="1" latinLnBrk="0" hangingPunct="1">
       <a:defRPr sz="1200" kern="1200">
         <a:solidFill>
           <a:schemeClr val="tx1"/>
@@ -412,7 +386,7 @@
         <a:cs typeface="+mn-cs"/>
       </a:defRPr>
     </a:lvl1pPr>
-    <a:lvl2pPr marL="457200" algn="l" defTabSz="914400" rtl="0" eaLnBrk="1" latinLnBrk="0" hangingPunct="1">
+    <a:lvl2pPr marL="457200" algn="l" defTabSz="457200" rtl="0" eaLnBrk="1" latinLnBrk="0" hangingPunct="1">
       <a:defRPr sz="1200" kern="1200">
         <a:solidFill>
           <a:schemeClr val="tx1"/>
@@ -422,7 +396,7 @@
         <a:cs typeface="+mn-cs"/>
       </a:defRPr>
     </a:lvl2pPr>
-    <a:lvl3pPr marL="914400" algn="l" defTabSz="914400" rtl="0" eaLnBrk="1" latinLnBrk="0" hangingPunct="1">
+    <a:lvl3pPr marL="914400" algn="l" defTabSz="457200" rtl="0" eaLnBrk="1" latinLnBrk="0" hangingPunct="1">
       <a:defRPr sz="1200" kern="1200">
         <a:solidFill>
           <a:schemeClr val="tx1"/>
@@ -432,7 +406,7 @@
         <a:cs typeface="+mn-cs"/>
       </a:defRPr>
     </a:lvl3pPr>
-    <a:lvl4pPr marL="1371600" algn="l" defTabSz="914400" rtl="0" eaLnBrk="1" latinLnBrk="0" hangingPunct="1">
+    <a:lvl4pPr marL="1371600" algn="l" defTabSz="457200" rtl="0" eaLnBrk="1" latinLnBrk="0" hangingPunct="1">
       <a:defRPr sz="1200" kern="1200">
         <a:solidFill>
           <a:schemeClr val="tx1"/>
@@ -442,7 +416,7 @@
         <a:cs typeface="+mn-cs"/>
       </a:defRPr>
     </a:lvl4pPr>
-    <a:lvl5pPr marL="1828800" algn="l" defTabSz="914400" rtl="0" eaLnBrk="1" latinLnBrk="0" hangingPunct="1">
+    <a:lvl5pPr marL="1828800" algn="l" defTabSz="457200" rtl="0" eaLnBrk="1" latinLnBrk="0" hangingPunct="1">
       <a:defRPr sz="1200" kern="1200">
         <a:solidFill>
           <a:schemeClr val="tx1"/>
@@ -452,7 +426,7 @@
         <a:cs typeface="+mn-cs"/>
       </a:defRPr>
     </a:lvl5pPr>
-    <a:lvl6pPr marL="2286000" algn="l" defTabSz="914400" rtl="0" eaLnBrk="1" latinLnBrk="0" hangingPunct="1">
+    <a:lvl6pPr marL="2286000" algn="l" defTabSz="457200" rtl="0" eaLnBrk="1" latinLnBrk="0" hangingPunct="1">
       <a:defRPr sz="1200" kern="1200">
         <a:solidFill>
           <a:schemeClr val="tx1"/>
@@ -462,7 +436,7 @@
         <a:cs typeface="+mn-cs"/>
       </a:defRPr>
     </a:lvl6pPr>
-    <a:lvl7pPr marL="2743200" algn="l" defTabSz="914400" rtl="0" eaLnBrk="1" latinLnBrk="0" hangingPunct="1">
+    <a:lvl7pPr marL="2743200" algn="l" defTabSz="457200" rtl="0" eaLnBrk="1" latinLnBrk="0" hangingPunct="1">
       <a:defRPr sz="1200" kern="1200">
         <a:solidFill>
           <a:schemeClr val="tx1"/>
@@ -472,7 +446,7 @@
         <a:cs typeface="+mn-cs"/>
       </a:defRPr>
     </a:lvl7pPr>
-    <a:lvl8pPr marL="3200400" algn="l" defTabSz="914400" rtl="0" eaLnBrk="1" latinLnBrk="0" hangingPunct="1">
+    <a:lvl8pPr marL="3200400" algn="l" defTabSz="457200" rtl="0" eaLnBrk="1" latinLnBrk="0" hangingPunct="1">
       <a:defRPr sz="1200" kern="1200">
         <a:solidFill>
           <a:schemeClr val="tx1"/>
@@ -482,7 +456,7 @@
         <a:cs typeface="+mn-cs"/>
       </a:defRPr>
     </a:lvl8pPr>
-    <a:lvl9pPr marL="3657600" algn="l" defTabSz="914400" rtl="0" eaLnBrk="1" latinLnBrk="0" hangingPunct="1">
+    <a:lvl9pPr marL="3657600" algn="l" defTabSz="457200" rtl="0" eaLnBrk="1" latinLnBrk="0" hangingPunct="1">
       <a:defRPr sz="1200" kern="1200">
         <a:solidFill>
           <a:schemeClr val="tx1"/>
@@ -497,7 +471,7 @@
 </file>
 
 <file path=ppt/notesSlides/notesSlide1.xml><?xml version="1.0" encoding="utf-8"?>
-<p:notes xmlns:a="http://schemas.openxmlformats.org/drawingml/2006/main" xmlns:r="http://schemas.openxmlformats.org/officeDocument/2006/relationships" xmlns:p="http://schemas.openxmlformats.org/presentationml/2006/main">
+<p:notes xmlns:a="http://schemas.openxmlformats.org/drawingml/2006/main" xmlns:p="http://schemas.openxmlformats.org/presentationml/2006/main" xmlns:r="http://schemas.openxmlformats.org/officeDocument/2006/relationships">
   <p:cSld>
     <p:spTree>
       <p:nvGrpSpPr>
@@ -517,7 +491,7 @@
         <p:nvSpPr>
           <p:cNvPr id="2" name="Slide Image Placeholder 1"/>
           <p:cNvSpPr>
-            <a:spLocks noGrp="1" noRot="1" noChangeAspect="1"/>
+            <a:spLocks noGrp="1"/>
           </p:cNvSpPr>
           <p:nvPr>
             <p:ph type="sldImg" idx="2"/>
@@ -532,7 +506,7 @@
             <a:spLocks noGrp="1"/>
           </p:cNvSpPr>
           <p:nvPr>
-            <p:ph type="body" sz="quarter" idx="3"/>
+            <p:ph type="body" idx="3" sz="quarter"/>
           </p:nvPr>
         </p:nvSpPr>
         <p:spPr/>
@@ -553,7 +527,7 @@
             <a:spLocks noGrp="1"/>
           </p:cNvSpPr>
           <p:nvPr>
-            <p:ph type="sldNum" sz="quarter" idx="5"/>
+            <p:ph type="sldNum" idx="5" sz="quarter"/>
           </p:nvPr>
         </p:nvSpPr>
         <p:spPr/>
@@ -567,7 +541,7 @@
 </file>
 
 <file path=ppt/notesSlides/notesSlide10.xml><?xml version="1.0" encoding="utf-8"?>
-<p:notes xmlns:a="http://schemas.openxmlformats.org/drawingml/2006/main" xmlns:r="http://schemas.openxmlformats.org/officeDocument/2006/relationships" xmlns:p="http://schemas.openxmlformats.org/presentationml/2006/main">
+<p:notes xmlns:a="http://schemas.openxmlformats.org/drawingml/2006/main" xmlns:p="http://schemas.openxmlformats.org/presentationml/2006/main" xmlns:r="http://schemas.openxmlformats.org/officeDocument/2006/relationships">
   <p:cSld>
     <p:spTree>
       <p:nvGrpSpPr>
@@ -587,7 +561,7 @@
         <p:nvSpPr>
           <p:cNvPr id="2" name="Slide Image Placeholder 1"/>
           <p:cNvSpPr>
-            <a:spLocks noGrp="1" noRot="1" noChangeAspect="1"/>
+            <a:spLocks noGrp="1"/>
           </p:cNvSpPr>
           <p:nvPr>
             <p:ph type="sldImg" idx="2"/>
@@ -602,7 +576,7 @@
             <a:spLocks noGrp="1"/>
           </p:cNvSpPr>
           <p:nvPr>
-            <p:ph type="body" sz="quarter" idx="3"/>
+            <p:ph type="body" idx="3" sz="quarter"/>
           </p:nvPr>
         </p:nvSpPr>
         <p:spPr/>
@@ -623,7 +597,7 @@
             <a:spLocks noGrp="1"/>
           </p:cNvSpPr>
           <p:nvPr>
-            <p:ph type="sldNum" sz="quarter" idx="5"/>
+            <p:ph type="sldNum" idx="5" sz="quarter"/>
           </p:nvPr>
         </p:nvSpPr>
         <p:spPr/>
@@ -637,7 +611,7 @@
 </file>
 
 <file path=ppt/notesSlides/notesSlide11.xml><?xml version="1.0" encoding="utf-8"?>
-<p:notes xmlns:a="http://schemas.openxmlformats.org/drawingml/2006/main" xmlns:r="http://schemas.openxmlformats.org/officeDocument/2006/relationships" xmlns:p="http://schemas.openxmlformats.org/presentationml/2006/main">
+<p:notes xmlns:a="http://schemas.openxmlformats.org/drawingml/2006/main" xmlns:p="http://schemas.openxmlformats.org/presentationml/2006/main" xmlns:r="http://schemas.openxmlformats.org/officeDocument/2006/relationships">
   <p:cSld>
     <p:spTree>
       <p:nvGrpSpPr>
@@ -657,7 +631,7 @@
         <p:nvSpPr>
           <p:cNvPr id="2" name="Slide Image Placeholder 1"/>
           <p:cNvSpPr>
-            <a:spLocks noGrp="1" noRot="1" noChangeAspect="1"/>
+            <a:spLocks noGrp="1"/>
           </p:cNvSpPr>
           <p:nvPr>
             <p:ph type="sldImg" idx="2"/>
@@ -672,7 +646,7 @@
             <a:spLocks noGrp="1"/>
           </p:cNvSpPr>
           <p:nvPr>
-            <p:ph type="body" sz="quarter" idx="3"/>
+            <p:ph type="body" idx="3" sz="quarter"/>
           </p:nvPr>
         </p:nvSpPr>
         <p:spPr/>
@@ -693,7 +667,7 @@
             <a:spLocks noGrp="1"/>
           </p:cNvSpPr>
           <p:nvPr>
-            <p:ph type="sldNum" sz="quarter" idx="5"/>
+            <p:ph type="sldNum" idx="5" sz="quarter"/>
           </p:nvPr>
         </p:nvSpPr>
         <p:spPr/>
@@ -707,7 +681,7 @@
 </file>
 
 <file path=ppt/notesSlides/notesSlide12.xml><?xml version="1.0" encoding="utf-8"?>
-<p:notes xmlns:a="http://schemas.openxmlformats.org/drawingml/2006/main" xmlns:r="http://schemas.openxmlformats.org/officeDocument/2006/relationships" xmlns:p="http://schemas.openxmlformats.org/presentationml/2006/main">
+<p:notes xmlns:a="http://schemas.openxmlformats.org/drawingml/2006/main" xmlns:p="http://schemas.openxmlformats.org/presentationml/2006/main" xmlns:r="http://schemas.openxmlformats.org/officeDocument/2006/relationships">
   <p:cSld>
     <p:spTree>
       <p:nvGrpSpPr>
@@ -727,7 +701,7 @@
         <p:nvSpPr>
           <p:cNvPr id="2" name="Slide Image Placeholder 1"/>
           <p:cNvSpPr>
-            <a:spLocks noGrp="1" noRot="1" noChangeAspect="1"/>
+            <a:spLocks noGrp="1"/>
           </p:cNvSpPr>
           <p:nvPr>
             <p:ph type="sldImg" idx="2"/>
@@ -742,7 +716,7 @@
             <a:spLocks noGrp="1"/>
           </p:cNvSpPr>
           <p:nvPr>
-            <p:ph type="body" sz="quarter" idx="3"/>
+            <p:ph type="body" idx="3" sz="quarter"/>
           </p:nvPr>
         </p:nvSpPr>
         <p:spPr/>
@@ -763,7 +737,7 @@
             <a:spLocks noGrp="1"/>
           </p:cNvSpPr>
           <p:nvPr>
-            <p:ph type="sldNum" sz="quarter" idx="5"/>
+            <p:ph type="sldNum" idx="5" sz="quarter"/>
           </p:nvPr>
         </p:nvSpPr>
         <p:spPr/>
@@ -777,7 +751,7 @@
 </file>
 
 <file path=ppt/notesSlides/notesSlide13.xml><?xml version="1.0" encoding="utf-8"?>
-<p:notes xmlns:a="http://schemas.openxmlformats.org/drawingml/2006/main" xmlns:r="http://schemas.openxmlformats.org/officeDocument/2006/relationships" xmlns:p="http://schemas.openxmlformats.org/presentationml/2006/main">
+<p:notes xmlns:a="http://schemas.openxmlformats.org/drawingml/2006/main" xmlns:p="http://schemas.openxmlformats.org/presentationml/2006/main" xmlns:r="http://schemas.openxmlformats.org/officeDocument/2006/relationships">
   <p:cSld>
     <p:spTree>
       <p:nvGrpSpPr>
@@ -797,7 +771,7 @@
         <p:nvSpPr>
           <p:cNvPr id="2" name="Slide Image Placeholder 1"/>
           <p:cNvSpPr>
-            <a:spLocks noGrp="1" noRot="1" noChangeAspect="1"/>
+            <a:spLocks noGrp="1"/>
           </p:cNvSpPr>
           <p:nvPr>
             <p:ph type="sldImg" idx="2"/>
@@ -812,7 +786,7 @@
             <a:spLocks noGrp="1"/>
           </p:cNvSpPr>
           <p:nvPr>
-            <p:ph type="body" sz="quarter" idx="3"/>
+            <p:ph type="body" idx="3" sz="quarter"/>
           </p:nvPr>
         </p:nvSpPr>
         <p:spPr/>
@@ -821,7 +795,7 @@
           <a:lstStyle/>
           <a:p>
             <a:r>
-              <a:t>Burada temel bir etik ikilemle karşı karşıyayız. Recall'u artırmak — yani daha az saldırı kaçırmak — kaçınılmaz olarak daha fazla yanlış alarmı beraberinde getirir ve masum kullanıcıları etkiler. Tersine precision'ı artırmak daha az yanlış alarm anlamına gelir ama bazı gerçek saldırılar atlanır. Bu denge, sistemin kullanıldığı bağlama ve risk iştahına göre belirlenmelidir.</a:t>
+              <a:t>Burada temel bir etik ikilemle karşı karşıyayız. Recall'u artırmak — yani daha az saldırı kaçırmak — kaçınılmaz olarak daha fazla yanlış alarmı beraberinde getirir. Tersine precision'ı artırmak daha az yanlış alarm anlamına gelir ama bazı gerçek saldırılar atlanır. Slayttaki sarı kutudaki cümle bu projenin en olgun bulgusudur: eşik değeri kararı teknik değil, etik bir karardır.</a:t>
             </a:r>
           </a:p>
         </p:txBody>
@@ -833,7 +807,7 @@
             <a:spLocks noGrp="1"/>
           </p:cNvSpPr>
           <p:nvPr>
-            <p:ph type="sldNum" sz="quarter" idx="5"/>
+            <p:ph type="sldNum" idx="5" sz="quarter"/>
           </p:nvPr>
         </p:nvSpPr>
         <p:spPr/>
@@ -847,7 +821,7 @@
 </file>
 
 <file path=ppt/notesSlides/notesSlide14.xml><?xml version="1.0" encoding="utf-8"?>
-<p:notes xmlns:a="http://schemas.openxmlformats.org/drawingml/2006/main" xmlns:r="http://schemas.openxmlformats.org/officeDocument/2006/relationships" xmlns:p="http://schemas.openxmlformats.org/presentationml/2006/main">
+<p:notes xmlns:a="http://schemas.openxmlformats.org/drawingml/2006/main" xmlns:p="http://schemas.openxmlformats.org/presentationml/2006/main" xmlns:r="http://schemas.openxmlformats.org/officeDocument/2006/relationships">
   <p:cSld>
     <p:spTree>
       <p:nvGrpSpPr>
@@ -867,7 +841,7 @@
         <p:nvSpPr>
           <p:cNvPr id="2" name="Slide Image Placeholder 1"/>
           <p:cNvSpPr>
-            <a:spLocks noGrp="1" noRot="1" noChangeAspect="1"/>
+            <a:spLocks noGrp="1"/>
           </p:cNvSpPr>
           <p:nvPr>
             <p:ph type="sldImg" idx="2"/>
@@ -882,7 +856,7 @@
             <a:spLocks noGrp="1"/>
           </p:cNvSpPr>
           <p:nvPr>
-            <p:ph type="body" sz="quarter" idx="3"/>
+            <p:ph type="body" idx="3" sz="quarter"/>
           </p:nvPr>
         </p:nvSpPr>
         <p:spPr/>
@@ -903,7 +877,7 @@
             <a:spLocks noGrp="1"/>
           </p:cNvSpPr>
           <p:nvPr>
-            <p:ph type="sldNum" sz="quarter" idx="5"/>
+            <p:ph type="sldNum" idx="5" sz="quarter"/>
           </p:nvPr>
         </p:nvSpPr>
         <p:spPr/>
@@ -917,7 +891,7 @@
 </file>
 
 <file path=ppt/notesSlides/notesSlide2.xml><?xml version="1.0" encoding="utf-8"?>
-<p:notes xmlns:a="http://schemas.openxmlformats.org/drawingml/2006/main" xmlns:r="http://schemas.openxmlformats.org/officeDocument/2006/relationships" xmlns:p="http://schemas.openxmlformats.org/presentationml/2006/main">
+<p:notes xmlns:a="http://schemas.openxmlformats.org/drawingml/2006/main" xmlns:p="http://schemas.openxmlformats.org/presentationml/2006/main" xmlns:r="http://schemas.openxmlformats.org/officeDocument/2006/relationships">
   <p:cSld>
     <p:spTree>
       <p:nvGrpSpPr>
@@ -937,7 +911,7 @@
         <p:nvSpPr>
           <p:cNvPr id="2" name="Slide Image Placeholder 1"/>
           <p:cNvSpPr>
-            <a:spLocks noGrp="1" noRot="1" noChangeAspect="1"/>
+            <a:spLocks noGrp="1"/>
           </p:cNvSpPr>
           <p:nvPr>
             <p:ph type="sldImg" idx="2"/>
@@ -952,7 +926,7 @@
             <a:spLocks noGrp="1"/>
           </p:cNvSpPr>
           <p:nvPr>
-            <p:ph type="body" sz="quarter" idx="3"/>
+            <p:ph type="body" idx="3" sz="quarter"/>
           </p:nvPr>
         </p:nvSpPr>
         <p:spPr/>
@@ -973,7 +947,7 @@
             <a:spLocks noGrp="1"/>
           </p:cNvSpPr>
           <p:nvPr>
-            <p:ph type="sldNum" sz="quarter" idx="5"/>
+            <p:ph type="sldNum" idx="5" sz="quarter"/>
           </p:nvPr>
         </p:nvSpPr>
         <p:spPr/>
@@ -987,7 +961,7 @@
 </file>
 
 <file path=ppt/notesSlides/notesSlide3.xml><?xml version="1.0" encoding="utf-8"?>
-<p:notes xmlns:a="http://schemas.openxmlformats.org/drawingml/2006/main" xmlns:r="http://schemas.openxmlformats.org/officeDocument/2006/relationships" xmlns:p="http://schemas.openxmlformats.org/presentationml/2006/main">
+<p:notes xmlns:a="http://schemas.openxmlformats.org/drawingml/2006/main" xmlns:p="http://schemas.openxmlformats.org/presentationml/2006/main" xmlns:r="http://schemas.openxmlformats.org/officeDocument/2006/relationships">
   <p:cSld>
     <p:spTree>
       <p:nvGrpSpPr>
@@ -1007,7 +981,7 @@
         <p:nvSpPr>
           <p:cNvPr id="2" name="Slide Image Placeholder 1"/>
           <p:cNvSpPr>
-            <a:spLocks noGrp="1" noRot="1" noChangeAspect="1"/>
+            <a:spLocks noGrp="1"/>
           </p:cNvSpPr>
           <p:nvPr>
             <p:ph type="sldImg" idx="2"/>
@@ -1022,7 +996,7 @@
             <a:spLocks noGrp="1"/>
           </p:cNvSpPr>
           <p:nvPr>
-            <p:ph type="body" sz="quarter" idx="3"/>
+            <p:ph type="body" idx="3" sz="quarter"/>
           </p:nvPr>
         </p:nvSpPr>
         <p:spPr/>
@@ -1043,7 +1017,7 @@
             <a:spLocks noGrp="1"/>
           </p:cNvSpPr>
           <p:nvPr>
-            <p:ph type="sldNum" sz="quarter" idx="5"/>
+            <p:ph type="sldNum" idx="5" sz="quarter"/>
           </p:nvPr>
         </p:nvSpPr>
         <p:spPr/>
@@ -1057,7 +1031,7 @@
 </file>
 
 <file path=ppt/notesSlides/notesSlide4.xml><?xml version="1.0" encoding="utf-8"?>
-<p:notes xmlns:a="http://schemas.openxmlformats.org/drawingml/2006/main" xmlns:r="http://schemas.openxmlformats.org/officeDocument/2006/relationships" xmlns:p="http://schemas.openxmlformats.org/presentationml/2006/main">
+<p:notes xmlns:a="http://schemas.openxmlformats.org/drawingml/2006/main" xmlns:p="http://schemas.openxmlformats.org/presentationml/2006/main" xmlns:r="http://schemas.openxmlformats.org/officeDocument/2006/relationships">
   <p:cSld>
     <p:spTree>
       <p:nvGrpSpPr>
@@ -1077,7 +1051,7 @@
         <p:nvSpPr>
           <p:cNvPr id="2" name="Slide Image Placeholder 1"/>
           <p:cNvSpPr>
-            <a:spLocks noGrp="1" noRot="1" noChangeAspect="1"/>
+            <a:spLocks noGrp="1"/>
           </p:cNvSpPr>
           <p:nvPr>
             <p:ph type="sldImg" idx="2"/>
@@ -1092,7 +1066,7 @@
             <a:spLocks noGrp="1"/>
           </p:cNvSpPr>
           <p:nvPr>
-            <p:ph type="body" sz="quarter" idx="3"/>
+            <p:ph type="body" idx="3" sz="quarter"/>
           </p:nvPr>
         </p:nvSpPr>
         <p:spPr/>
@@ -1113,7 +1087,7 @@
             <a:spLocks noGrp="1"/>
           </p:cNvSpPr>
           <p:nvPr>
-            <p:ph type="sldNum" sz="quarter" idx="5"/>
+            <p:ph type="sldNum" idx="5" sz="quarter"/>
           </p:nvPr>
         </p:nvSpPr>
         <p:spPr/>
@@ -1127,7 +1101,7 @@
 </file>
 
 <file path=ppt/notesSlides/notesSlide5.xml><?xml version="1.0" encoding="utf-8"?>
-<p:notes xmlns:a="http://schemas.openxmlformats.org/drawingml/2006/main" xmlns:r="http://schemas.openxmlformats.org/officeDocument/2006/relationships" xmlns:p="http://schemas.openxmlformats.org/presentationml/2006/main">
+<p:notes xmlns:a="http://schemas.openxmlformats.org/drawingml/2006/main" xmlns:p="http://schemas.openxmlformats.org/presentationml/2006/main" xmlns:r="http://schemas.openxmlformats.org/officeDocument/2006/relationships">
   <p:cSld>
     <p:spTree>
       <p:nvGrpSpPr>
@@ -1147,7 +1121,7 @@
         <p:nvSpPr>
           <p:cNvPr id="2" name="Slide Image Placeholder 1"/>
           <p:cNvSpPr>
-            <a:spLocks noGrp="1" noRot="1" noChangeAspect="1"/>
+            <a:spLocks noGrp="1"/>
           </p:cNvSpPr>
           <p:nvPr>
             <p:ph type="sldImg" idx="2"/>
@@ -1162,7 +1136,7 @@
             <a:spLocks noGrp="1"/>
           </p:cNvSpPr>
           <p:nvPr>
-            <p:ph type="body" sz="quarter" idx="3"/>
+            <p:ph type="body" idx="3" sz="quarter"/>
           </p:nvPr>
         </p:nvSpPr>
         <p:spPr/>
@@ -1183,7 +1157,7 @@
             <a:spLocks noGrp="1"/>
           </p:cNvSpPr>
           <p:nvPr>
-            <p:ph type="sldNum" sz="quarter" idx="5"/>
+            <p:ph type="sldNum" idx="5" sz="quarter"/>
           </p:nvPr>
         </p:nvSpPr>
         <p:spPr/>
@@ -1197,7 +1171,7 @@
 </file>
 
 <file path=ppt/notesSlides/notesSlide6.xml><?xml version="1.0" encoding="utf-8"?>
-<p:notes xmlns:a="http://schemas.openxmlformats.org/drawingml/2006/main" xmlns:r="http://schemas.openxmlformats.org/officeDocument/2006/relationships" xmlns:p="http://schemas.openxmlformats.org/presentationml/2006/main">
+<p:notes xmlns:a="http://schemas.openxmlformats.org/drawingml/2006/main" xmlns:p="http://schemas.openxmlformats.org/presentationml/2006/main" xmlns:r="http://schemas.openxmlformats.org/officeDocument/2006/relationships">
   <p:cSld>
     <p:spTree>
       <p:nvGrpSpPr>
@@ -1217,7 +1191,7 @@
         <p:nvSpPr>
           <p:cNvPr id="2" name="Slide Image Placeholder 1"/>
           <p:cNvSpPr>
-            <a:spLocks noGrp="1" noRot="1" noChangeAspect="1"/>
+            <a:spLocks noGrp="1"/>
           </p:cNvSpPr>
           <p:nvPr>
             <p:ph type="sldImg" idx="2"/>
@@ -1232,7 +1206,7 @@
             <a:spLocks noGrp="1"/>
           </p:cNvSpPr>
           <p:nvPr>
-            <p:ph type="body" sz="quarter" idx="3"/>
+            <p:ph type="body" idx="3" sz="quarter"/>
           </p:nvPr>
         </p:nvSpPr>
         <p:spPr/>
@@ -1253,7 +1227,7 @@
             <a:spLocks noGrp="1"/>
           </p:cNvSpPr>
           <p:nvPr>
-            <p:ph type="sldNum" sz="quarter" idx="5"/>
+            <p:ph type="sldNum" idx="5" sz="quarter"/>
           </p:nvPr>
         </p:nvSpPr>
         <p:spPr/>
@@ -1267,7 +1241,7 @@
 </file>
 
 <file path=ppt/notesSlides/notesSlide7.xml><?xml version="1.0" encoding="utf-8"?>
-<p:notes xmlns:a="http://schemas.openxmlformats.org/drawingml/2006/main" xmlns:r="http://schemas.openxmlformats.org/officeDocument/2006/relationships" xmlns:p="http://schemas.openxmlformats.org/presentationml/2006/main">
+<p:notes xmlns:a="http://schemas.openxmlformats.org/drawingml/2006/main" xmlns:p="http://schemas.openxmlformats.org/presentationml/2006/main" xmlns:r="http://schemas.openxmlformats.org/officeDocument/2006/relationships">
   <p:cSld>
     <p:spTree>
       <p:nvGrpSpPr>
@@ -1287,7 +1261,7 @@
         <p:nvSpPr>
           <p:cNvPr id="2" name="Slide Image Placeholder 1"/>
           <p:cNvSpPr>
-            <a:spLocks noGrp="1" noRot="1" noChangeAspect="1"/>
+            <a:spLocks noGrp="1"/>
           </p:cNvSpPr>
           <p:nvPr>
             <p:ph type="sldImg" idx="2"/>
@@ -1302,7 +1276,7 @@
             <a:spLocks noGrp="1"/>
           </p:cNvSpPr>
           <p:nvPr>
-            <p:ph type="body" sz="quarter" idx="3"/>
+            <p:ph type="body" idx="3" sz="quarter"/>
           </p:nvPr>
         </p:nvSpPr>
         <p:spPr/>
@@ -1311,7 +1285,7 @@
           <a:lstStyle/>
           <a:p>
             <a:r>
-              <a:t>Metodolojimiz beş adımdan oluşuyor. Veriyi yükledikten sonra kategorik değişkenleri sayısala çevirdik, standartlaştırdık ve eksik değerleri medyanla doldurduk. Model olarak Random Forest seçtik çünkü hem yüksek performanslı hem de yorumlanabilir bir modeldir. Son adımda salt teknik değerlendirmenin ötesine geçerek etik ve mahremiyet boyutunu analiz ettik.</a:t>
+              <a:t>Metodolojimiz beş adımdan oluşuyor. Model olarak Random Forest seçtik çünkü hem yüksek performanslı hem de yorumlanabilirdir. StandardScaler'ı RF için değil, pipeline standardizasyonu amacıyla ekledik — bu önemli bir teknik ayrımdır. Son adımda salt teknik değerlendirmenin ötesine geçerek etik ve mahremiyet boyutunu analiz ettik.</a:t>
             </a:r>
           </a:p>
         </p:txBody>
@@ -1323,7 +1297,7 @@
             <a:spLocks noGrp="1"/>
           </p:cNvSpPr>
           <p:nvPr>
-            <p:ph type="sldNum" sz="quarter" idx="5"/>
+            <p:ph type="sldNum" idx="5" sz="quarter"/>
           </p:nvPr>
         </p:nvSpPr>
         <p:spPr/>
@@ -1337,7 +1311,7 @@
 </file>
 
 <file path=ppt/notesSlides/notesSlide8.xml><?xml version="1.0" encoding="utf-8"?>
-<p:notes xmlns:a="http://schemas.openxmlformats.org/drawingml/2006/main" xmlns:r="http://schemas.openxmlformats.org/officeDocument/2006/relationships" xmlns:p="http://schemas.openxmlformats.org/presentationml/2006/main">
+<p:notes xmlns:a="http://schemas.openxmlformats.org/drawingml/2006/main" xmlns:p="http://schemas.openxmlformats.org/presentationml/2006/main" xmlns:r="http://schemas.openxmlformats.org/officeDocument/2006/relationships">
   <p:cSld>
     <p:spTree>
       <p:nvGrpSpPr>
@@ -1357,7 +1331,7 @@
         <p:nvSpPr>
           <p:cNvPr id="2" name="Slide Image Placeholder 1"/>
           <p:cNvSpPr>
-            <a:spLocks noGrp="1" noRot="1" noChangeAspect="1"/>
+            <a:spLocks noGrp="1"/>
           </p:cNvSpPr>
           <p:nvPr>
             <p:ph type="sldImg" idx="2"/>
@@ -1372,7 +1346,7 @@
             <a:spLocks noGrp="1"/>
           </p:cNvSpPr>
           <p:nvPr>
-            <p:ph type="body" sz="quarter" idx="3"/>
+            <p:ph type="body" idx="3" sz="quarter"/>
           </p:nvPr>
         </p:nvSpPr>
         <p:spPr/>
@@ -1393,7 +1367,7 @@
             <a:spLocks noGrp="1"/>
           </p:cNvSpPr>
           <p:nvPr>
-            <p:ph type="sldNum" sz="quarter" idx="5"/>
+            <p:ph type="sldNum" idx="5" sz="quarter"/>
           </p:nvPr>
         </p:nvSpPr>
         <p:spPr/>
@@ -1407,7 +1381,7 @@
 </file>
 
 <file path=ppt/notesSlides/notesSlide9.xml><?xml version="1.0" encoding="utf-8"?>
-<p:notes xmlns:a="http://schemas.openxmlformats.org/drawingml/2006/main" xmlns:r="http://schemas.openxmlformats.org/officeDocument/2006/relationships" xmlns:p="http://schemas.openxmlformats.org/presentationml/2006/main">
+<p:notes xmlns:a="http://schemas.openxmlformats.org/drawingml/2006/main" xmlns:p="http://schemas.openxmlformats.org/presentationml/2006/main" xmlns:r="http://schemas.openxmlformats.org/officeDocument/2006/relationships">
   <p:cSld>
     <p:spTree>
       <p:nvGrpSpPr>
@@ -1427,7 +1401,7 @@
         <p:nvSpPr>
           <p:cNvPr id="2" name="Slide Image Placeholder 1"/>
           <p:cNvSpPr>
-            <a:spLocks noGrp="1" noRot="1" noChangeAspect="1"/>
+            <a:spLocks noGrp="1"/>
           </p:cNvSpPr>
           <p:nvPr>
             <p:ph type="sldImg" idx="2"/>
@@ -1442,7 +1416,7 @@
             <a:spLocks noGrp="1"/>
           </p:cNvSpPr>
           <p:nvPr>
-            <p:ph type="body" sz="quarter" idx="3"/>
+            <p:ph type="body" idx="3" sz="quarter"/>
           </p:nvPr>
         </p:nvSpPr>
         <p:spPr/>
@@ -1451,288 +1425,7 @@
           <a:lstStyle/>
           <a:p>
             <a:r>
-              <a:rPr dirty="0"/>
-              <a:t>Confusion matrix bize </a:t>
-            </a:r>
-            <a:r>
-              <a:rPr dirty="0" err="1"/>
-              <a:t>iki</a:t>
-            </a:r>
-            <a:r>
-              <a:rPr dirty="0"/>
-              <a:t> </a:t>
-            </a:r>
-            <a:r>
-              <a:rPr dirty="0" err="1"/>
-              <a:t>önemli</a:t>
-            </a:r>
-            <a:r>
-              <a:rPr dirty="0"/>
-              <a:t> </a:t>
-            </a:r>
-            <a:r>
-              <a:rPr dirty="0" err="1"/>
-              <a:t>hata</a:t>
-            </a:r>
-            <a:r>
-              <a:rPr dirty="0"/>
-              <a:t> </a:t>
-            </a:r>
-            <a:r>
-              <a:rPr dirty="0" err="1"/>
-              <a:t>türünü</a:t>
-            </a:r>
-            <a:r>
-              <a:rPr dirty="0"/>
-              <a:t> </a:t>
-            </a:r>
-            <a:r>
-              <a:rPr dirty="0" err="1"/>
-              <a:t>gösteriyor</a:t>
-            </a:r>
-            <a:r>
-              <a:rPr dirty="0"/>
-              <a:t>. 16 bin 282 </a:t>
-            </a:r>
-            <a:r>
-              <a:rPr dirty="0" err="1"/>
-              <a:t>yanlış</a:t>
-            </a:r>
-            <a:r>
-              <a:rPr dirty="0"/>
-              <a:t> </a:t>
-            </a:r>
-            <a:r>
-              <a:rPr dirty="0" err="1"/>
-              <a:t>negatif</a:t>
-            </a:r>
-            <a:r>
-              <a:rPr dirty="0"/>
-              <a:t> — </a:t>
-            </a:r>
-            <a:r>
-              <a:rPr dirty="0" err="1"/>
-              <a:t>gerçek</a:t>
-            </a:r>
-            <a:r>
-              <a:rPr dirty="0"/>
-              <a:t> </a:t>
-            </a:r>
-            <a:r>
-              <a:rPr dirty="0" err="1"/>
-              <a:t>saldırı</a:t>
-            </a:r>
-            <a:r>
-              <a:rPr dirty="0"/>
-              <a:t> </a:t>
-            </a:r>
-            <a:r>
-              <a:rPr dirty="0" err="1"/>
-              <a:t>atlandı</a:t>
-            </a:r>
-            <a:r>
-              <a:rPr dirty="0"/>
-              <a:t>, </a:t>
-            </a:r>
-            <a:r>
-              <a:rPr dirty="0" err="1"/>
-              <a:t>bu</a:t>
-            </a:r>
-            <a:r>
-              <a:rPr dirty="0"/>
-              <a:t> </a:t>
-            </a:r>
-            <a:r>
-              <a:rPr dirty="0" err="1"/>
-              <a:t>bir</a:t>
-            </a:r>
-            <a:r>
-              <a:rPr dirty="0"/>
-              <a:t> </a:t>
-            </a:r>
-            <a:r>
-              <a:rPr dirty="0" err="1"/>
-              <a:t>güvenlik</a:t>
-            </a:r>
-            <a:r>
-              <a:rPr dirty="0"/>
-              <a:t> </a:t>
-            </a:r>
-            <a:r>
-              <a:rPr dirty="0" err="1"/>
-              <a:t>riskidir</a:t>
-            </a:r>
-            <a:r>
-              <a:rPr dirty="0"/>
-              <a:t>. 1023 </a:t>
-            </a:r>
-            <a:r>
-              <a:rPr dirty="0" err="1"/>
-              <a:t>yanlış</a:t>
-            </a:r>
-            <a:r>
-              <a:rPr dirty="0"/>
-              <a:t> </a:t>
-            </a:r>
-            <a:r>
-              <a:rPr dirty="0" err="1"/>
-              <a:t>pozitif</a:t>
-            </a:r>
-            <a:r>
-              <a:rPr dirty="0"/>
-              <a:t> — normal </a:t>
-            </a:r>
-            <a:r>
-              <a:rPr dirty="0" err="1"/>
-              <a:t>bir</a:t>
-            </a:r>
-            <a:r>
-              <a:rPr dirty="0"/>
-              <a:t> </a:t>
-            </a:r>
-            <a:r>
-              <a:rPr dirty="0" err="1"/>
-              <a:t>kullanıcı</a:t>
-            </a:r>
-            <a:r>
-              <a:rPr dirty="0"/>
-              <a:t> </a:t>
-            </a:r>
-            <a:r>
-              <a:rPr dirty="0" err="1"/>
-              <a:t>saldırgan</a:t>
-            </a:r>
-            <a:r>
-              <a:rPr dirty="0"/>
-              <a:t> </a:t>
-            </a:r>
-            <a:r>
-              <a:rPr dirty="0" err="1"/>
-              <a:t>olarak</a:t>
-            </a:r>
-            <a:r>
-              <a:rPr dirty="0"/>
-              <a:t> </a:t>
-            </a:r>
-            <a:r>
-              <a:rPr dirty="0" err="1"/>
-              <a:t>işaretlendi</a:t>
-            </a:r>
-            <a:r>
-              <a:rPr dirty="0"/>
-              <a:t>, </a:t>
-            </a:r>
-            <a:r>
-              <a:rPr dirty="0" err="1"/>
-              <a:t>bu</a:t>
-            </a:r>
-            <a:r>
-              <a:rPr dirty="0"/>
-              <a:t> </a:t>
-            </a:r>
-            <a:r>
-              <a:rPr dirty="0" err="1"/>
-              <a:t>etik</a:t>
-            </a:r>
-            <a:r>
-              <a:rPr dirty="0"/>
-              <a:t> </a:t>
-            </a:r>
-            <a:r>
-              <a:rPr dirty="0" err="1"/>
-              <a:t>ve</a:t>
-            </a:r>
-            <a:r>
-              <a:rPr dirty="0"/>
-              <a:t> </a:t>
-            </a:r>
-            <a:r>
-              <a:rPr dirty="0" err="1"/>
-              <a:t>operasyonel</a:t>
-            </a:r>
-            <a:r>
-              <a:rPr dirty="0"/>
-              <a:t> </a:t>
-            </a:r>
-            <a:r>
-              <a:rPr dirty="0" err="1"/>
-              <a:t>bir</a:t>
-            </a:r>
-            <a:r>
-              <a:rPr dirty="0"/>
-              <a:t> </a:t>
-            </a:r>
-            <a:r>
-              <a:rPr dirty="0" err="1"/>
-              <a:t>sorundur</a:t>
-            </a:r>
-            <a:r>
-              <a:rPr dirty="0"/>
-              <a:t>. Bu </a:t>
-            </a:r>
-            <a:r>
-              <a:rPr dirty="0" err="1"/>
-              <a:t>iki</a:t>
-            </a:r>
-            <a:r>
-              <a:rPr dirty="0"/>
-              <a:t> </a:t>
-            </a:r>
-            <a:r>
-              <a:rPr dirty="0" err="1"/>
-              <a:t>hata</a:t>
-            </a:r>
-            <a:r>
-              <a:rPr dirty="0"/>
-              <a:t> </a:t>
-            </a:r>
-            <a:r>
-              <a:rPr dirty="0" err="1"/>
-              <a:t>tipinin</a:t>
-            </a:r>
-            <a:r>
-              <a:rPr dirty="0"/>
-              <a:t> </a:t>
-            </a:r>
-            <a:r>
-              <a:rPr dirty="0" err="1"/>
-              <a:t>farklı</a:t>
-            </a:r>
-            <a:r>
-              <a:rPr dirty="0"/>
-              <a:t> risk </a:t>
-            </a:r>
-            <a:r>
-              <a:rPr dirty="0" err="1"/>
-              <a:t>kategorileri</a:t>
-            </a:r>
-            <a:r>
-              <a:rPr dirty="0"/>
-              <a:t> </a:t>
-            </a:r>
-            <a:r>
-              <a:rPr dirty="0" err="1"/>
-              <a:t>taşıdığını</a:t>
-            </a:r>
-            <a:r>
-              <a:rPr dirty="0"/>
-              <a:t> </a:t>
-            </a:r>
-            <a:r>
-              <a:rPr dirty="0" err="1"/>
-              <a:t>vurgulamak</a:t>
-            </a:r>
-            <a:r>
-              <a:rPr dirty="0"/>
-              <a:t> </a:t>
-            </a:r>
-            <a:r>
-              <a:rPr dirty="0" err="1"/>
-              <a:t>istiyorum</a:t>
-            </a:r>
-            <a:r>
-              <a:rPr dirty="0"/>
-              <a:t>.</a:t>
+              <a:t>Confusion matrix bize iki önemli hata türünü gösteriyor. 16 bin 282 yanlış negatif — gerçek saldırı atlandı, bu bir güvenlik riskidir. 1023 yanlış pozitif — normal bir kullanıcı saldırgan olarak işaretlendi, bu etik ve operasyonel bir sorundur. Bu iki hata tipinin farklı risk kategorileri taşıdığını vurgulamak istiyorum.</a:t>
             </a:r>
           </a:p>
         </p:txBody>
@@ -1744,7 +1437,7 @@
             <a:spLocks noGrp="1"/>
           </p:cNvSpPr>
           <p:nvPr>
-            <p:ph type="sldNum" sz="quarter" idx="5"/>
+            <p:ph type="sldNum" idx="5" sz="quarter"/>
           </p:nvPr>
         </p:nvSpPr>
         <p:spPr/>
@@ -1795,9 +1488,10 @@
           <a:lstStyle/>
           <a:p>
             <a:r>
-              <a:rPr lang="en-US"/>
+              <a:rPr lang="en-US" smtClean="0"/>
               <a:t>Click to edit Master title style</a:t>
             </a:r>
+            <a:endParaRPr lang="en-US"/>
           </a:p>
         </p:txBody>
       </p:sp>
@@ -1913,9 +1607,10 @@
           </a:lstStyle>
           <a:p>
             <a:r>
-              <a:rPr lang="en-US"/>
+              <a:rPr lang="en-US" smtClean="0"/>
               <a:t>Click to edit Master subtitle style</a:t>
             </a:r>
+            <a:endParaRPr lang="en-US"/>
           </a:p>
         </p:txBody>
       </p:sp>
@@ -1936,7 +1631,7 @@
           <a:p>
             <a:fld id="{5BCAD085-E8A6-8845-BD4E-CB4CCA059FC4}" type="datetimeFigureOut">
               <a:rPr lang="en-US" smtClean="0"/>
-              <a:t>5/26/2026</a:t>
+              <a:t>1/27/13</a:t>
             </a:fld>
             <a:endParaRPr lang="en-US"/>
           </a:p>
@@ -2030,9 +1725,10 @@
           <a:lstStyle/>
           <a:p>
             <a:r>
-              <a:rPr lang="en-US"/>
+              <a:rPr lang="en-US" smtClean="0"/>
               <a:t>Click to edit Master title style</a:t>
             </a:r>
+            <a:endParaRPr lang="en-US"/>
           </a:p>
         </p:txBody>
       </p:sp>
@@ -2053,37 +1749,38 @@
           <a:p>
             <a:pPr lvl="0"/>
             <a:r>
-              <a:rPr lang="en-US"/>
+              <a:rPr lang="en-US" smtClean="0"/>
               <a:t>Click to edit Master text styles</a:t>
             </a:r>
           </a:p>
           <a:p>
             <a:pPr lvl="1"/>
             <a:r>
-              <a:rPr lang="en-US"/>
+              <a:rPr lang="en-US" smtClean="0"/>
               <a:t>Second level</a:t>
             </a:r>
           </a:p>
           <a:p>
             <a:pPr lvl="2"/>
             <a:r>
-              <a:rPr lang="en-US"/>
+              <a:rPr lang="en-US" smtClean="0"/>
               <a:t>Third level</a:t>
             </a:r>
           </a:p>
           <a:p>
             <a:pPr lvl="3"/>
             <a:r>
-              <a:rPr lang="en-US"/>
+              <a:rPr lang="en-US" smtClean="0"/>
               <a:t>Fourth level</a:t>
             </a:r>
           </a:p>
           <a:p>
             <a:pPr lvl="4"/>
             <a:r>
-              <a:rPr lang="en-US"/>
+              <a:rPr lang="en-US" smtClean="0"/>
               <a:t>Fifth level</a:t>
             </a:r>
+            <a:endParaRPr lang="en-US"/>
           </a:p>
         </p:txBody>
       </p:sp>
@@ -2104,7 +1801,7 @@
           <a:p>
             <a:fld id="{5BCAD085-E8A6-8845-BD4E-CB4CCA059FC4}" type="datetimeFigureOut">
               <a:rPr lang="en-US" smtClean="0"/>
-              <a:t>5/26/2026</a:t>
+              <a:t>1/27/13</a:t>
             </a:fld>
             <a:endParaRPr lang="en-US"/>
           </a:p>
@@ -2203,9 +1900,10 @@
           <a:lstStyle/>
           <a:p>
             <a:r>
-              <a:rPr lang="en-US"/>
+              <a:rPr lang="en-US" smtClean="0"/>
               <a:t>Click to edit Master title style</a:t>
             </a:r>
+            <a:endParaRPr lang="en-US"/>
           </a:p>
         </p:txBody>
       </p:sp>
@@ -2231,37 +1929,38 @@
           <a:p>
             <a:pPr lvl="0"/>
             <a:r>
-              <a:rPr lang="en-US"/>
+              <a:rPr lang="en-US" smtClean="0"/>
               <a:t>Click to edit Master text styles</a:t>
             </a:r>
           </a:p>
           <a:p>
             <a:pPr lvl="1"/>
             <a:r>
-              <a:rPr lang="en-US"/>
+              <a:rPr lang="en-US" smtClean="0"/>
               <a:t>Second level</a:t>
             </a:r>
           </a:p>
           <a:p>
             <a:pPr lvl="2"/>
             <a:r>
-              <a:rPr lang="en-US"/>
+              <a:rPr lang="en-US" smtClean="0"/>
               <a:t>Third level</a:t>
             </a:r>
           </a:p>
           <a:p>
             <a:pPr lvl="3"/>
             <a:r>
-              <a:rPr lang="en-US"/>
+              <a:rPr lang="en-US" smtClean="0"/>
               <a:t>Fourth level</a:t>
             </a:r>
           </a:p>
           <a:p>
             <a:pPr lvl="4"/>
             <a:r>
-              <a:rPr lang="en-US"/>
+              <a:rPr lang="en-US" smtClean="0"/>
               <a:t>Fifth level</a:t>
             </a:r>
+            <a:endParaRPr lang="en-US"/>
           </a:p>
         </p:txBody>
       </p:sp>
@@ -2282,7 +1981,7 @@
           <a:p>
             <a:fld id="{5BCAD085-E8A6-8845-BD4E-CB4CCA059FC4}" type="datetimeFigureOut">
               <a:rPr lang="en-US" smtClean="0"/>
-              <a:t>5/26/2026</a:t>
+              <a:t>1/27/13</a:t>
             </a:fld>
             <a:endParaRPr lang="en-US"/>
           </a:p>
@@ -2376,9 +2075,10 @@
           <a:lstStyle/>
           <a:p>
             <a:r>
-              <a:rPr lang="en-US"/>
+              <a:rPr lang="en-US" smtClean="0"/>
               <a:t>Click to edit Master title style</a:t>
             </a:r>
+            <a:endParaRPr lang="en-US"/>
           </a:p>
         </p:txBody>
       </p:sp>
@@ -2399,37 +2099,38 @@
           <a:p>
             <a:pPr lvl="0"/>
             <a:r>
-              <a:rPr lang="en-US"/>
+              <a:rPr lang="en-US" smtClean="0"/>
               <a:t>Click to edit Master text styles</a:t>
             </a:r>
           </a:p>
           <a:p>
             <a:pPr lvl="1"/>
             <a:r>
-              <a:rPr lang="en-US"/>
+              <a:rPr lang="en-US" smtClean="0"/>
               <a:t>Second level</a:t>
             </a:r>
           </a:p>
           <a:p>
             <a:pPr lvl="2"/>
             <a:r>
-              <a:rPr lang="en-US"/>
+              <a:rPr lang="en-US" smtClean="0"/>
               <a:t>Third level</a:t>
             </a:r>
           </a:p>
           <a:p>
             <a:pPr lvl="3"/>
             <a:r>
-              <a:rPr lang="en-US"/>
+              <a:rPr lang="en-US" smtClean="0"/>
               <a:t>Fourth level</a:t>
             </a:r>
           </a:p>
           <a:p>
             <a:pPr lvl="4"/>
             <a:r>
-              <a:rPr lang="en-US"/>
+              <a:rPr lang="en-US" smtClean="0"/>
               <a:t>Fifth level</a:t>
             </a:r>
+            <a:endParaRPr lang="en-US"/>
           </a:p>
         </p:txBody>
       </p:sp>
@@ -2450,7 +2151,7 @@
           <a:p>
             <a:fld id="{5BCAD085-E8A6-8845-BD4E-CB4CCA059FC4}" type="datetimeFigureOut">
               <a:rPr lang="en-US" smtClean="0"/>
-              <a:t>5/26/2026</a:t>
+              <a:t>1/27/13</a:t>
             </a:fld>
             <a:endParaRPr lang="en-US"/>
           </a:p>
@@ -2553,9 +2254,10 @@
           </a:lstStyle>
           <a:p>
             <a:r>
-              <a:rPr lang="en-US"/>
+              <a:rPr lang="en-US" smtClean="0"/>
               <a:t>Click to edit Master title style</a:t>
             </a:r>
+            <a:endParaRPr lang="en-US"/>
           </a:p>
         </p:txBody>
       </p:sp>
@@ -2672,7 +2374,7 @@
           <a:p>
             <a:pPr lvl="0"/>
             <a:r>
-              <a:rPr lang="en-US"/>
+              <a:rPr lang="en-US" smtClean="0"/>
               <a:t>Click to edit Master text styles</a:t>
             </a:r>
           </a:p>
@@ -2695,7 +2397,7 @@
           <a:p>
             <a:fld id="{5BCAD085-E8A6-8845-BD4E-CB4CCA059FC4}" type="datetimeFigureOut">
               <a:rPr lang="en-US" smtClean="0"/>
-              <a:t>5/26/2026</a:t>
+              <a:t>1/27/13</a:t>
             </a:fld>
             <a:endParaRPr lang="en-US"/>
           </a:p>
@@ -2789,9 +2491,10 @@
           <a:lstStyle/>
           <a:p>
             <a:r>
-              <a:rPr lang="en-US"/>
+              <a:rPr lang="en-US" smtClean="0"/>
               <a:t>Click to edit Master title style</a:t>
             </a:r>
+            <a:endParaRPr lang="en-US"/>
           </a:p>
         </p:txBody>
       </p:sp>
@@ -2845,37 +2548,38 @@
           <a:p>
             <a:pPr lvl="0"/>
             <a:r>
-              <a:rPr lang="en-US"/>
+              <a:rPr lang="en-US" smtClean="0"/>
               <a:t>Click to edit Master text styles</a:t>
             </a:r>
           </a:p>
           <a:p>
             <a:pPr lvl="1"/>
             <a:r>
-              <a:rPr lang="en-US"/>
+              <a:rPr lang="en-US" smtClean="0"/>
               <a:t>Second level</a:t>
             </a:r>
           </a:p>
           <a:p>
             <a:pPr lvl="2"/>
             <a:r>
-              <a:rPr lang="en-US"/>
+              <a:rPr lang="en-US" smtClean="0"/>
               <a:t>Third level</a:t>
             </a:r>
           </a:p>
           <a:p>
             <a:pPr lvl="3"/>
             <a:r>
-              <a:rPr lang="en-US"/>
+              <a:rPr lang="en-US" smtClean="0"/>
               <a:t>Fourth level</a:t>
             </a:r>
           </a:p>
           <a:p>
             <a:pPr lvl="4"/>
             <a:r>
-              <a:rPr lang="en-US"/>
+              <a:rPr lang="en-US" smtClean="0"/>
               <a:t>Fifth level</a:t>
             </a:r>
+            <a:endParaRPr lang="en-US"/>
           </a:p>
         </p:txBody>
       </p:sp>
@@ -2929,37 +2633,38 @@
           <a:p>
             <a:pPr lvl="0"/>
             <a:r>
-              <a:rPr lang="en-US"/>
+              <a:rPr lang="en-US" smtClean="0"/>
               <a:t>Click to edit Master text styles</a:t>
             </a:r>
           </a:p>
           <a:p>
             <a:pPr lvl="1"/>
             <a:r>
-              <a:rPr lang="en-US"/>
+              <a:rPr lang="en-US" smtClean="0"/>
               <a:t>Second level</a:t>
             </a:r>
           </a:p>
           <a:p>
             <a:pPr lvl="2"/>
             <a:r>
-              <a:rPr lang="en-US"/>
+              <a:rPr lang="en-US" smtClean="0"/>
               <a:t>Third level</a:t>
             </a:r>
           </a:p>
           <a:p>
             <a:pPr lvl="3"/>
             <a:r>
-              <a:rPr lang="en-US"/>
+              <a:rPr lang="en-US" smtClean="0"/>
               <a:t>Fourth level</a:t>
             </a:r>
           </a:p>
           <a:p>
             <a:pPr lvl="4"/>
             <a:r>
-              <a:rPr lang="en-US"/>
+              <a:rPr lang="en-US" smtClean="0"/>
               <a:t>Fifth level</a:t>
             </a:r>
+            <a:endParaRPr lang="en-US"/>
           </a:p>
         </p:txBody>
       </p:sp>
@@ -2980,7 +2685,7 @@
           <a:p>
             <a:fld id="{5BCAD085-E8A6-8845-BD4E-CB4CCA059FC4}" type="datetimeFigureOut">
               <a:rPr lang="en-US" smtClean="0"/>
-              <a:t>5/26/2026</a:t>
+              <a:t>1/27/13</a:t>
             </a:fld>
             <a:endParaRPr lang="en-US"/>
           </a:p>
@@ -3078,9 +2783,10 @@
           </a:lstStyle>
           <a:p>
             <a:r>
-              <a:rPr lang="en-US"/>
+              <a:rPr lang="en-US" smtClean="0"/>
               <a:t>Click to edit Master title style</a:t>
             </a:r>
+            <a:endParaRPr lang="en-US"/>
           </a:p>
         </p:txBody>
       </p:sp>
@@ -3143,7 +2849,7 @@
           <a:p>
             <a:pPr lvl="0"/>
             <a:r>
-              <a:rPr lang="en-US"/>
+              <a:rPr lang="en-US" smtClean="0"/>
               <a:t>Click to edit Master text styles</a:t>
             </a:r>
           </a:p>
@@ -3199,37 +2905,38 @@
           <a:p>
             <a:pPr lvl="0"/>
             <a:r>
-              <a:rPr lang="en-US"/>
+              <a:rPr lang="en-US" smtClean="0"/>
               <a:t>Click to edit Master text styles</a:t>
             </a:r>
           </a:p>
           <a:p>
             <a:pPr lvl="1"/>
             <a:r>
-              <a:rPr lang="en-US"/>
+              <a:rPr lang="en-US" smtClean="0"/>
               <a:t>Second level</a:t>
             </a:r>
           </a:p>
           <a:p>
             <a:pPr lvl="2"/>
             <a:r>
-              <a:rPr lang="en-US"/>
+              <a:rPr lang="en-US" smtClean="0"/>
               <a:t>Third level</a:t>
             </a:r>
           </a:p>
           <a:p>
             <a:pPr lvl="3"/>
             <a:r>
-              <a:rPr lang="en-US"/>
+              <a:rPr lang="en-US" smtClean="0"/>
               <a:t>Fourth level</a:t>
             </a:r>
           </a:p>
           <a:p>
             <a:pPr lvl="4"/>
             <a:r>
-              <a:rPr lang="en-US"/>
+              <a:rPr lang="en-US" smtClean="0"/>
               <a:t>Fifth level</a:t>
             </a:r>
+            <a:endParaRPr lang="en-US"/>
           </a:p>
         </p:txBody>
       </p:sp>
@@ -3292,7 +2999,7 @@
           <a:p>
             <a:pPr lvl="0"/>
             <a:r>
-              <a:rPr lang="en-US"/>
+              <a:rPr lang="en-US" smtClean="0"/>
               <a:t>Click to edit Master text styles</a:t>
             </a:r>
           </a:p>
@@ -3348,37 +3055,38 @@
           <a:p>
             <a:pPr lvl="0"/>
             <a:r>
-              <a:rPr lang="en-US"/>
+              <a:rPr lang="en-US" smtClean="0"/>
               <a:t>Click to edit Master text styles</a:t>
             </a:r>
           </a:p>
           <a:p>
             <a:pPr lvl="1"/>
             <a:r>
-              <a:rPr lang="en-US"/>
+              <a:rPr lang="en-US" smtClean="0"/>
               <a:t>Second level</a:t>
             </a:r>
           </a:p>
           <a:p>
             <a:pPr lvl="2"/>
             <a:r>
-              <a:rPr lang="en-US"/>
+              <a:rPr lang="en-US" smtClean="0"/>
               <a:t>Third level</a:t>
             </a:r>
           </a:p>
           <a:p>
             <a:pPr lvl="3"/>
             <a:r>
-              <a:rPr lang="en-US"/>
+              <a:rPr lang="en-US" smtClean="0"/>
               <a:t>Fourth level</a:t>
             </a:r>
           </a:p>
           <a:p>
             <a:pPr lvl="4"/>
             <a:r>
-              <a:rPr lang="en-US"/>
+              <a:rPr lang="en-US" smtClean="0"/>
               <a:t>Fifth level</a:t>
             </a:r>
+            <a:endParaRPr lang="en-US"/>
           </a:p>
         </p:txBody>
       </p:sp>
@@ -3399,7 +3107,7 @@
           <a:p>
             <a:fld id="{5BCAD085-E8A6-8845-BD4E-CB4CCA059FC4}" type="datetimeFigureOut">
               <a:rPr lang="en-US" smtClean="0"/>
-              <a:t>5/26/2026</a:t>
+              <a:t>1/27/13</a:t>
             </a:fld>
             <a:endParaRPr lang="en-US"/>
           </a:p>
@@ -3493,9 +3201,10 @@
           <a:lstStyle/>
           <a:p>
             <a:r>
-              <a:rPr lang="en-US"/>
+              <a:rPr lang="en-US" smtClean="0"/>
               <a:t>Click to edit Master title style</a:t>
             </a:r>
+            <a:endParaRPr lang="en-US"/>
           </a:p>
         </p:txBody>
       </p:sp>
@@ -3516,7 +3225,7 @@
           <a:p>
             <a:fld id="{5BCAD085-E8A6-8845-BD4E-CB4CCA059FC4}" type="datetimeFigureOut">
               <a:rPr lang="en-US" smtClean="0"/>
-              <a:t>5/26/2026</a:t>
+              <a:t>1/27/13</a:t>
             </a:fld>
             <a:endParaRPr lang="en-US"/>
           </a:p>
@@ -3611,7 +3320,7 @@
           <a:p>
             <a:fld id="{5BCAD085-E8A6-8845-BD4E-CB4CCA059FC4}" type="datetimeFigureOut">
               <a:rPr lang="en-US" smtClean="0"/>
-              <a:t>5/26/2026</a:t>
+              <a:t>1/27/13</a:t>
             </a:fld>
             <a:endParaRPr lang="en-US"/>
           </a:p>
@@ -3714,9 +3423,10 @@
           </a:lstStyle>
           <a:p>
             <a:r>
-              <a:rPr lang="en-US"/>
+              <a:rPr lang="en-US" smtClean="0"/>
               <a:t>Click to edit Master title style</a:t>
             </a:r>
+            <a:endParaRPr lang="en-US"/>
           </a:p>
         </p:txBody>
       </p:sp>
@@ -3770,37 +3480,38 @@
           <a:p>
             <a:pPr lvl="0"/>
             <a:r>
-              <a:rPr lang="en-US"/>
+              <a:rPr lang="en-US" smtClean="0"/>
               <a:t>Click to edit Master text styles</a:t>
             </a:r>
           </a:p>
           <a:p>
             <a:pPr lvl="1"/>
             <a:r>
-              <a:rPr lang="en-US"/>
+              <a:rPr lang="en-US" smtClean="0"/>
               <a:t>Second level</a:t>
             </a:r>
           </a:p>
           <a:p>
             <a:pPr lvl="2"/>
             <a:r>
-              <a:rPr lang="en-US"/>
+              <a:rPr lang="en-US" smtClean="0"/>
               <a:t>Third level</a:t>
             </a:r>
           </a:p>
           <a:p>
             <a:pPr lvl="3"/>
             <a:r>
-              <a:rPr lang="en-US"/>
+              <a:rPr lang="en-US" smtClean="0"/>
               <a:t>Fourth level</a:t>
             </a:r>
           </a:p>
           <a:p>
             <a:pPr lvl="4"/>
             <a:r>
-              <a:rPr lang="en-US"/>
+              <a:rPr lang="en-US" smtClean="0"/>
               <a:t>Fifth level</a:t>
             </a:r>
+            <a:endParaRPr lang="en-US"/>
           </a:p>
         </p:txBody>
       </p:sp>
@@ -3863,7 +3574,7 @@
           <a:p>
             <a:pPr lvl="0"/>
             <a:r>
-              <a:rPr lang="en-US"/>
+              <a:rPr lang="en-US" smtClean="0"/>
               <a:t>Click to edit Master text styles</a:t>
             </a:r>
           </a:p>
@@ -3886,7 +3597,7 @@
           <a:p>
             <a:fld id="{5BCAD085-E8A6-8845-BD4E-CB4CCA059FC4}" type="datetimeFigureOut">
               <a:rPr lang="en-US" smtClean="0"/>
-              <a:t>5/26/2026</a:t>
+              <a:t>1/27/13</a:t>
             </a:fld>
             <a:endParaRPr lang="en-US"/>
           </a:p>
@@ -3989,9 +3700,10 @@
           </a:lstStyle>
           <a:p>
             <a:r>
-              <a:rPr lang="en-US"/>
+              <a:rPr lang="en-US" smtClean="0"/>
               <a:t>Click to edit Master title style</a:t>
             </a:r>
+            <a:endParaRPr lang="en-US"/>
           </a:p>
         </p:txBody>
       </p:sp>
@@ -4115,7 +3827,7 @@
           <a:p>
             <a:pPr lvl="0"/>
             <a:r>
-              <a:rPr lang="en-US"/>
+              <a:rPr lang="en-US" smtClean="0"/>
               <a:t>Click to edit Master text styles</a:t>
             </a:r>
           </a:p>
@@ -4138,7 +3850,7 @@
           <a:p>
             <a:fld id="{5BCAD085-E8A6-8845-BD4E-CB4CCA059FC4}" type="datetimeFigureOut">
               <a:rPr lang="en-US" smtClean="0"/>
-              <a:t>5/26/2026</a:t>
+              <a:t>1/27/13</a:t>
             </a:fld>
             <a:endParaRPr lang="en-US"/>
           </a:p>
@@ -4247,9 +3959,10 @@
           <a:lstStyle/>
           <a:p>
             <a:r>
-              <a:rPr lang="en-US"/>
+              <a:rPr lang="en-US" smtClean="0"/>
               <a:t>Click to edit Master title style</a:t>
             </a:r>
+            <a:endParaRPr lang="en-US"/>
           </a:p>
         </p:txBody>
       </p:sp>
@@ -4280,37 +3993,38 @@
           <a:p>
             <a:pPr lvl="0"/>
             <a:r>
-              <a:rPr lang="en-US"/>
+              <a:rPr lang="en-US" smtClean="0"/>
               <a:t>Click to edit Master text styles</a:t>
             </a:r>
           </a:p>
           <a:p>
             <a:pPr lvl="1"/>
             <a:r>
-              <a:rPr lang="en-US"/>
+              <a:rPr lang="en-US" smtClean="0"/>
               <a:t>Second level</a:t>
             </a:r>
           </a:p>
           <a:p>
             <a:pPr lvl="2"/>
             <a:r>
-              <a:rPr lang="en-US"/>
+              <a:rPr lang="en-US" smtClean="0"/>
               <a:t>Third level</a:t>
             </a:r>
           </a:p>
           <a:p>
             <a:pPr lvl="3"/>
             <a:r>
-              <a:rPr lang="en-US"/>
+              <a:rPr lang="en-US" smtClean="0"/>
               <a:t>Fourth level</a:t>
             </a:r>
           </a:p>
           <a:p>
             <a:pPr lvl="4"/>
             <a:r>
-              <a:rPr lang="en-US"/>
+              <a:rPr lang="en-US" smtClean="0"/>
               <a:t>Fifth level</a:t>
             </a:r>
+            <a:endParaRPr lang="en-US"/>
           </a:p>
         </p:txBody>
       </p:sp>
@@ -4349,7 +4063,7 @@
           <a:p>
             <a:fld id="{5BCAD085-E8A6-8845-BD4E-CB4CCA059FC4}" type="datetimeFigureOut">
               <a:rPr lang="en-US" smtClean="0"/>
-              <a:t>5/26/2026</a:t>
+              <a:t>1/27/13</a:t>
             </a:fld>
             <a:endParaRPr lang="en-US"/>
           </a:p>
@@ -4708,7 +4422,7 @@
 </file>
 
 <file path=ppt/slides/slide1.xml><?xml version="1.0" encoding="utf-8"?>
-<p:sld xmlns:a="http://schemas.openxmlformats.org/drawingml/2006/main" xmlns:r="http://schemas.openxmlformats.org/officeDocument/2006/relationships" xmlns:p="http://schemas.openxmlformats.org/presentationml/2006/main">
+<p:sld xmlns:a="http://schemas.openxmlformats.org/drawingml/2006/main" xmlns:p="http://schemas.openxmlformats.org/presentationml/2006/main" xmlns:r="http://schemas.openxmlformats.org/officeDocument/2006/relationships">
   <p:cSld>
     <p:bg>
       <p:bgPr>
@@ -4724,14 +4438,7 @@
         <p:cNvGrpSpPr/>
         <p:nvPr/>
       </p:nvGrpSpPr>
-      <p:grpSpPr>
-        <a:xfrm>
-          <a:off x="0" y="0"/>
-          <a:ext cx="0" cy="0"/>
-          <a:chOff x="0" y="0"/>
-          <a:chExt cx="0" cy="0"/>
-        </a:xfrm>
-      </p:grpSpPr>
+      <p:grpSpPr/>
       <p:sp>
         <p:nvSpPr>
           <p:cNvPr id="2" name="Rectangle 1"/>
@@ -4772,7 +4479,6 @@
           <a:lstStyle/>
           <a:p>
             <a:pPr algn="ctr"/>
-            <a:endParaRPr/>
           </a:p>
         </p:txBody>
       </p:sp>
@@ -4812,14 +4518,10 @@
           </a:fontRef>
         </p:style>
         <p:txBody>
-          <a:bodyPr rtlCol="0" anchor="t"/>
-          <a:lstStyle/>
-          <a:p>
-            <a:r>
-              <a:rPr lang="tr-TR" sz="1400" dirty="0"/>
-              <a:t>Nesibe Şeyma CAN | 255B7054</a:t>
-            </a:r>
-            <a:endParaRPr sz="1400" dirty="0"/>
+          <a:bodyPr rtlCol="0" anchor="ctr"/>
+          <a:lstStyle/>
+          <a:p>
+            <a:pPr algn="ctr"/>
           </a:p>
         </p:txBody>
       </p:sp>
@@ -4863,7 +4565,6 @@
           <a:lstStyle/>
           <a:p>
             <a:pPr algn="ctr"/>
-            <a:endParaRPr/>
           </a:p>
         </p:txBody>
       </p:sp>
@@ -4876,7 +4577,7 @@
         <p:spPr>
           <a:xfrm>
             <a:off x="548640" y="914400"/>
-            <a:ext cx="9601200" cy="523220"/>
+            <a:ext cx="9601200" cy="914400"/>
           </a:xfrm>
           <a:prstGeom prst="rect">
             <a:avLst/>
@@ -4884,59 +4585,20 @@
           <a:noFill/>
         </p:spPr>
         <p:txBody>
-          <a:bodyPr wrap="square" lIns="0" tIns="0" rIns="0" bIns="0">
+          <a:bodyPr wrap="square" lIns="0" rIns="0" tIns="0" bIns="0">
             <a:spAutoFit/>
           </a:bodyPr>
           <a:lstStyle/>
           <a:p>
             <a:pPr algn="l"/>
             <a:r>
-              <a:rPr sz="3400" b="1" i="0" dirty="0">
+              <a:rPr sz="3400" b="1" i="0">
                 <a:solidFill>
                   <a:srgbClr val="FFFFFF"/>
                 </a:solidFill>
-                <a:effectLst>
-                  <a:outerShdw blurRad="38100" dist="38100" dir="2700000" algn="tl">
-                    <a:srgbClr val="000000">
-                      <a:alpha val="43137"/>
-                    </a:srgbClr>
-                  </a:outerShdw>
-                </a:effectLst>
                 <a:latin typeface="Calibri"/>
               </a:rPr>
-              <a:t>Büyük Veri </a:t>
-            </a:r>
-            <a:r>
-              <a:rPr sz="3400" b="1" i="0" dirty="0" err="1">
-                <a:solidFill>
-                  <a:srgbClr val="FFFFFF"/>
-                </a:solidFill>
-                <a:effectLst>
-                  <a:outerShdw blurRad="38100" dist="38100" dir="2700000" algn="tl">
-                    <a:srgbClr val="000000">
-                      <a:alpha val="43137"/>
-                    </a:srgbClr>
-                  </a:outerShdw>
-                </a:effectLst>
-                <a:latin typeface="Calibri"/>
-              </a:rPr>
-              <a:t>Güvenliği</a:t>
-            </a:r>
-            <a:r>
-              <a:rPr sz="3400" b="1" i="0" dirty="0">
-                <a:solidFill>
-                  <a:srgbClr val="FFFFFF"/>
-                </a:solidFill>
-                <a:effectLst>
-                  <a:outerShdw blurRad="38100" dist="38100" dir="2700000" algn="tl">
-                    <a:srgbClr val="000000">
-                      <a:alpha val="43137"/>
-                    </a:srgbClr>
-                  </a:outerShdw>
-                </a:effectLst>
-                <a:latin typeface="Calibri"/>
-              </a:rPr>
-              <a:t>:</a:t>
+              <a:t>Büyük Veri Güvenliği:</a:t>
             </a:r>
           </a:p>
         </p:txBody>
@@ -4958,7 +4620,7 @@
           <a:noFill/>
         </p:spPr>
         <p:txBody>
-          <a:bodyPr wrap="square" lIns="0" tIns="0" rIns="0" bIns="0">
+          <a:bodyPr wrap="square" lIns="0" rIns="0" tIns="0" bIns="0">
             <a:spAutoFit/>
           </a:bodyPr>
           <a:lstStyle/>
@@ -5017,7 +4679,6 @@
           <a:lstStyle/>
           <a:p>
             <a:pPr algn="ctr"/>
-            <a:endParaRPr/>
           </a:p>
         </p:txBody>
       </p:sp>
@@ -5038,7 +4699,7 @@
           <a:noFill/>
         </p:spPr>
         <p:txBody>
-          <a:bodyPr wrap="square" lIns="0" tIns="0" rIns="0" bIns="0">
+          <a:bodyPr wrap="square" lIns="0" rIns="0" tIns="0" bIns="0">
             <a:spAutoFit/>
           </a:bodyPr>
           <a:lstStyle/>
@@ -5058,6 +4719,41 @@
       </p:sp>
       <p:sp>
         <p:nvSpPr>
+          <p:cNvPr id="9" name="TextBox 8"/>
+          <p:cNvSpPr txBox="1"/>
+          <p:nvPr/>
+        </p:nvSpPr>
+        <p:spPr>
+          <a:xfrm>
+            <a:off x="548640" y="5852160"/>
+            <a:ext cx="9601200" cy="502920"/>
+          </a:xfrm>
+          <a:prstGeom prst="rect">
+            <a:avLst/>
+          </a:prstGeom>
+          <a:noFill/>
+        </p:spPr>
+        <p:txBody>
+          <a:bodyPr wrap="square" lIns="0" rIns="0" tIns="0" bIns="0">
+            <a:spAutoFit/>
+          </a:bodyPr>
+          <a:lstStyle/>
+          <a:p>
+            <a:pPr algn="l"/>
+            <a:r>
+              <a:rPr sz="1400" b="0" i="0">
+                <a:solidFill>
+                  <a:srgbClr val="BBDEFB"/>
+                </a:solidFill>
+                <a:latin typeface="Calibri"/>
+              </a:rPr>
+              <a:t>Büyük Veri Dersi  |  Yüksek Lisans</a:t>
+            </a:r>
+          </a:p>
+        </p:txBody>
+      </p:sp>
+      <p:sp>
+        <p:nvSpPr>
           <p:cNvPr id="10" name="TextBox 9"/>
           <p:cNvSpPr txBox="1"/>
           <p:nvPr/>
@@ -5073,7 +4769,7 @@
           <a:noFill/>
         </p:spPr>
         <p:txBody>
-          <a:bodyPr wrap="square" lIns="0" tIns="0" rIns="0" bIns="0">
+          <a:bodyPr wrap="square" lIns="0" rIns="0" tIns="0" bIns="0">
             <a:spAutoFit/>
           </a:bodyPr>
           <a:lstStyle/>
@@ -5100,7 +4796,7 @@
 </file>
 
 <file path=ppt/slides/slide10.xml><?xml version="1.0" encoding="utf-8"?>
-<p:sld xmlns:a="http://schemas.openxmlformats.org/drawingml/2006/main" xmlns:r="http://schemas.openxmlformats.org/officeDocument/2006/relationships" xmlns:p="http://schemas.openxmlformats.org/presentationml/2006/main">
+<p:sld xmlns:a="http://schemas.openxmlformats.org/drawingml/2006/main" xmlns:p="http://schemas.openxmlformats.org/presentationml/2006/main" xmlns:r="http://schemas.openxmlformats.org/officeDocument/2006/relationships">
   <p:cSld>
     <p:bg>
       <p:bgPr>
@@ -5116,14 +4812,7 @@
         <p:cNvGrpSpPr/>
         <p:nvPr/>
       </p:nvGrpSpPr>
-      <p:grpSpPr>
-        <a:xfrm>
-          <a:off x="0" y="0"/>
-          <a:ext cx="0" cy="0"/>
-          <a:chOff x="0" y="0"/>
-          <a:chExt cx="0" cy="0"/>
-        </a:xfrm>
-      </p:grpSpPr>
+      <p:grpSpPr/>
       <p:sp>
         <p:nvSpPr>
           <p:cNvPr id="2" name="Rectangle 1"/>
@@ -5164,7 +4853,6 @@
           <a:lstStyle/>
           <a:p>
             <a:pPr algn="ctr"/>
-            <a:endParaRPr/>
           </a:p>
         </p:txBody>
       </p:sp>
@@ -5185,7 +4873,7 @@
           <a:noFill/>
         </p:spPr>
         <p:txBody>
-          <a:bodyPr wrap="square" lIns="0" tIns="0" rIns="0" bIns="0">
+          <a:bodyPr wrap="square" lIns="0" rIns="0" tIns="0" bIns="0">
             <a:spAutoFit/>
           </a:bodyPr>
           <a:lstStyle/>
@@ -5220,7 +4908,7 @@
           <a:noFill/>
         </p:spPr>
         <p:txBody>
-          <a:bodyPr wrap="square" lIns="0" tIns="0" rIns="0" bIns="0">
+          <a:bodyPr wrap="square" lIns="0" rIns="0" tIns="0" bIns="0">
             <a:spAutoFit/>
           </a:bodyPr>
           <a:lstStyle/>
@@ -5241,6 +4929,30 @@
       <p:pic>
         <p:nvPicPr>
           <p:cNvPr id="5" name="Picture 4" descr="roc_curve.png"/>
+          <p:cNvPicPr>
+            <a:picLocks noChangeAspect="1"/>
+          </p:cNvPicPr>
+          <p:nvPr/>
+        </p:nvPicPr>
+        <p:blipFill>
+          <a:blip r:embed="rId2"/>
+          <a:stretch>
+            <a:fillRect/>
+          </a:stretch>
+        </p:blipFill>
+        <p:spPr>
+          <a:xfrm>
+            <a:off x="274320" y="868680"/>
+            <a:ext cx="5684367" cy="5029200"/>
+          </a:xfrm>
+          <a:prstGeom prst="rect">
+            <a:avLst/>
+          </a:prstGeom>
+        </p:spPr>
+      </p:pic>
+      <p:pic>
+        <p:nvPicPr>
+          <p:cNvPr id="6" name="Picture 5" descr="feature_importance.png"/>
           <p:cNvPicPr>
             <a:picLocks noChangeAspect="1"/>
           </p:cNvPicPr>
@@ -5254,30 +4966,6 @@
         </p:blipFill>
         <p:spPr>
           <a:xfrm>
-            <a:off x="274320" y="868680"/>
-            <a:ext cx="5684367" cy="5029200"/>
-          </a:xfrm>
-          <a:prstGeom prst="rect">
-            <a:avLst/>
-          </a:prstGeom>
-        </p:spPr>
-      </p:pic>
-      <p:pic>
-        <p:nvPicPr>
-          <p:cNvPr id="6" name="Picture 5" descr="feature_importance.png"/>
-          <p:cNvPicPr>
-            <a:picLocks noChangeAspect="1"/>
-          </p:cNvPicPr>
-          <p:nvPr/>
-        </p:nvPicPr>
-        <p:blipFill>
-          <a:blip r:embed="rId4"/>
-          <a:stretch>
-            <a:fillRect/>
-          </a:stretch>
-        </p:blipFill>
-        <p:spPr>
-          <a:xfrm>
             <a:off x="6233007" y="868680"/>
             <a:ext cx="5684367" cy="5029200"/>
           </a:xfrm>
@@ -5303,7 +4991,7 @@
           <a:noFill/>
         </p:spPr>
         <p:txBody>
-          <a:bodyPr wrap="square" lIns="0" tIns="0" rIns="0" bIns="0">
+          <a:bodyPr wrap="square" lIns="0" rIns="0" tIns="0" bIns="0">
             <a:spAutoFit/>
           </a:bodyPr>
           <a:lstStyle/>
@@ -5338,7 +5026,7 @@
           <a:noFill/>
         </p:spPr>
         <p:txBody>
-          <a:bodyPr wrap="square" lIns="0" tIns="0" rIns="0" bIns="0">
+          <a:bodyPr wrap="square" lIns="0" rIns="0" tIns="0" bIns="0">
             <a:spAutoFit/>
           </a:bodyPr>
           <a:lstStyle/>
@@ -5365,7 +5053,7 @@
 </file>
 
 <file path=ppt/slides/slide11.xml><?xml version="1.0" encoding="utf-8"?>
-<p:sld xmlns:a="http://schemas.openxmlformats.org/drawingml/2006/main" xmlns:r="http://schemas.openxmlformats.org/officeDocument/2006/relationships" xmlns:p="http://schemas.openxmlformats.org/presentationml/2006/main">
+<p:sld xmlns:a="http://schemas.openxmlformats.org/drawingml/2006/main" xmlns:p="http://schemas.openxmlformats.org/presentationml/2006/main" xmlns:r="http://schemas.openxmlformats.org/officeDocument/2006/relationships">
   <p:cSld>
     <p:bg>
       <p:bgPr>
@@ -5381,14 +5069,7 @@
         <p:cNvGrpSpPr/>
         <p:nvPr/>
       </p:nvGrpSpPr>
-      <p:grpSpPr>
-        <a:xfrm>
-          <a:off x="0" y="0"/>
-          <a:ext cx="0" cy="0"/>
-          <a:chOff x="0" y="0"/>
-          <a:chExt cx="0" cy="0"/>
-        </a:xfrm>
-      </p:grpSpPr>
+      <p:grpSpPr/>
       <p:sp>
         <p:nvSpPr>
           <p:cNvPr id="2" name="Rectangle 1"/>
@@ -5429,7 +5110,6 @@
           <a:lstStyle/>
           <a:p>
             <a:pPr algn="ctr"/>
-            <a:endParaRPr/>
           </a:p>
         </p:txBody>
       </p:sp>
@@ -5450,7 +5130,7 @@
           <a:noFill/>
         </p:spPr>
         <p:txBody>
-          <a:bodyPr wrap="square" lIns="0" tIns="0" rIns="0" bIns="0">
+          <a:bodyPr wrap="square" lIns="0" rIns="0" tIns="0" bIns="0">
             <a:spAutoFit/>
           </a:bodyPr>
           <a:lstStyle/>
@@ -5485,7 +5165,7 @@
           <a:noFill/>
         </p:spPr>
         <p:txBody>
-          <a:bodyPr wrap="square" lIns="0" tIns="0" rIns="0" bIns="0">
+          <a:bodyPr wrap="square" lIns="0" rIns="0" tIns="0" bIns="0">
             <a:spAutoFit/>
           </a:bodyPr>
           <a:lstStyle/>
@@ -5512,7 +5192,7 @@
           <p:nvPr/>
         </p:nvPicPr>
         <p:blipFill>
-          <a:blip r:embed="rId3"/>
+          <a:blip r:embed="rId2"/>
           <a:stretch>
             <a:fillRect/>
           </a:stretch>
@@ -5569,7 +5249,6 @@
           <a:lstStyle/>
           <a:p>
             <a:pPr algn="ctr"/>
-            <a:endParaRPr/>
           </a:p>
         </p:txBody>
       </p:sp>
@@ -5590,7 +5269,7 @@
           <a:noFill/>
         </p:spPr>
         <p:txBody>
-          <a:bodyPr wrap="square" lIns="0" tIns="0" rIns="0" bIns="0">
+          <a:bodyPr wrap="square" lIns="0" rIns="0" tIns="0" bIns="0">
             <a:spAutoFit/>
           </a:bodyPr>
           <a:lstStyle/>
@@ -5625,7 +5304,7 @@
           <a:noFill/>
         </p:spPr>
         <p:txBody>
-          <a:bodyPr wrap="square" lIns="45720" tIns="27432" rIns="45720" bIns="27432">
+          <a:bodyPr wrap="square" lIns="45720" rIns="45720" tIns="27432" bIns="27432">
             <a:spAutoFit/>
           </a:bodyPr>
           <a:lstStyle/>
@@ -5737,7 +5416,6 @@
           <a:lstStyle/>
           <a:p>
             <a:pPr algn="ctr"/>
-            <a:endParaRPr/>
           </a:p>
         </p:txBody>
       </p:sp>
@@ -5758,7 +5436,7 @@
           <a:noFill/>
         </p:spPr>
         <p:txBody>
-          <a:bodyPr wrap="square" lIns="0" tIns="0" rIns="0" bIns="0">
+          <a:bodyPr wrap="square" lIns="0" rIns="0" tIns="0" bIns="0">
             <a:spAutoFit/>
           </a:bodyPr>
           <a:lstStyle/>
@@ -5793,7 +5471,7 @@
           <a:noFill/>
         </p:spPr>
         <p:txBody>
-          <a:bodyPr wrap="square" lIns="45720" tIns="27432" rIns="45720" bIns="27432">
+          <a:bodyPr wrap="square" lIns="45720" rIns="45720" tIns="27432" bIns="27432">
             <a:spAutoFit/>
           </a:bodyPr>
           <a:lstStyle/>
@@ -5872,7 +5550,7 @@
 </file>
 
 <file path=ppt/slides/slide12.xml><?xml version="1.0" encoding="utf-8"?>
-<p:sld xmlns:a="http://schemas.openxmlformats.org/drawingml/2006/main" xmlns:r="http://schemas.openxmlformats.org/officeDocument/2006/relationships" xmlns:p="http://schemas.openxmlformats.org/presentationml/2006/main">
+<p:sld xmlns:a="http://schemas.openxmlformats.org/drawingml/2006/main" xmlns:p="http://schemas.openxmlformats.org/presentationml/2006/main" xmlns:r="http://schemas.openxmlformats.org/officeDocument/2006/relationships">
   <p:cSld>
     <p:bg>
       <p:bgPr>
@@ -5888,14 +5566,7 @@
         <p:cNvGrpSpPr/>
         <p:nvPr/>
       </p:nvGrpSpPr>
-      <p:grpSpPr>
-        <a:xfrm>
-          <a:off x="0" y="0"/>
-          <a:ext cx="0" cy="0"/>
-          <a:chOff x="0" y="0"/>
-          <a:chExt cx="0" cy="0"/>
-        </a:xfrm>
-      </p:grpSpPr>
+      <p:grpSpPr/>
       <p:sp>
         <p:nvSpPr>
           <p:cNvPr id="2" name="Rectangle 1"/>
@@ -5936,7 +5607,6 @@
           <a:lstStyle/>
           <a:p>
             <a:pPr algn="ctr"/>
-            <a:endParaRPr/>
           </a:p>
         </p:txBody>
       </p:sp>
@@ -5957,7 +5627,7 @@
           <a:noFill/>
         </p:spPr>
         <p:txBody>
-          <a:bodyPr wrap="square" lIns="0" tIns="0" rIns="0" bIns="0">
+          <a:bodyPr wrap="square" lIns="0" rIns="0" tIns="0" bIns="0">
             <a:spAutoFit/>
           </a:bodyPr>
           <a:lstStyle/>
@@ -5992,7 +5662,7 @@
           <a:noFill/>
         </p:spPr>
         <p:txBody>
-          <a:bodyPr wrap="square" lIns="0" tIns="0" rIns="0" bIns="0">
+          <a:bodyPr wrap="square" lIns="0" rIns="0" tIns="0" bIns="0">
             <a:spAutoFit/>
           </a:bodyPr>
           <a:lstStyle/>
@@ -6029,27 +5699,9 @@
                 <a:tableStyleId>{5C22544A-7EE6-4342-B048-85BDC9FD1C3A}</a:tableStyleId>
               </a:tblPr>
               <a:tblGrid>
-                <a:gridCol w="3820058">
-                  <a:extLst>
-                    <a:ext uri="{9D8B030D-6E8A-4147-A177-3AD203B41FA5}">
-                      <a16:colId xmlns:a16="http://schemas.microsoft.com/office/drawing/2014/main" val="20000"/>
-                    </a:ext>
-                  </a:extLst>
-                </a:gridCol>
-                <a:gridCol w="3820058">
-                  <a:extLst>
-                    <a:ext uri="{9D8B030D-6E8A-4147-A177-3AD203B41FA5}">
-                      <a16:colId xmlns:a16="http://schemas.microsoft.com/office/drawing/2014/main" val="20001"/>
-                    </a:ext>
-                  </a:extLst>
-                </a:gridCol>
-                <a:gridCol w="3820058">
-                  <a:extLst>
-                    <a:ext uri="{9D8B030D-6E8A-4147-A177-3AD203B41FA5}">
-                      <a16:colId xmlns:a16="http://schemas.microsoft.com/office/drawing/2014/main" val="20002"/>
-                    </a:ext>
-                  </a:extLst>
-                </a:gridCol>
+                <a:gridCol w="3820058"/>
+                <a:gridCol w="3820058"/>
+                <a:gridCol w="3820058"/>
               </a:tblGrid>
               <a:tr h="457200">
                 <a:tc>
@@ -6059,7 +5711,7 @@
                     <a:p>
                       <a:pPr algn="l"/>
                       <a:r>
-                        <a:rPr sz="1200" b="1">
+                        <a:rPr b="1" sz="1200">
                           <a:solidFill>
                             <a:srgbClr val="FFFFFF"/>
                           </a:solidFill>
@@ -6081,7 +5733,7 @@
                     <a:p>
                       <a:pPr algn="ctr"/>
                       <a:r>
-                        <a:rPr sz="1200" b="1">
+                        <a:rPr b="1" sz="1200">
                           <a:solidFill>
                             <a:srgbClr val="FFFFFF"/>
                           </a:solidFill>
@@ -6103,7 +5755,7 @@
                     <a:p>
                       <a:pPr algn="ctr"/>
                       <a:r>
-                        <a:rPr sz="1200" b="1">
+                        <a:rPr b="1" sz="1200">
                           <a:solidFill>
                             <a:srgbClr val="FFFFFF"/>
                           </a:solidFill>
@@ -6118,11 +5770,6 @@
                     </a:solidFill>
                   </a:tcPr>
                 </a:tc>
-                <a:extLst>
-                  <a:ext uri="{0D108BD9-81ED-4DB2-BD59-A6C34878D82A}">
-                    <a16:rowId xmlns:a16="http://schemas.microsoft.com/office/drawing/2014/main" val="10000"/>
-                  </a:ext>
-                </a:extLst>
               </a:tr>
               <a:tr h="457200">
                 <a:tc>
@@ -6191,11 +5838,6 @@
                     </a:solidFill>
                   </a:tcPr>
                 </a:tc>
-                <a:extLst>
-                  <a:ext uri="{0D108BD9-81ED-4DB2-BD59-A6C34878D82A}">
-                    <a16:rowId xmlns:a16="http://schemas.microsoft.com/office/drawing/2014/main" val="10001"/>
-                  </a:ext>
-                </a:extLst>
               </a:tr>
               <a:tr h="457200">
                 <a:tc>
@@ -6264,11 +5906,6 @@
                     </a:solidFill>
                   </a:tcPr>
                 </a:tc>
-                <a:extLst>
-                  <a:ext uri="{0D108BD9-81ED-4DB2-BD59-A6C34878D82A}">
-                    <a16:rowId xmlns:a16="http://schemas.microsoft.com/office/drawing/2014/main" val="10002"/>
-                  </a:ext>
-                </a:extLst>
               </a:tr>
               <a:tr h="457200">
                 <a:tc>
@@ -6337,11 +5974,6 @@
                     </a:solidFill>
                   </a:tcPr>
                 </a:tc>
-                <a:extLst>
-                  <a:ext uri="{0D108BD9-81ED-4DB2-BD59-A6C34878D82A}">
-                    <a16:rowId xmlns:a16="http://schemas.microsoft.com/office/drawing/2014/main" val="10003"/>
-                  </a:ext>
-                </a:extLst>
               </a:tr>
               <a:tr h="457200">
                 <a:tc>
@@ -6410,11 +6042,6 @@
                     </a:solidFill>
                   </a:tcPr>
                 </a:tc>
-                <a:extLst>
-                  <a:ext uri="{0D108BD9-81ED-4DB2-BD59-A6C34878D82A}">
-                    <a16:rowId xmlns:a16="http://schemas.microsoft.com/office/drawing/2014/main" val="10004"/>
-                  </a:ext>
-                </a:extLst>
               </a:tr>
               <a:tr h="457200">
                 <a:tc>
@@ -6483,11 +6110,6 @@
                     </a:solidFill>
                   </a:tcPr>
                 </a:tc>
-                <a:extLst>
-                  <a:ext uri="{0D108BD9-81ED-4DB2-BD59-A6C34878D82A}">
-                    <a16:rowId xmlns:a16="http://schemas.microsoft.com/office/drawing/2014/main" val="10005"/>
-                  </a:ext>
-                </a:extLst>
               </a:tr>
               <a:tr h="457200">
                 <a:tc>
@@ -6556,11 +6178,6 @@
                     </a:solidFill>
                   </a:tcPr>
                 </a:tc>
-                <a:extLst>
-                  <a:ext uri="{0D108BD9-81ED-4DB2-BD59-A6C34878D82A}">
-                    <a16:rowId xmlns:a16="http://schemas.microsoft.com/office/drawing/2014/main" val="10006"/>
-                  </a:ext>
-                </a:extLst>
               </a:tr>
             </a:tbl>
           </a:graphicData>
@@ -6606,7 +6223,6 @@
           <a:lstStyle/>
           <a:p>
             <a:pPr algn="ctr"/>
-            <a:endParaRPr/>
           </a:p>
         </p:txBody>
       </p:sp>
@@ -6627,7 +6243,7 @@
           <a:noFill/>
         </p:spPr>
         <p:txBody>
-          <a:bodyPr wrap="square" lIns="0" tIns="0" rIns="0" bIns="0">
+          <a:bodyPr wrap="square" lIns="0" rIns="0" tIns="0" bIns="0">
             <a:spAutoFit/>
           </a:bodyPr>
           <a:lstStyle/>
@@ -6687,7 +6303,6 @@
           <a:lstStyle/>
           <a:p>
             <a:pPr algn="ctr"/>
-            <a:endParaRPr/>
           </a:p>
         </p:txBody>
       </p:sp>
@@ -6708,7 +6323,7 @@
           <a:noFill/>
         </p:spPr>
         <p:txBody>
-          <a:bodyPr wrap="square" lIns="0" tIns="0" rIns="0" bIns="0">
+          <a:bodyPr wrap="square" lIns="0" rIns="0" tIns="0" bIns="0">
             <a:spAutoFit/>
           </a:bodyPr>
           <a:lstStyle/>
@@ -6766,7 +6381,6 @@
           <a:lstStyle/>
           <a:p>
             <a:pPr algn="ctr"/>
-            <a:endParaRPr/>
           </a:p>
         </p:txBody>
       </p:sp>
@@ -6787,7 +6401,7 @@
           <a:noFill/>
         </p:spPr>
         <p:txBody>
-          <a:bodyPr wrap="square" lIns="0" tIns="0" rIns="0" bIns="0">
+          <a:bodyPr wrap="square" lIns="0" rIns="0" tIns="0" bIns="0">
             <a:spAutoFit/>
           </a:bodyPr>
           <a:lstStyle/>
@@ -6847,7 +6461,6 @@
           <a:lstStyle/>
           <a:p>
             <a:pPr algn="ctr"/>
-            <a:endParaRPr/>
           </a:p>
         </p:txBody>
       </p:sp>
@@ -6868,7 +6481,7 @@
           <a:noFill/>
         </p:spPr>
         <p:txBody>
-          <a:bodyPr wrap="square" lIns="0" tIns="0" rIns="0" bIns="0">
+          <a:bodyPr wrap="square" lIns="0" rIns="0" tIns="0" bIns="0">
             <a:spAutoFit/>
           </a:bodyPr>
           <a:lstStyle/>
@@ -6926,7 +6539,6 @@
           <a:lstStyle/>
           <a:p>
             <a:pPr algn="ctr"/>
-            <a:endParaRPr/>
           </a:p>
         </p:txBody>
       </p:sp>
@@ -6947,7 +6559,7 @@
           <a:noFill/>
         </p:spPr>
         <p:txBody>
-          <a:bodyPr wrap="square" lIns="0" tIns="0" rIns="0" bIns="0">
+          <a:bodyPr wrap="square" lIns="0" rIns="0" tIns="0" bIns="0">
             <a:spAutoFit/>
           </a:bodyPr>
           <a:lstStyle/>
@@ -7007,7 +6619,6 @@
           <a:lstStyle/>
           <a:p>
             <a:pPr algn="ctr"/>
-            <a:endParaRPr/>
           </a:p>
         </p:txBody>
       </p:sp>
@@ -7028,7 +6639,7 @@
           <a:noFill/>
         </p:spPr>
         <p:txBody>
-          <a:bodyPr wrap="square" lIns="0" tIns="0" rIns="0" bIns="0">
+          <a:bodyPr wrap="square" lIns="0" rIns="0" tIns="0" bIns="0">
             <a:spAutoFit/>
           </a:bodyPr>
           <a:lstStyle/>
@@ -7055,7 +6666,7 @@
 </file>
 
 <file path=ppt/slides/slide13.xml><?xml version="1.0" encoding="utf-8"?>
-<p:sld xmlns:a="http://schemas.openxmlformats.org/drawingml/2006/main" xmlns:r="http://schemas.openxmlformats.org/officeDocument/2006/relationships" xmlns:p="http://schemas.openxmlformats.org/presentationml/2006/main">
+<p:sld xmlns:a="http://schemas.openxmlformats.org/drawingml/2006/main" xmlns:p="http://schemas.openxmlformats.org/presentationml/2006/main" xmlns:r="http://schemas.openxmlformats.org/officeDocument/2006/relationships">
   <p:cSld>
     <p:bg>
       <p:bgPr>
@@ -7071,14 +6682,7 @@
         <p:cNvGrpSpPr/>
         <p:nvPr/>
       </p:nvGrpSpPr>
-      <p:grpSpPr>
-        <a:xfrm>
-          <a:off x="0" y="0"/>
-          <a:ext cx="0" cy="0"/>
-          <a:chOff x="0" y="0"/>
-          <a:chExt cx="0" cy="0"/>
-        </a:xfrm>
-      </p:grpSpPr>
+      <p:grpSpPr/>
       <p:sp>
         <p:nvSpPr>
           <p:cNvPr id="2" name="Rectangle 1"/>
@@ -7119,7 +6723,6 @@
           <a:lstStyle/>
           <a:p>
             <a:pPr algn="ctr"/>
-            <a:endParaRPr/>
           </a:p>
         </p:txBody>
       </p:sp>
@@ -7140,7 +6743,7 @@
           <a:noFill/>
         </p:spPr>
         <p:txBody>
-          <a:bodyPr wrap="square" lIns="0" tIns="0" rIns="0" bIns="0">
+          <a:bodyPr wrap="square" lIns="0" rIns="0" tIns="0" bIns="0">
             <a:spAutoFit/>
           </a:bodyPr>
           <a:lstStyle/>
@@ -7175,7 +6778,7 @@
           <a:noFill/>
         </p:spPr>
         <p:txBody>
-          <a:bodyPr wrap="square" lIns="0" tIns="0" rIns="0" bIns="0">
+          <a:bodyPr wrap="square" lIns="0" rIns="0" tIns="0" bIns="0">
             <a:spAutoFit/>
           </a:bodyPr>
           <a:lstStyle/>
@@ -7235,7 +6838,6 @@
           <a:lstStyle/>
           <a:p>
             <a:pPr algn="ctr"/>
-            <a:endParaRPr/>
           </a:p>
         </p:txBody>
       </p:sp>
@@ -7256,7 +6858,7 @@
           <a:noFill/>
         </p:spPr>
         <p:txBody>
-          <a:bodyPr wrap="square" lIns="0" tIns="0" rIns="0" bIns="0">
+          <a:bodyPr wrap="square" lIns="0" rIns="0" tIns="0" bIns="0">
             <a:spAutoFit/>
           </a:bodyPr>
           <a:lstStyle/>
@@ -7292,7 +6894,7 @@
           <a:noFill/>
         </p:spPr>
         <p:txBody>
-          <a:bodyPr wrap="square" lIns="45720" tIns="27432" rIns="45720" bIns="27432">
+          <a:bodyPr wrap="square" lIns="45720" rIns="45720" tIns="27432" bIns="27432">
             <a:spAutoFit/>
           </a:bodyPr>
           <a:lstStyle/>
@@ -7402,7 +7004,6 @@
           <a:lstStyle/>
           <a:p>
             <a:pPr algn="ctr"/>
-            <a:endParaRPr/>
           </a:p>
         </p:txBody>
       </p:sp>
@@ -7423,7 +7024,7 @@
           <a:noFill/>
         </p:spPr>
         <p:txBody>
-          <a:bodyPr wrap="square" lIns="0" tIns="0" rIns="0" bIns="0">
+          <a:bodyPr wrap="square" lIns="0" rIns="0" tIns="0" bIns="0">
             <a:spAutoFit/>
           </a:bodyPr>
           <a:lstStyle/>
@@ -7487,7 +7088,6 @@
           <a:lstStyle/>
           <a:p>
             <a:pPr algn="ctr"/>
-            <a:endParaRPr/>
           </a:p>
         </p:txBody>
       </p:sp>
@@ -7508,7 +7108,7 @@
           <a:noFill/>
         </p:spPr>
         <p:txBody>
-          <a:bodyPr wrap="square" lIns="0" tIns="0" rIns="0" bIns="0">
+          <a:bodyPr wrap="square" lIns="0" rIns="0" tIns="0" bIns="0">
             <a:spAutoFit/>
           </a:bodyPr>
           <a:lstStyle/>
@@ -7544,7 +7144,7 @@
           <a:noFill/>
         </p:spPr>
         <p:txBody>
-          <a:bodyPr wrap="square" lIns="45720" tIns="27432" rIns="45720" bIns="27432">
+          <a:bodyPr wrap="square" lIns="45720" rIns="45720" tIns="27432" bIns="27432">
             <a:spAutoFit/>
           </a:bodyPr>
           <a:lstStyle/>
@@ -7623,7 +7223,7 @@
         <p:spPr>
           <a:xfrm>
             <a:off x="365760" y="4023359"/>
-            <a:ext cx="5547207" cy="2468880"/>
+            <a:ext cx="5547207" cy="1691640"/>
           </a:xfrm>
           <a:prstGeom prst="rect">
             <a:avLst/>
@@ -7656,7 +7256,6 @@
           <a:lstStyle/>
           <a:p>
             <a:pPr algn="ctr"/>
-            <a:endParaRPr/>
           </a:p>
         </p:txBody>
       </p:sp>
@@ -7669,7 +7268,7 @@
         <p:spPr>
           <a:xfrm>
             <a:off x="502920" y="4069080"/>
-            <a:ext cx="5455767" cy="347472"/>
+            <a:ext cx="5455767" cy="320040"/>
           </a:xfrm>
           <a:prstGeom prst="rect">
             <a:avLst/>
@@ -7677,7 +7276,7 @@
           <a:noFill/>
         </p:spPr>
         <p:txBody>
-          <a:bodyPr wrap="square" lIns="0" tIns="0" rIns="0" bIns="0">
+          <a:bodyPr wrap="square" lIns="0" rIns="0" tIns="0" bIns="0">
             <a:spAutoFit/>
           </a:bodyPr>
           <a:lstStyle/>
@@ -7703,8 +7302,8 @@
         </p:nvSpPr>
         <p:spPr>
           <a:xfrm>
-            <a:off x="502920" y="4453127"/>
-            <a:ext cx="5455767" cy="1920240"/>
+            <a:off x="502920" y="4407408"/>
+            <a:ext cx="5455767" cy="1234440"/>
           </a:xfrm>
           <a:prstGeom prst="rect">
             <a:avLst/>
@@ -7712,7 +7311,7 @@
           <a:noFill/>
         </p:spPr>
         <p:txBody>
-          <a:bodyPr wrap="square" lIns="0" tIns="0" rIns="0" bIns="0">
+          <a:bodyPr wrap="square" lIns="0" rIns="0" tIns="0" bIns="0">
             <a:spAutoFit/>
           </a:bodyPr>
           <a:lstStyle/>
@@ -7725,7 +7324,7 @@
                 </a:solidFill>
                 <a:latin typeface="Calibri"/>
               </a:rPr>
-              <a:t>Eşik değeri (threshold) ayarlanarak precision-recall dengesi değiştirilebilir. Yüksek güvenlik ortamlarında recall önceliklendirilmeli; kullanıcı gizliliğinin ön planda olduğu ortamlarda ise precision artırılmalıdır.</a:t>
+              <a:t>Eşik değeri (threshold) ayarlanarak precision-recall dengesi değiştirilebilir. Yüksek güvenlik ortamlarında recall önceliklendirilmeli; mahremiyet öncelikli ortamlarda ise precision artırılmalıdır.</a:t>
             </a:r>
           </a:p>
         </p:txBody>
@@ -7739,7 +7338,7 @@
         <p:spPr>
           <a:xfrm>
             <a:off x="6095847" y="4023359"/>
-            <a:ext cx="5547207" cy="2468880"/>
+            <a:ext cx="5547207" cy="1691640"/>
           </a:xfrm>
           <a:prstGeom prst="rect">
             <a:avLst/>
@@ -7772,7 +7371,6 @@
           <a:lstStyle/>
           <a:p>
             <a:pPr algn="ctr"/>
-            <a:endParaRPr/>
           </a:p>
         </p:txBody>
       </p:sp>
@@ -7785,7 +7383,7 @@
         <p:spPr>
           <a:xfrm>
             <a:off x="6233007" y="4069080"/>
-            <a:ext cx="5455767" cy="347472"/>
+            <a:ext cx="5455767" cy="320040"/>
           </a:xfrm>
           <a:prstGeom prst="rect">
             <a:avLst/>
@@ -7793,7 +7391,7 @@
           <a:noFill/>
         </p:spPr>
         <p:txBody>
-          <a:bodyPr wrap="square" lIns="0" tIns="0" rIns="0" bIns="0">
+          <a:bodyPr wrap="square" lIns="0" rIns="0" tIns="0" bIns="0">
             <a:spAutoFit/>
           </a:bodyPr>
           <a:lstStyle/>
@@ -7819,8 +7417,8 @@
         </p:nvSpPr>
         <p:spPr>
           <a:xfrm>
-            <a:off x="6233007" y="4453127"/>
-            <a:ext cx="5455767" cy="1920240"/>
+            <a:off x="6233007" y="4407408"/>
+            <a:ext cx="5455767" cy="1234440"/>
           </a:xfrm>
           <a:prstGeom prst="rect">
             <a:avLst/>
@@ -7828,7 +7426,7 @@
           <a:noFill/>
         </p:spPr>
         <p:txBody>
-          <a:bodyPr wrap="square" lIns="0" tIns="0" rIns="0" bIns="0">
+          <a:bodyPr wrap="square" lIns="0" rIns="0" tIns="0" bIns="0">
             <a:spAutoFit/>
           </a:bodyPr>
           <a:lstStyle/>
@@ -7841,7 +7439,7 @@
                 </a:solidFill>
                 <a:latin typeface="Calibri"/>
               </a:rPr>
-              <a:t>Otomatik karar sistemleri şeffaflık, hesap verebilirlik ve açıklanabilirlik (XAI) gerektirir. Her yanlış sınıflandırma, somut bir insanı etkiler; bu nedenle model kararları açıklanabilir olmalıdır.</a:t>
+              <a:t>Otomatik karar sistemleri şeffaflık, hesap verebilirlik ve açıklanabilirlik (XAI) gerektirir. Her yanlış sınıflandırma somut bir insanı etkiler; model kararları açıklanabilir olmalıdır.</a:t>
             </a:r>
           </a:p>
         </p:txBody>
@@ -7854,51 +7452,8 @@
         </p:nvSpPr>
         <p:spPr>
           <a:xfrm>
-            <a:off x="365760" y="5806440"/>
-            <a:ext cx="11460175" cy="868680"/>
-          </a:xfrm>
-          <a:prstGeom prst="rect">
-            <a:avLst/>
-          </a:prstGeom>
-          <a:solidFill>
-            <a:srgbClr val="F57F17"/>
-          </a:solidFill>
-          <a:ln>
-            <a:noFill/>
-          </a:ln>
-        </p:spPr>
-        <p:style>
-          <a:lnRef idx="1">
-            <a:schemeClr val="accent1"/>
-          </a:lnRef>
-          <a:fillRef idx="3">
-            <a:schemeClr val="accent1"/>
-          </a:fillRef>
-          <a:effectRef idx="2">
-            <a:schemeClr val="accent1"/>
-          </a:effectRef>
-          <a:fontRef idx="minor">
-            <a:schemeClr val="lt1"/>
-          </a:fontRef>
-        </p:style>
-        <p:txBody>
-          <a:bodyPr rtlCol="0" anchor="ctr"/>
-          <a:lstStyle/>
-          <a:p>
-            <a:pPr algn="ctr"/>
-          </a:p>
-        </p:txBody>
-      </p:sp>
-      <p:sp>
-        <p:nvSpPr>
-          <p:cNvPr id="20" name="Rectangle 19"/>
-          <p:cNvSpPr/>
-          <p:nvPr/>
-        </p:nvSpPr>
-        <p:spPr>
-          <a:xfrm>
-            <a:off x="384048" y="5824728"/>
-            <a:ext cx="11423599" cy="832103"/>
+            <a:off x="365760" y="5824728"/>
+            <a:ext cx="11460175" cy="804672"/>
           </a:xfrm>
           <a:prstGeom prst="rect">
             <a:avLst/>
@@ -7936,14 +7491,49 @@
       </p:sp>
       <p:sp>
         <p:nvSpPr>
+          <p:cNvPr id="20" name="TextBox 19"/>
+          <p:cNvSpPr txBox="1"/>
+          <p:nvPr/>
+        </p:nvSpPr>
+        <p:spPr>
+          <a:xfrm>
+            <a:off x="530352" y="5888736"/>
+            <a:ext cx="1920240" cy="329184"/>
+          </a:xfrm>
+          <a:prstGeom prst="rect">
+            <a:avLst/>
+          </a:prstGeom>
+          <a:noFill/>
+        </p:spPr>
+        <p:txBody>
+          <a:bodyPr wrap="square" lIns="0" rIns="0" tIns="0" bIns="0">
+            <a:spAutoFit/>
+          </a:bodyPr>
+          <a:lstStyle/>
+          <a:p>
+            <a:pPr algn="l"/>
+            <a:r>
+              <a:rPr sz="1200" b="1" i="0">
+                <a:solidFill>
+                  <a:srgbClr val="E65C00"/>
+                </a:solidFill>
+                <a:latin typeface="Calibri"/>
+              </a:rPr>
+              <a:t>TEMEL ÇIKARIM</a:t>
+            </a:r>
+          </a:p>
+        </p:txBody>
+      </p:sp>
+      <p:sp>
+        <p:nvSpPr>
           <p:cNvPr id="21" name="TextBox 20"/>
           <p:cNvSpPr txBox="1"/>
           <p:nvPr/>
         </p:nvSpPr>
         <p:spPr>
           <a:xfrm>
-            <a:off x="548640" y="5888736"/>
-            <a:ext cx="1828800" cy="347472"/>
+            <a:off x="2514600" y="5879592"/>
+            <a:ext cx="9265615" cy="694944"/>
           </a:xfrm>
           <a:prstGeom prst="rect">
             <a:avLst/>
@@ -7951,55 +7541,20 @@
           <a:noFill/>
         </p:spPr>
         <p:txBody>
-          <a:bodyPr wrap="square" lIns="45720" rIns="45720" tIns="27432" bIns="27432">
+          <a:bodyPr wrap="square" lIns="0" rIns="0" tIns="0" bIns="0">
             <a:spAutoFit/>
           </a:bodyPr>
           <a:lstStyle/>
           <a:p>
             <a:pPr algn="l"/>
             <a:r>
-              <a:rPr sz="1200" b="1" i="0">
-                <a:solidFill>
-                  <a:srgbClr val="F57F17"/>
+              <a:rPr sz="1100" b="0" i="1">
+                <a:solidFill>
+                  <a:srgbClr val="1A237E"/>
                 </a:solidFill>
                 <a:latin typeface="Calibri"/>
               </a:rPr>
-              <a:t>TEMEL ÇIKARIM:</a:t>
-            </a:r>
-          </a:p>
-        </p:txBody>
-      </p:sp>
-      <p:sp>
-        <p:nvSpPr>
-          <p:cNvPr id="22" name="TextBox 21"/>
-          <p:cNvSpPr txBox="1"/>
-          <p:nvPr/>
-        </p:nvSpPr>
-        <p:spPr>
-          <a:xfrm>
-            <a:off x="2468880" y="5888736"/>
-            <a:ext cx="9357055" cy="685800"/>
-          </a:xfrm>
-          <a:prstGeom prst="rect">
-            <a:avLst/>
-          </a:prstGeom>
-          <a:noFill/>
-        </p:spPr>
-        <p:txBody>
-          <a:bodyPr wrap="square" lIns="45720" rIns="45720" tIns="27432" bIns="27432">
-            <a:spAutoFit/>
-          </a:bodyPr>
-          <a:lstStyle/>
-          <a:p>
-            <a:pPr algn="l"/>
-            <a:r>
-              <a:rPr sz="1100" b="0" i="1">
-                <a:solidFill>
-                  <a:srgbClr val="1A237E"/>
-                </a:solidFill>
-                <a:latin typeface="Calibri"/>
-              </a:rPr>
-              <a:t>Eşik değeri (varsayılan 0.5) sabit tutulmamalıdır. Güvenlik öncelikli ortamlarda eşik düşürülerek recall artırılır (daha az kaçan saldırı); mahremiyet öncelikli ortamlarda eşik yükseltilerek yanlış pozitif azaltılır. Bu seçim bağlama özel, bilinçli ve etik olarak gerekçelendirilmiş bir karar olmalıdır.</a:t>
+              <a:t>Eşik değeri (varsayılan 0.5) sabit tutulmamalıdır. Güvenlik ortamlarında eşik düşürülür → daha az kaçan saldırı. Mahremiyet öncelikli ortamlarda eşik yükseltilir → daha az yanlış pozitif. Bu tercih bağlama özel, bilinçli ve etik olarak gerekçelendirilmiş olmalıdır.</a:t>
             </a:r>
           </a:p>
         </p:txBody>
@@ -8013,7 +7568,7 @@
 </file>
 
 <file path=ppt/slides/slide14.xml><?xml version="1.0" encoding="utf-8"?>
-<p:sld xmlns:a="http://schemas.openxmlformats.org/drawingml/2006/main" xmlns:r="http://schemas.openxmlformats.org/officeDocument/2006/relationships" xmlns:p="http://schemas.openxmlformats.org/presentationml/2006/main">
+<p:sld xmlns:a="http://schemas.openxmlformats.org/drawingml/2006/main" xmlns:p="http://schemas.openxmlformats.org/presentationml/2006/main" xmlns:r="http://schemas.openxmlformats.org/officeDocument/2006/relationships">
   <p:cSld>
     <p:bg>
       <p:bgPr>
@@ -8029,14 +7584,7 @@
         <p:cNvGrpSpPr/>
         <p:nvPr/>
       </p:nvGrpSpPr>
-      <p:grpSpPr>
-        <a:xfrm>
-          <a:off x="0" y="0"/>
-          <a:ext cx="0" cy="0"/>
-          <a:chOff x="0" y="0"/>
-          <a:chExt cx="0" cy="0"/>
-        </a:xfrm>
-      </p:grpSpPr>
+      <p:grpSpPr/>
       <p:sp>
         <p:nvSpPr>
           <p:cNvPr id="2" name="Rectangle 1"/>
@@ -8077,7 +7625,6 @@
           <a:lstStyle/>
           <a:p>
             <a:pPr algn="ctr"/>
-            <a:endParaRPr/>
           </a:p>
         </p:txBody>
       </p:sp>
@@ -8098,7 +7645,7 @@
           <a:noFill/>
         </p:spPr>
         <p:txBody>
-          <a:bodyPr wrap="square" lIns="0" tIns="0" rIns="0" bIns="0">
+          <a:bodyPr wrap="square" lIns="0" rIns="0" tIns="0" bIns="0">
             <a:spAutoFit/>
           </a:bodyPr>
           <a:lstStyle/>
@@ -8156,7 +7703,6 @@
           <a:lstStyle/>
           <a:p>
             <a:pPr algn="ctr"/>
-            <a:endParaRPr/>
           </a:p>
         </p:txBody>
       </p:sp>
@@ -8177,7 +7723,7 @@
           <a:noFill/>
         </p:spPr>
         <p:txBody>
-          <a:bodyPr wrap="square" lIns="0" tIns="0" rIns="0" bIns="0">
+          <a:bodyPr wrap="square" lIns="0" rIns="0" tIns="0" bIns="0">
             <a:spAutoFit/>
           </a:bodyPr>
           <a:lstStyle/>
@@ -8212,7 +7758,7 @@
           <a:noFill/>
         </p:spPr>
         <p:txBody>
-          <a:bodyPr wrap="square" lIns="0" tIns="0" rIns="0" bIns="0">
+          <a:bodyPr wrap="square" lIns="0" rIns="0" tIns="0" bIns="0">
             <a:spAutoFit/>
           </a:bodyPr>
           <a:lstStyle/>
@@ -8247,7 +7793,7 @@
           <a:noFill/>
         </p:spPr>
         <p:txBody>
-          <a:bodyPr wrap="square" lIns="0" tIns="0" rIns="0" bIns="0">
+          <a:bodyPr wrap="square" lIns="0" rIns="0" tIns="0" bIns="0">
             <a:spAutoFit/>
           </a:bodyPr>
           <a:lstStyle/>
@@ -8282,7 +7828,7 @@
           <a:noFill/>
         </p:spPr>
         <p:txBody>
-          <a:bodyPr wrap="square" lIns="0" tIns="0" rIns="0" bIns="0">
+          <a:bodyPr wrap="square" lIns="0" rIns="0" tIns="0" bIns="0">
             <a:spAutoFit/>
           </a:bodyPr>
           <a:lstStyle/>
@@ -8317,7 +7863,7 @@
           <a:noFill/>
         </p:spPr>
         <p:txBody>
-          <a:bodyPr wrap="square" lIns="0" tIns="0" rIns="0" bIns="0">
+          <a:bodyPr wrap="square" lIns="0" rIns="0" tIns="0" bIns="0">
             <a:spAutoFit/>
           </a:bodyPr>
           <a:lstStyle/>
@@ -8352,7 +7898,7 @@
           <a:noFill/>
         </p:spPr>
         <p:txBody>
-          <a:bodyPr wrap="square" lIns="0" tIns="0" rIns="0" bIns="0">
+          <a:bodyPr wrap="square" lIns="0" rIns="0" tIns="0" bIns="0">
             <a:spAutoFit/>
           </a:bodyPr>
           <a:lstStyle/>
@@ -8387,7 +7933,7 @@
           <a:noFill/>
         </p:spPr>
         <p:txBody>
-          <a:bodyPr wrap="square" lIns="0" tIns="0" rIns="0" bIns="0">
+          <a:bodyPr wrap="square" lIns="0" rIns="0" tIns="0" bIns="0">
             <a:spAutoFit/>
           </a:bodyPr>
           <a:lstStyle/>
@@ -8422,7 +7968,7 @@
           <a:noFill/>
         </p:spPr>
         <p:txBody>
-          <a:bodyPr wrap="square" lIns="0" tIns="0" rIns="0" bIns="0">
+          <a:bodyPr wrap="square" lIns="0" rIns="0" tIns="0" bIns="0">
             <a:spAutoFit/>
           </a:bodyPr>
           <a:lstStyle/>
@@ -8457,7 +8003,7 @@
           <a:noFill/>
         </p:spPr>
         <p:txBody>
-          <a:bodyPr wrap="square" lIns="0" tIns="0" rIns="0" bIns="0">
+          <a:bodyPr wrap="square" lIns="0" rIns="0" tIns="0" bIns="0">
             <a:spAutoFit/>
           </a:bodyPr>
           <a:lstStyle/>
@@ -8492,7 +8038,7 @@
           <a:noFill/>
         </p:spPr>
         <p:txBody>
-          <a:bodyPr wrap="square" lIns="0" tIns="0" rIns="0" bIns="0">
+          <a:bodyPr wrap="square" lIns="0" rIns="0" tIns="0" bIns="0">
             <a:spAutoFit/>
           </a:bodyPr>
           <a:lstStyle/>
@@ -8527,7 +8073,7 @@
           <a:noFill/>
         </p:spPr>
         <p:txBody>
-          <a:bodyPr wrap="square" lIns="0" tIns="0" rIns="0" bIns="0">
+          <a:bodyPr wrap="square" lIns="0" rIns="0" tIns="0" bIns="0">
             <a:spAutoFit/>
           </a:bodyPr>
           <a:lstStyle/>
@@ -8585,7 +8131,6 @@
           <a:lstStyle/>
           <a:p>
             <a:pPr algn="ctr"/>
-            <a:endParaRPr/>
           </a:p>
         </p:txBody>
       </p:sp>
@@ -8606,7 +8151,7 @@
           <a:noFill/>
         </p:spPr>
         <p:txBody>
-          <a:bodyPr wrap="square" lIns="0" tIns="0" rIns="0" bIns="0">
+          <a:bodyPr wrap="square" lIns="0" rIns="0" tIns="0" bIns="0">
             <a:spAutoFit/>
           </a:bodyPr>
           <a:lstStyle/>
@@ -8641,7 +8186,7 @@
           <a:noFill/>
         </p:spPr>
         <p:txBody>
-          <a:bodyPr wrap="square" lIns="0" tIns="0" rIns="0" bIns="0">
+          <a:bodyPr wrap="square" lIns="0" rIns="0" tIns="0" bIns="0">
             <a:spAutoFit/>
           </a:bodyPr>
           <a:lstStyle/>
@@ -8676,7 +8221,7 @@
           <a:noFill/>
         </p:spPr>
         <p:txBody>
-          <a:bodyPr wrap="square" lIns="0" tIns="0" rIns="0" bIns="0">
+          <a:bodyPr wrap="square" lIns="0" rIns="0" tIns="0" bIns="0">
             <a:spAutoFit/>
           </a:bodyPr>
           <a:lstStyle/>
@@ -8711,7 +8256,7 @@
           <a:noFill/>
         </p:spPr>
         <p:txBody>
-          <a:bodyPr wrap="square" lIns="0" tIns="0" rIns="0" bIns="0">
+          <a:bodyPr wrap="square" lIns="0" rIns="0" tIns="0" bIns="0">
             <a:spAutoFit/>
           </a:bodyPr>
           <a:lstStyle/>
@@ -8746,7 +8291,7 @@
           <a:noFill/>
         </p:spPr>
         <p:txBody>
-          <a:bodyPr wrap="square" lIns="0" tIns="0" rIns="0" bIns="0">
+          <a:bodyPr wrap="square" lIns="0" rIns="0" tIns="0" bIns="0">
             <a:spAutoFit/>
           </a:bodyPr>
           <a:lstStyle/>
@@ -8781,7 +8326,7 @@
           <a:noFill/>
         </p:spPr>
         <p:txBody>
-          <a:bodyPr wrap="square" lIns="0" tIns="0" rIns="0" bIns="0">
+          <a:bodyPr wrap="square" lIns="0" rIns="0" tIns="0" bIns="0">
             <a:spAutoFit/>
           </a:bodyPr>
           <a:lstStyle/>
@@ -8816,7 +8361,7 @@
           <a:noFill/>
         </p:spPr>
         <p:txBody>
-          <a:bodyPr wrap="square" lIns="0" tIns="0" rIns="0" bIns="0">
+          <a:bodyPr wrap="square" lIns="0" rIns="0" tIns="0" bIns="0">
             <a:spAutoFit/>
           </a:bodyPr>
           <a:lstStyle/>
@@ -8874,7 +8419,6 @@
           <a:lstStyle/>
           <a:p>
             <a:pPr algn="ctr"/>
-            <a:endParaRPr/>
           </a:p>
         </p:txBody>
       </p:sp>
@@ -8895,7 +8439,7 @@
           <a:noFill/>
         </p:spPr>
         <p:txBody>
-          <a:bodyPr wrap="square" lIns="0" tIns="0" rIns="0" bIns="0">
+          <a:bodyPr wrap="square" lIns="0" rIns="0" tIns="0" bIns="0">
             <a:spAutoFit/>
           </a:bodyPr>
           <a:lstStyle/>
@@ -8930,7 +8474,7 @@
           <a:noFill/>
         </p:spPr>
         <p:txBody>
-          <a:bodyPr wrap="square" lIns="0" tIns="0" rIns="0" bIns="0">
+          <a:bodyPr wrap="square" lIns="0" rIns="0" tIns="0" bIns="0">
             <a:spAutoFit/>
           </a:bodyPr>
           <a:lstStyle/>
@@ -8956,111 +8500,8 @@
 </p:sld>
 </file>
 
-<file path=ppt/slides/slide15.xml><?xml version="1.0" encoding="utf-8"?>
-<p:sld xmlns:a="http://schemas.openxmlformats.org/drawingml/2006/main" xmlns:r="http://schemas.openxmlformats.org/officeDocument/2006/relationships" xmlns:p="http://schemas.openxmlformats.org/presentationml/2006/main">
-  <p:cSld>
-    <p:spTree>
-      <p:nvGrpSpPr>
-        <p:cNvPr id="1" name=""/>
-        <p:cNvGrpSpPr/>
-        <p:nvPr/>
-      </p:nvGrpSpPr>
-      <p:grpSpPr>
-        <a:xfrm>
-          <a:off x="0" y="0"/>
-          <a:ext cx="0" cy="0"/>
-          <a:chOff x="0" y="0"/>
-          <a:chExt cx="0" cy="0"/>
-        </a:xfrm>
-      </p:grpSpPr>
-      <p:pic>
-        <p:nvPicPr>
-          <p:cNvPr id="4" name="Picture 3">
-            <a:extLst>
-              <a:ext uri="{FF2B5EF4-FFF2-40B4-BE49-F238E27FC236}">
-                <a16:creationId xmlns:a16="http://schemas.microsoft.com/office/drawing/2014/main" id="{D5558003-E0AD-26E6-1F89-0D65BE56AD32}"/>
-              </a:ext>
-            </a:extLst>
-          </p:cNvPr>
-          <p:cNvPicPr>
-            <a:picLocks noGrp="1" noRot="1" noChangeAspect="1" noMove="1" noResize="1" noEditPoints="1" noAdjustHandles="1" noChangeArrowheads="1" noChangeShapeType="1" noCrop="1"/>
-          </p:cNvPicPr>
-          <p:nvPr/>
-        </p:nvPicPr>
-        <p:blipFill>
-          <a:blip r:embed="rId2"/>
-          <a:stretch>
-            <a:fillRect/>
-          </a:stretch>
-        </p:blipFill>
-        <p:spPr>
-          <a:xfrm>
-            <a:off x="2817705" y="968386"/>
-            <a:ext cx="6556589" cy="4921228"/>
-          </a:xfrm>
-          <a:prstGeom prst="rect">
-            <a:avLst/>
-          </a:prstGeom>
-        </p:spPr>
-      </p:pic>
-      <p:sp>
-        <p:nvSpPr>
-          <p:cNvPr id="5" name="TextBox 4">
-            <a:extLst>
-              <a:ext uri="{FF2B5EF4-FFF2-40B4-BE49-F238E27FC236}">
-                <a16:creationId xmlns:a16="http://schemas.microsoft.com/office/drawing/2014/main" id="{E11C3298-CECF-4392-2130-E82EFABC5219}"/>
-              </a:ext>
-            </a:extLst>
-          </p:cNvPr>
-          <p:cNvSpPr txBox="1"/>
-          <p:nvPr/>
-        </p:nvSpPr>
-        <p:spPr>
-          <a:xfrm>
-            <a:off x="4226010" y="4361934"/>
-            <a:ext cx="4083908" cy="461665"/>
-          </a:xfrm>
-          <a:prstGeom prst="rect">
-            <a:avLst/>
-          </a:prstGeom>
-          <a:noFill/>
-          <a:effectLst>
-            <a:outerShdw blurRad="50800" dist="38100" dir="5400000" algn="t" rotWithShape="0">
-              <a:prstClr val="black">
-                <a:alpha val="40000"/>
-              </a:prstClr>
-            </a:outerShdw>
-          </a:effectLst>
-        </p:spPr>
-        <p:txBody>
-          <a:bodyPr wrap="square" rtlCol="0">
-            <a:spAutoFit/>
-          </a:bodyPr>
-          <a:lstStyle/>
-          <a:p>
-            <a:r>
-              <a:rPr lang="tr-TR" sz="2400" dirty="0"/>
-              <a:t>Dinlediğiniz için teşekkürler…</a:t>
-            </a:r>
-            <a:endParaRPr lang="en-US" sz="2400" dirty="0"/>
-          </a:p>
-        </p:txBody>
-      </p:sp>
-    </p:spTree>
-    <p:extLst>
-      <p:ext uri="{BB962C8B-B14F-4D97-AF65-F5344CB8AC3E}">
-        <p14:creationId xmlns:p14="http://schemas.microsoft.com/office/powerpoint/2010/main" val="4041353641"/>
-      </p:ext>
-    </p:extLst>
-  </p:cSld>
-  <p:clrMapOvr>
-    <a:masterClrMapping/>
-  </p:clrMapOvr>
-</p:sld>
-</file>
-
 <file path=ppt/slides/slide2.xml><?xml version="1.0" encoding="utf-8"?>
-<p:sld xmlns:a="http://schemas.openxmlformats.org/drawingml/2006/main" xmlns:r="http://schemas.openxmlformats.org/officeDocument/2006/relationships" xmlns:p="http://schemas.openxmlformats.org/presentationml/2006/main">
+<p:sld xmlns:a="http://schemas.openxmlformats.org/drawingml/2006/main" xmlns:p="http://schemas.openxmlformats.org/presentationml/2006/main" xmlns:r="http://schemas.openxmlformats.org/officeDocument/2006/relationships">
   <p:cSld>
     <p:bg>
       <p:bgPr>
@@ -9076,14 +8517,7 @@
         <p:cNvGrpSpPr/>
         <p:nvPr/>
       </p:nvGrpSpPr>
-      <p:grpSpPr>
-        <a:xfrm>
-          <a:off x="0" y="0"/>
-          <a:ext cx="0" cy="0"/>
-          <a:chOff x="0" y="0"/>
-          <a:chExt cx="0" cy="0"/>
-        </a:xfrm>
-      </p:grpSpPr>
+      <p:grpSpPr/>
       <p:sp>
         <p:nvSpPr>
           <p:cNvPr id="2" name="Rectangle 1"/>
@@ -9124,7 +8558,6 @@
           <a:lstStyle/>
           <a:p>
             <a:pPr algn="ctr"/>
-            <a:endParaRPr/>
           </a:p>
         </p:txBody>
       </p:sp>
@@ -9145,7 +8578,7 @@
           <a:noFill/>
         </p:spPr>
         <p:txBody>
-          <a:bodyPr wrap="square" lIns="0" tIns="0" rIns="0" bIns="0">
+          <a:bodyPr wrap="square" lIns="0" rIns="0" tIns="0" bIns="0">
             <a:spAutoFit/>
           </a:bodyPr>
           <a:lstStyle/>
@@ -9180,7 +8613,7 @@
           <a:noFill/>
         </p:spPr>
         <p:txBody>
-          <a:bodyPr wrap="square" lIns="0" tIns="0" rIns="0" bIns="0">
+          <a:bodyPr wrap="square" lIns="0" rIns="0" tIns="0" bIns="0">
             <a:spAutoFit/>
           </a:bodyPr>
           <a:lstStyle/>
@@ -9215,7 +8648,7 @@
           <a:noFill/>
         </p:spPr>
         <p:txBody>
-          <a:bodyPr wrap="square" lIns="45720" tIns="27432" rIns="45720" bIns="27432">
+          <a:bodyPr wrap="square" lIns="45720" rIns="45720" tIns="27432" bIns="27432">
             <a:spAutoFit/>
           </a:bodyPr>
           <a:lstStyle/>
@@ -9327,7 +8760,6 @@
           <a:lstStyle/>
           <a:p>
             <a:pPr algn="ctr"/>
-            <a:endParaRPr/>
           </a:p>
         </p:txBody>
       </p:sp>
@@ -9348,7 +8780,7 @@
           <a:noFill/>
         </p:spPr>
         <p:txBody>
-          <a:bodyPr wrap="square" lIns="0" tIns="0" rIns="0" bIns="0">
+          <a:bodyPr wrap="square" lIns="0" rIns="0" tIns="0" bIns="0">
             <a:spAutoFit/>
           </a:bodyPr>
           <a:lstStyle/>
@@ -9383,7 +8815,7 @@
           <a:noFill/>
         </p:spPr>
         <p:txBody>
-          <a:bodyPr wrap="square" lIns="0" tIns="0" rIns="0" bIns="0">
+          <a:bodyPr wrap="square" lIns="0" rIns="0" tIns="0" bIns="0">
             <a:spAutoFit/>
           </a:bodyPr>
           <a:lstStyle/>
@@ -9410,7 +8842,7 @@
 </file>
 
 <file path=ppt/slides/slide3.xml><?xml version="1.0" encoding="utf-8"?>
-<p:sld xmlns:a="http://schemas.openxmlformats.org/drawingml/2006/main" xmlns:r="http://schemas.openxmlformats.org/officeDocument/2006/relationships" xmlns:p="http://schemas.openxmlformats.org/presentationml/2006/main">
+<p:sld xmlns:a="http://schemas.openxmlformats.org/drawingml/2006/main" xmlns:p="http://schemas.openxmlformats.org/presentationml/2006/main" xmlns:r="http://schemas.openxmlformats.org/officeDocument/2006/relationships">
   <p:cSld>
     <p:bg>
       <p:bgPr>
@@ -9426,14 +8858,7 @@
         <p:cNvGrpSpPr/>
         <p:nvPr/>
       </p:nvGrpSpPr>
-      <p:grpSpPr>
-        <a:xfrm>
-          <a:off x="0" y="0"/>
-          <a:ext cx="0" cy="0"/>
-          <a:chOff x="0" y="0"/>
-          <a:chExt cx="0" cy="0"/>
-        </a:xfrm>
-      </p:grpSpPr>
+      <p:grpSpPr/>
       <p:sp>
         <p:nvSpPr>
           <p:cNvPr id="2" name="Rectangle 1"/>
@@ -9474,7 +8899,6 @@
           <a:lstStyle/>
           <a:p>
             <a:pPr algn="ctr"/>
-            <a:endParaRPr/>
           </a:p>
         </p:txBody>
       </p:sp>
@@ -9495,7 +8919,7 @@
           <a:noFill/>
         </p:spPr>
         <p:txBody>
-          <a:bodyPr wrap="square" lIns="0" tIns="0" rIns="0" bIns="0">
+          <a:bodyPr wrap="square" lIns="0" rIns="0" tIns="0" bIns="0">
             <a:spAutoFit/>
           </a:bodyPr>
           <a:lstStyle/>
@@ -9530,7 +8954,7 @@
           <a:noFill/>
         </p:spPr>
         <p:txBody>
-          <a:bodyPr wrap="square" lIns="0" tIns="0" rIns="0" bIns="0">
+          <a:bodyPr wrap="square" lIns="0" rIns="0" tIns="0" bIns="0">
             <a:spAutoFit/>
           </a:bodyPr>
           <a:lstStyle/>
@@ -9565,7 +8989,7 @@
           <a:noFill/>
         </p:spPr>
         <p:txBody>
-          <a:bodyPr wrap="square" lIns="0" tIns="0" rIns="0" bIns="0">
+          <a:bodyPr wrap="square" lIns="0" rIns="0" tIns="0" bIns="0">
             <a:spAutoFit/>
           </a:bodyPr>
           <a:lstStyle/>
@@ -9600,7 +9024,7 @@
           <a:noFill/>
         </p:spPr>
         <p:txBody>
-          <a:bodyPr wrap="square" lIns="45720" tIns="27432" rIns="45720" bIns="27432">
+          <a:bodyPr wrap="square" lIns="45720" rIns="45720" tIns="27432" bIns="27432">
             <a:spAutoFit/>
           </a:bodyPr>
           <a:lstStyle/>
@@ -9719,7 +9143,7 @@
           <a:noFill/>
         </p:spPr>
         <p:txBody>
-          <a:bodyPr wrap="square" lIns="0" tIns="0" rIns="0" bIns="0">
+          <a:bodyPr wrap="square" lIns="0" rIns="0" tIns="0" bIns="0">
             <a:spAutoFit/>
           </a:bodyPr>
           <a:lstStyle/>
@@ -9756,20 +9180,8 @@
                 <a:tableStyleId>{5C22544A-7EE6-4342-B048-85BDC9FD1C3A}</a:tableStyleId>
               </a:tblPr>
               <a:tblGrid>
-                <a:gridCol w="3063240">
-                  <a:extLst>
-                    <a:ext uri="{9D8B030D-6E8A-4147-A177-3AD203B41FA5}">
-                      <a16:colId xmlns:a16="http://schemas.microsoft.com/office/drawing/2014/main" val="20000"/>
-                    </a:ext>
-                  </a:extLst>
-                </a:gridCol>
-                <a:gridCol w="3063240">
-                  <a:extLst>
-                    <a:ext uri="{9D8B030D-6E8A-4147-A177-3AD203B41FA5}">
-                      <a16:colId xmlns:a16="http://schemas.microsoft.com/office/drawing/2014/main" val="20001"/>
-                    </a:ext>
-                  </a:extLst>
-                </a:gridCol>
+                <a:gridCol w="3063240"/>
+                <a:gridCol w="3063240"/>
               </a:tblGrid>
               <a:tr h="475488">
                 <a:tc>
@@ -9779,7 +9191,7 @@
                     <a:p>
                       <a:pPr algn="l"/>
                       <a:r>
-                        <a:rPr sz="1200" b="1">
+                        <a:rPr b="1" sz="1200">
                           <a:solidFill>
                             <a:srgbClr val="FFFFFF"/>
                           </a:solidFill>
@@ -9801,7 +9213,7 @@
                     <a:p>
                       <a:pPr algn="ctr"/>
                       <a:r>
-                        <a:rPr sz="1200" b="1">
+                        <a:rPr b="1" sz="1200">
                           <a:solidFill>
                             <a:srgbClr val="FFFFFF"/>
                           </a:solidFill>
@@ -9816,11 +9228,6 @@
                     </a:solidFill>
                   </a:tcPr>
                 </a:tc>
-                <a:extLst>
-                  <a:ext uri="{0D108BD9-81ED-4DB2-BD59-A6C34878D82A}">
-                    <a16:rowId xmlns:a16="http://schemas.microsoft.com/office/drawing/2014/main" val="10000"/>
-                  </a:ext>
-                </a:extLst>
               </a:tr>
               <a:tr h="475488">
                 <a:tc>
@@ -9867,11 +9274,6 @@
                     </a:solidFill>
                   </a:tcPr>
                 </a:tc>
-                <a:extLst>
-                  <a:ext uri="{0D108BD9-81ED-4DB2-BD59-A6C34878D82A}">
-                    <a16:rowId xmlns:a16="http://schemas.microsoft.com/office/drawing/2014/main" val="10001"/>
-                  </a:ext>
-                </a:extLst>
               </a:tr>
               <a:tr h="475488">
                 <a:tc>
@@ -9918,11 +9320,6 @@
                     </a:solidFill>
                   </a:tcPr>
                 </a:tc>
-                <a:extLst>
-                  <a:ext uri="{0D108BD9-81ED-4DB2-BD59-A6C34878D82A}">
-                    <a16:rowId xmlns:a16="http://schemas.microsoft.com/office/drawing/2014/main" val="10002"/>
-                  </a:ext>
-                </a:extLst>
               </a:tr>
               <a:tr h="475488">
                 <a:tc>
@@ -9969,11 +9366,6 @@
                     </a:solidFill>
                   </a:tcPr>
                 </a:tc>
-                <a:extLst>
-                  <a:ext uri="{0D108BD9-81ED-4DB2-BD59-A6C34878D82A}">
-                    <a16:rowId xmlns:a16="http://schemas.microsoft.com/office/drawing/2014/main" val="10003"/>
-                  </a:ext>
-                </a:extLst>
               </a:tr>
               <a:tr h="475488">
                 <a:tc>
@@ -10020,11 +9412,6 @@
                     </a:solidFill>
                   </a:tcPr>
                 </a:tc>
-                <a:extLst>
-                  <a:ext uri="{0D108BD9-81ED-4DB2-BD59-A6C34878D82A}">
-                    <a16:rowId xmlns:a16="http://schemas.microsoft.com/office/drawing/2014/main" val="10004"/>
-                  </a:ext>
-                </a:extLst>
               </a:tr>
               <a:tr h="475488">
                 <a:tc>
@@ -10071,11 +9458,6 @@
                     </a:solidFill>
                   </a:tcPr>
                 </a:tc>
-                <a:extLst>
-                  <a:ext uri="{0D108BD9-81ED-4DB2-BD59-A6C34878D82A}">
-                    <a16:rowId xmlns:a16="http://schemas.microsoft.com/office/drawing/2014/main" val="10005"/>
-                  </a:ext>
-                </a:extLst>
               </a:tr>
               <a:tr h="475488">
                 <a:tc>
@@ -10122,11 +9504,6 @@
                     </a:solidFill>
                   </a:tcPr>
                 </a:tc>
-                <a:extLst>
-                  <a:ext uri="{0D108BD9-81ED-4DB2-BD59-A6C34878D82A}">
-                    <a16:rowId xmlns:a16="http://schemas.microsoft.com/office/drawing/2014/main" val="10006"/>
-                  </a:ext>
-                </a:extLst>
               </a:tr>
               <a:tr h="475488">
                 <a:tc>
@@ -10173,11 +9550,6 @@
                     </a:solidFill>
                   </a:tcPr>
                 </a:tc>
-                <a:extLst>
-                  <a:ext uri="{0D108BD9-81ED-4DB2-BD59-A6C34878D82A}">
-                    <a16:rowId xmlns:a16="http://schemas.microsoft.com/office/drawing/2014/main" val="10007"/>
-                  </a:ext>
-                </a:extLst>
               </a:tr>
               <a:tr h="475488">
                 <a:tc>
@@ -10224,11 +9596,6 @@
                     </a:solidFill>
                   </a:tcPr>
                 </a:tc>
-                <a:extLst>
-                  <a:ext uri="{0D108BD9-81ED-4DB2-BD59-A6C34878D82A}">
-                    <a16:rowId xmlns:a16="http://schemas.microsoft.com/office/drawing/2014/main" val="10008"/>
-                  </a:ext>
-                </a:extLst>
               </a:tr>
               <a:tr h="475488">
                 <a:tc>
@@ -10275,11 +9642,6 @@
                     </a:solidFill>
                   </a:tcPr>
                 </a:tc>
-                <a:extLst>
-                  <a:ext uri="{0D108BD9-81ED-4DB2-BD59-A6C34878D82A}">
-                    <a16:rowId xmlns:a16="http://schemas.microsoft.com/office/drawing/2014/main" val="10009"/>
-                  </a:ext>
-                </a:extLst>
               </a:tr>
             </a:tbl>
           </a:graphicData>
@@ -10294,7 +9656,7 @@
 </file>
 
 <file path=ppt/slides/slide4.xml><?xml version="1.0" encoding="utf-8"?>
-<p:sld xmlns:a="http://schemas.openxmlformats.org/drawingml/2006/main" xmlns:r="http://schemas.openxmlformats.org/officeDocument/2006/relationships" xmlns:p="http://schemas.openxmlformats.org/presentationml/2006/main">
+<p:sld xmlns:a="http://schemas.openxmlformats.org/drawingml/2006/main" xmlns:p="http://schemas.openxmlformats.org/presentationml/2006/main" xmlns:r="http://schemas.openxmlformats.org/officeDocument/2006/relationships">
   <p:cSld>
     <p:bg>
       <p:bgPr>
@@ -10310,14 +9672,7 @@
         <p:cNvGrpSpPr/>
         <p:nvPr/>
       </p:nvGrpSpPr>
-      <p:grpSpPr>
-        <a:xfrm>
-          <a:off x="0" y="0"/>
-          <a:ext cx="0" cy="0"/>
-          <a:chOff x="0" y="0"/>
-          <a:chExt cx="0" cy="0"/>
-        </a:xfrm>
-      </p:grpSpPr>
+      <p:grpSpPr/>
       <p:sp>
         <p:nvSpPr>
           <p:cNvPr id="2" name="Rectangle 1"/>
@@ -10358,7 +9713,6 @@
           <a:lstStyle/>
           <a:p>
             <a:pPr algn="ctr"/>
-            <a:endParaRPr/>
           </a:p>
         </p:txBody>
       </p:sp>
@@ -10379,7 +9733,7 @@
           <a:noFill/>
         </p:spPr>
         <p:txBody>
-          <a:bodyPr wrap="square" lIns="0" tIns="0" rIns="0" bIns="0">
+          <a:bodyPr wrap="square" lIns="0" rIns="0" tIns="0" bIns="0">
             <a:spAutoFit/>
           </a:bodyPr>
           <a:lstStyle/>
@@ -10414,7 +9768,7 @@
           <a:noFill/>
         </p:spPr>
         <p:txBody>
-          <a:bodyPr wrap="square" lIns="0" tIns="0" rIns="0" bIns="0">
+          <a:bodyPr wrap="square" lIns="0" rIns="0" tIns="0" bIns="0">
             <a:spAutoFit/>
           </a:bodyPr>
           <a:lstStyle/>
@@ -10472,7 +9826,6 @@
           <a:lstStyle/>
           <a:p>
             <a:pPr algn="ctr"/>
-            <a:endParaRPr/>
           </a:p>
         </p:txBody>
       </p:sp>
@@ -10493,7 +9846,7 @@
           <a:noFill/>
         </p:spPr>
         <p:txBody>
-          <a:bodyPr wrap="square" lIns="0" tIns="0" rIns="0" bIns="0">
+          <a:bodyPr wrap="square" lIns="0" rIns="0" tIns="0" bIns="0">
             <a:spAutoFit/>
           </a:bodyPr>
           <a:lstStyle/>
@@ -10554,7 +9907,6 @@
           <a:lstStyle/>
           <a:p>
             <a:pPr algn="ctr"/>
-            <a:endParaRPr/>
           </a:p>
         </p:txBody>
       </p:sp>
@@ -10575,7 +9927,7 @@
           <a:noFill/>
         </p:spPr>
         <p:txBody>
-          <a:bodyPr wrap="square" lIns="0" tIns="0" rIns="0" bIns="0">
+          <a:bodyPr wrap="square" lIns="0" rIns="0" tIns="0" bIns="0">
             <a:spAutoFit/>
           </a:bodyPr>
           <a:lstStyle/>
@@ -10636,7 +9988,6 @@
           <a:lstStyle/>
           <a:p>
             <a:pPr algn="ctr"/>
-            <a:endParaRPr/>
           </a:p>
         </p:txBody>
       </p:sp>
@@ -10657,7 +10008,7 @@
           <a:noFill/>
         </p:spPr>
         <p:txBody>
-          <a:bodyPr wrap="square" lIns="0" tIns="0" rIns="0" bIns="0">
+          <a:bodyPr wrap="square" lIns="0" rIns="0" tIns="0" bIns="0">
             <a:spAutoFit/>
           </a:bodyPr>
           <a:lstStyle/>
@@ -10718,7 +10069,6 @@
           <a:lstStyle/>
           <a:p>
             <a:pPr algn="ctr"/>
-            <a:endParaRPr/>
           </a:p>
         </p:txBody>
       </p:sp>
@@ -10739,7 +10089,7 @@
           <a:noFill/>
         </p:spPr>
         <p:txBody>
-          <a:bodyPr wrap="square" lIns="0" tIns="0" rIns="0" bIns="0">
+          <a:bodyPr wrap="square" lIns="0" rIns="0" tIns="0" bIns="0">
             <a:spAutoFit/>
           </a:bodyPr>
           <a:lstStyle/>
@@ -10800,7 +10150,6 @@
           <a:lstStyle/>
           <a:p>
             <a:pPr algn="ctr"/>
-            <a:endParaRPr/>
           </a:p>
         </p:txBody>
       </p:sp>
@@ -10821,7 +10170,7 @@
           <a:noFill/>
         </p:spPr>
         <p:txBody>
-          <a:bodyPr wrap="square" lIns="0" tIns="0" rIns="0" bIns="0">
+          <a:bodyPr wrap="square" lIns="0" rIns="0" tIns="0" bIns="0">
             <a:spAutoFit/>
           </a:bodyPr>
           <a:lstStyle/>
@@ -10882,7 +10231,6 @@
           <a:lstStyle/>
           <a:p>
             <a:pPr algn="ctr"/>
-            <a:endParaRPr/>
           </a:p>
         </p:txBody>
       </p:sp>
@@ -10903,7 +10251,7 @@
           <a:noFill/>
         </p:spPr>
         <p:txBody>
-          <a:bodyPr wrap="square" lIns="0" tIns="0" rIns="0" bIns="0">
+          <a:bodyPr wrap="square" lIns="0" rIns="0" tIns="0" bIns="0">
             <a:spAutoFit/>
           </a:bodyPr>
           <a:lstStyle/>
@@ -10964,7 +10312,6 @@
           <a:lstStyle/>
           <a:p>
             <a:pPr algn="ctr"/>
-            <a:endParaRPr/>
           </a:p>
         </p:txBody>
       </p:sp>
@@ -10985,7 +10332,7 @@
           <a:noFill/>
         </p:spPr>
         <p:txBody>
-          <a:bodyPr wrap="square" lIns="0" tIns="0" rIns="0" bIns="0">
+          <a:bodyPr wrap="square" lIns="0" rIns="0" tIns="0" bIns="0">
             <a:spAutoFit/>
           </a:bodyPr>
           <a:lstStyle/>
@@ -11012,7 +10359,7 @@
 </file>
 
 <file path=ppt/slides/slide5.xml><?xml version="1.0" encoding="utf-8"?>
-<p:sld xmlns:a="http://schemas.openxmlformats.org/drawingml/2006/main" xmlns:r="http://schemas.openxmlformats.org/officeDocument/2006/relationships" xmlns:p="http://schemas.openxmlformats.org/presentationml/2006/main">
+<p:sld xmlns:a="http://schemas.openxmlformats.org/drawingml/2006/main" xmlns:p="http://schemas.openxmlformats.org/presentationml/2006/main" xmlns:r="http://schemas.openxmlformats.org/officeDocument/2006/relationships">
   <p:cSld>
     <p:bg>
       <p:bgPr>
@@ -11028,14 +10375,7 @@
         <p:cNvGrpSpPr/>
         <p:nvPr/>
       </p:nvGrpSpPr>
-      <p:grpSpPr>
-        <a:xfrm>
-          <a:off x="0" y="0"/>
-          <a:ext cx="0" cy="0"/>
-          <a:chOff x="0" y="0"/>
-          <a:chExt cx="0" cy="0"/>
-        </a:xfrm>
-      </p:grpSpPr>
+      <p:grpSpPr/>
       <p:sp>
         <p:nvSpPr>
           <p:cNvPr id="2" name="Rectangle 1"/>
@@ -11076,7 +10416,6 @@
           <a:lstStyle/>
           <a:p>
             <a:pPr algn="ctr"/>
-            <a:endParaRPr/>
           </a:p>
         </p:txBody>
       </p:sp>
@@ -11097,7 +10436,7 @@
           <a:noFill/>
         </p:spPr>
         <p:txBody>
-          <a:bodyPr wrap="square" lIns="0" tIns="0" rIns="0" bIns="0">
+          <a:bodyPr wrap="square" lIns="0" rIns="0" tIns="0" bIns="0">
             <a:spAutoFit/>
           </a:bodyPr>
           <a:lstStyle/>
@@ -11132,7 +10471,7 @@
           <a:noFill/>
         </p:spPr>
         <p:txBody>
-          <a:bodyPr wrap="square" lIns="0" tIns="0" rIns="0" bIns="0">
+          <a:bodyPr wrap="square" lIns="0" rIns="0" tIns="0" bIns="0">
             <a:spAutoFit/>
           </a:bodyPr>
           <a:lstStyle/>
@@ -11159,7 +10498,7 @@
           <p:nvPr/>
         </p:nvPicPr>
         <p:blipFill>
-          <a:blip r:embed="rId3"/>
+          <a:blip r:embed="rId2"/>
           <a:stretch>
             <a:fillRect/>
           </a:stretch>
@@ -11214,7 +10553,6 @@
           <a:lstStyle/>
           <a:p>
             <a:pPr algn="ctr"/>
-            <a:endParaRPr/>
           </a:p>
         </p:txBody>
       </p:sp>
@@ -11235,7 +10573,7 @@
           <a:noFill/>
         </p:spPr>
         <p:txBody>
-          <a:bodyPr wrap="square" lIns="0" tIns="0" rIns="0" bIns="0">
+          <a:bodyPr wrap="square" lIns="0" rIns="0" tIns="0" bIns="0">
             <a:spAutoFit/>
           </a:bodyPr>
           <a:lstStyle/>
@@ -11270,7 +10608,7 @@
           <a:noFill/>
         </p:spPr>
         <p:txBody>
-          <a:bodyPr wrap="square" lIns="0" tIns="0" rIns="0" bIns="0">
+          <a:bodyPr wrap="square" lIns="0" rIns="0" tIns="0" bIns="0">
             <a:spAutoFit/>
           </a:bodyPr>
           <a:lstStyle/>
@@ -11328,7 +10666,6 @@
           <a:lstStyle/>
           <a:p>
             <a:pPr algn="ctr"/>
-            <a:endParaRPr/>
           </a:p>
         </p:txBody>
       </p:sp>
@@ -11349,7 +10686,7 @@
           <a:noFill/>
         </p:spPr>
         <p:txBody>
-          <a:bodyPr wrap="square" lIns="0" tIns="0" rIns="0" bIns="0">
+          <a:bodyPr wrap="square" lIns="0" rIns="0" tIns="0" bIns="0">
             <a:spAutoFit/>
           </a:bodyPr>
           <a:lstStyle/>
@@ -11384,7 +10721,7 @@
           <a:noFill/>
         </p:spPr>
         <p:txBody>
-          <a:bodyPr wrap="square" lIns="0" tIns="0" rIns="0" bIns="0">
+          <a:bodyPr wrap="square" lIns="0" rIns="0" tIns="0" bIns="0">
             <a:spAutoFit/>
           </a:bodyPr>
           <a:lstStyle/>
@@ -11442,7 +10779,6 @@
           <a:lstStyle/>
           <a:p>
             <a:pPr algn="ctr"/>
-            <a:endParaRPr/>
           </a:p>
         </p:txBody>
       </p:sp>
@@ -11463,7 +10799,7 @@
           <a:noFill/>
         </p:spPr>
         <p:txBody>
-          <a:bodyPr wrap="square" lIns="0" tIns="0" rIns="0" bIns="0">
+          <a:bodyPr wrap="square" lIns="0" rIns="0" tIns="0" bIns="0">
             <a:spAutoFit/>
           </a:bodyPr>
           <a:lstStyle/>
@@ -11498,7 +10834,7 @@
           <a:noFill/>
         </p:spPr>
         <p:txBody>
-          <a:bodyPr wrap="square" lIns="0" tIns="0" rIns="0" bIns="0">
+          <a:bodyPr wrap="square" lIns="0" rIns="0" tIns="0" bIns="0">
             <a:spAutoFit/>
           </a:bodyPr>
           <a:lstStyle/>
@@ -11525,7 +10861,7 @@
 </file>
 
 <file path=ppt/slides/slide6.xml><?xml version="1.0" encoding="utf-8"?>
-<p:sld xmlns:a="http://schemas.openxmlformats.org/drawingml/2006/main" xmlns:r="http://schemas.openxmlformats.org/officeDocument/2006/relationships" xmlns:p="http://schemas.openxmlformats.org/presentationml/2006/main">
+<p:sld xmlns:a="http://schemas.openxmlformats.org/drawingml/2006/main" xmlns:p="http://schemas.openxmlformats.org/presentationml/2006/main" xmlns:r="http://schemas.openxmlformats.org/officeDocument/2006/relationships">
   <p:cSld>
     <p:bg>
       <p:bgPr>
@@ -11541,14 +10877,7 @@
         <p:cNvGrpSpPr/>
         <p:nvPr/>
       </p:nvGrpSpPr>
-      <p:grpSpPr>
-        <a:xfrm>
-          <a:off x="0" y="0"/>
-          <a:ext cx="0" cy="0"/>
-          <a:chOff x="0" y="0"/>
-          <a:chExt cx="0" cy="0"/>
-        </a:xfrm>
-      </p:grpSpPr>
+      <p:grpSpPr/>
       <p:sp>
         <p:nvSpPr>
           <p:cNvPr id="2" name="Rectangle 1"/>
@@ -11589,7 +10918,6 @@
           <a:lstStyle/>
           <a:p>
             <a:pPr algn="ctr"/>
-            <a:endParaRPr/>
           </a:p>
         </p:txBody>
       </p:sp>
@@ -11610,7 +10938,7 @@
           <a:noFill/>
         </p:spPr>
         <p:txBody>
-          <a:bodyPr wrap="square" lIns="0" tIns="0" rIns="0" bIns="0">
+          <a:bodyPr wrap="square" lIns="0" rIns="0" tIns="0" bIns="0">
             <a:spAutoFit/>
           </a:bodyPr>
           <a:lstStyle/>
@@ -11645,7 +10973,7 @@
           <a:noFill/>
         </p:spPr>
         <p:txBody>
-          <a:bodyPr wrap="square" lIns="0" tIns="0" rIns="0" bIns="0">
+          <a:bodyPr wrap="square" lIns="0" rIns="0" tIns="0" bIns="0">
             <a:spAutoFit/>
           </a:bodyPr>
           <a:lstStyle/>
@@ -11663,50 +10991,33 @@
           </a:p>
         </p:txBody>
       </p:sp>
-      <p:sp>
-        <p:nvSpPr>
-          <p:cNvPr id="7" name="TextBox 6"/>
-          <p:cNvSpPr txBox="1"/>
-          <p:nvPr/>
-        </p:nvSpPr>
-        <p:spPr>
-          <a:xfrm>
-            <a:off x="457200" y="6510528"/>
-            <a:ext cx="11277295" cy="292608"/>
-          </a:xfrm>
-          <a:prstGeom prst="rect">
-            <a:avLst/>
-          </a:prstGeom>
-          <a:noFill/>
-        </p:spPr>
-        <p:txBody>
-          <a:bodyPr wrap="square" lIns="0" tIns="0" rIns="0" bIns="0">
-            <a:spAutoFit/>
-          </a:bodyPr>
-          <a:lstStyle/>
-          <a:p>
-            <a:pPr algn="ctr"/>
-            <a:r>
-              <a:rPr sz="1100" b="0" i="0">
-                <a:solidFill>
-                  <a:srgbClr val="556581"/>
-                </a:solidFill>
-                <a:latin typeface="Calibri"/>
-              </a:rPr>
-              <a:t>▸  UDP ve TCP protokolleri dominant  |  ct_state_ttl, sttl, rate özellikleri hedefle en güçlü korelasyona sahip</a:t>
-            </a:r>
-          </a:p>
-        </p:txBody>
-      </p:sp>
       <p:pic>
         <p:nvPicPr>
-          <p:cNvPr id="9" name="Picture 8">
-            <a:extLst>
-              <a:ext uri="{FF2B5EF4-FFF2-40B4-BE49-F238E27FC236}">
-                <a16:creationId xmlns:a16="http://schemas.microsoft.com/office/drawing/2014/main" id="{EB5297E9-208D-A723-E8A8-0FDE7D14448A}"/>
-              </a:ext>
-            </a:extLst>
-          </p:cNvPr>
+          <p:cNvPr id="5" name="Picture 4" descr="protocol_state.png"/>
+          <p:cNvPicPr>
+            <a:picLocks noChangeAspect="1"/>
+          </p:cNvPicPr>
+          <p:nvPr/>
+        </p:nvPicPr>
+        <p:blipFill>
+          <a:blip r:embed="rId2"/>
+          <a:stretch>
+            <a:fillRect/>
+          </a:stretch>
+        </p:blipFill>
+        <p:spPr>
+          <a:xfrm>
+            <a:off x="274320" y="822960"/>
+            <a:ext cx="11643055" cy="2834640"/>
+          </a:xfrm>
+          <a:prstGeom prst="rect">
+            <a:avLst/>
+          </a:prstGeom>
+        </p:spPr>
+      </p:pic>
+      <p:pic>
+        <p:nvPicPr>
+          <p:cNvPr id="6" name="Picture 5" descr="correlation_heatmap.png"/>
           <p:cNvPicPr>
             <a:picLocks noChangeAspect="1"/>
           </p:cNvPicPr>
@@ -11720,76 +11031,49 @@
         </p:blipFill>
         <p:spPr>
           <a:xfrm>
-            <a:off x="5953726" y="876136"/>
-            <a:ext cx="6047268" cy="5535495"/>
+            <a:off x="274320" y="3749039"/>
+            <a:ext cx="11643055" cy="2697480"/>
           </a:xfrm>
           <a:prstGeom prst="rect">
             <a:avLst/>
           </a:prstGeom>
         </p:spPr>
       </p:pic>
-      <p:pic>
-        <p:nvPicPr>
-          <p:cNvPr id="11" name="Picture 10">
-            <a:extLst>
-              <a:ext uri="{FF2B5EF4-FFF2-40B4-BE49-F238E27FC236}">
-                <a16:creationId xmlns:a16="http://schemas.microsoft.com/office/drawing/2014/main" id="{46803A2C-2A8D-0222-4253-81FE1EB13CA5}"/>
-              </a:ext>
-            </a:extLst>
-          </p:cNvPr>
-          <p:cNvPicPr>
-            <a:picLocks noChangeAspect="1"/>
-          </p:cNvPicPr>
-          <p:nvPr/>
-        </p:nvPicPr>
-        <p:blipFill>
-          <a:blip r:embed="rId4"/>
-          <a:srcRect b="4276"/>
-          <a:stretch>
-            <a:fillRect/>
-          </a:stretch>
-        </p:blipFill>
-        <p:spPr>
-          <a:xfrm>
-            <a:off x="1139692" y="3664250"/>
-            <a:ext cx="4120675" cy="2796829"/>
-          </a:xfrm>
-          <a:prstGeom prst="rect">
-            <a:avLst/>
-          </a:prstGeom>
-        </p:spPr>
-      </p:pic>
-      <p:pic>
-        <p:nvPicPr>
-          <p:cNvPr id="13" name="Picture 12">
-            <a:extLst>
-              <a:ext uri="{FF2B5EF4-FFF2-40B4-BE49-F238E27FC236}">
-                <a16:creationId xmlns:a16="http://schemas.microsoft.com/office/drawing/2014/main" id="{B505C1A3-2F9B-D481-74EE-19AFC09CE091}"/>
-              </a:ext>
-            </a:extLst>
-          </p:cNvPr>
-          <p:cNvPicPr>
-            <a:picLocks noChangeAspect="1"/>
-          </p:cNvPicPr>
-          <p:nvPr/>
-        </p:nvPicPr>
-        <p:blipFill>
-          <a:blip r:embed="rId5"/>
-          <a:srcRect t="-1768" b="1768"/>
-          <a:stretch>
-            <a:fillRect/>
-          </a:stretch>
-        </p:blipFill>
-        <p:spPr>
-          <a:xfrm>
-            <a:off x="1090596" y="847054"/>
-            <a:ext cx="4039863" cy="2796829"/>
-          </a:xfrm>
-          <a:prstGeom prst="rect">
-            <a:avLst/>
-          </a:prstGeom>
-        </p:spPr>
-      </p:pic>
+      <p:sp>
+        <p:nvSpPr>
+          <p:cNvPr id="7" name="TextBox 6"/>
+          <p:cNvSpPr txBox="1"/>
+          <p:nvPr/>
+        </p:nvSpPr>
+        <p:spPr>
+          <a:xfrm>
+            <a:off x="457200" y="6510528"/>
+            <a:ext cx="11277295" cy="292608"/>
+          </a:xfrm>
+          <a:prstGeom prst="rect">
+            <a:avLst/>
+          </a:prstGeom>
+          <a:noFill/>
+        </p:spPr>
+        <p:txBody>
+          <a:bodyPr wrap="square" lIns="0" rIns="0" tIns="0" bIns="0">
+            <a:spAutoFit/>
+          </a:bodyPr>
+          <a:lstStyle/>
+          <a:p>
+            <a:pPr algn="ctr"/>
+            <a:r>
+              <a:rPr sz="1100" b="0" i="0">
+                <a:solidFill>
+                  <a:srgbClr val="556581"/>
+                </a:solidFill>
+                <a:latin typeface="Calibri"/>
+              </a:rPr>
+              <a:t>▸  UDP ve TCP protokolleri dominant  |  ct_state_ttl, sttl, rate özellikleri hedefle en güçlü korelasyona sahip</a:t>
+            </a:r>
+          </a:p>
+        </p:txBody>
+      </p:sp>
     </p:spTree>
   </p:cSld>
   <p:clrMapOvr>
@@ -11799,7 +11083,7 @@
 </file>
 
 <file path=ppt/slides/slide7.xml><?xml version="1.0" encoding="utf-8"?>
-<p:sld xmlns:a="http://schemas.openxmlformats.org/drawingml/2006/main" xmlns:r="http://schemas.openxmlformats.org/officeDocument/2006/relationships" xmlns:p="http://schemas.openxmlformats.org/presentationml/2006/main">
+<p:sld xmlns:a="http://schemas.openxmlformats.org/drawingml/2006/main" xmlns:p="http://schemas.openxmlformats.org/presentationml/2006/main" xmlns:r="http://schemas.openxmlformats.org/officeDocument/2006/relationships">
   <p:cSld>
     <p:bg>
       <p:bgPr>
@@ -11815,59 +11099,17 @@
         <p:cNvGrpSpPr/>
         <p:nvPr/>
       </p:nvGrpSpPr>
-      <p:grpSpPr>
-        <a:xfrm>
-          <a:off x="0" y="0"/>
-          <a:ext cx="0" cy="0"/>
-          <a:chOff x="0" y="0"/>
-          <a:chExt cx="0" cy="0"/>
-        </a:xfrm>
-      </p:grpSpPr>
-      <p:sp>
-        <p:nvSpPr>
-          <p:cNvPr id="4" name="TextBox 3"/>
-          <p:cNvSpPr txBox="1"/>
-          <p:nvPr/>
-        </p:nvSpPr>
-        <p:spPr>
-          <a:xfrm>
-            <a:off x="11737871" y="7059168"/>
-            <a:ext cx="411480" cy="274320"/>
-          </a:xfrm>
-          <a:prstGeom prst="rect">
-            <a:avLst/>
-          </a:prstGeom>
-          <a:noFill/>
-        </p:spPr>
-        <p:txBody>
-          <a:bodyPr wrap="square" lIns="0" tIns="0" rIns="0" bIns="0">
-            <a:spAutoFit/>
-          </a:bodyPr>
-          <a:lstStyle/>
-          <a:p>
-            <a:pPr algn="r"/>
-            <a:r>
-              <a:rPr sz="1000" b="0" i="0">
-                <a:solidFill>
-                  <a:srgbClr val="556581"/>
-                </a:solidFill>
-                <a:latin typeface="Calibri"/>
-              </a:rPr>
-              <a:t>7</a:t>
-            </a:r>
-          </a:p>
-        </p:txBody>
-      </p:sp>
-      <p:sp>
-        <p:nvSpPr>
-          <p:cNvPr id="5" name="Rectangle 4"/>
+      <p:grpSpPr/>
+      <p:sp>
+        <p:nvSpPr>
+          <p:cNvPr id="2" name="Rectangle 1"/>
           <p:cNvSpPr/>
           <p:nvPr/>
         </p:nvSpPr>
         <p:spPr>
           <a:xfrm>
-            <a:off x="506296" y="1417320"/>
-            <a:ext cx="2560320" cy="804672"/>
+            <a:off x="0" y="0"/>
+            <a:ext cx="12191695" cy="777240"/>
           </a:xfrm>
           <a:prstGeom prst="rect">
             <a:avLst/>
@@ -11898,7 +11140,119 @@
           <a:lstStyle/>
           <a:p>
             <a:pPr algn="ctr"/>
-            <a:endParaRPr/>
+          </a:p>
+        </p:txBody>
+      </p:sp>
+      <p:sp>
+        <p:nvSpPr>
+          <p:cNvPr id="3" name="TextBox 2"/>
+          <p:cNvSpPr txBox="1"/>
+          <p:nvPr/>
+        </p:nvSpPr>
+        <p:spPr>
+          <a:xfrm>
+            <a:off x="274320" y="73152"/>
+            <a:ext cx="11643055" cy="630936"/>
+          </a:xfrm>
+          <a:prstGeom prst="rect">
+            <a:avLst/>
+          </a:prstGeom>
+          <a:noFill/>
+        </p:spPr>
+        <p:txBody>
+          <a:bodyPr wrap="square" lIns="0" rIns="0" tIns="0" bIns="0">
+            <a:spAutoFit/>
+          </a:bodyPr>
+          <a:lstStyle/>
+          <a:p>
+            <a:pPr algn="l"/>
+            <a:r>
+              <a:rPr sz="2600" b="1" i="0">
+                <a:solidFill>
+                  <a:srgbClr val="FFFFFF"/>
+                </a:solidFill>
+                <a:latin typeface="Calibri"/>
+              </a:rPr>
+              <a:t>Metodoloji: Analiz Boru Hattı</a:t>
+            </a:r>
+          </a:p>
+        </p:txBody>
+      </p:sp>
+      <p:sp>
+        <p:nvSpPr>
+          <p:cNvPr id="4" name="TextBox 3"/>
+          <p:cNvSpPr txBox="1"/>
+          <p:nvPr/>
+        </p:nvSpPr>
+        <p:spPr>
+          <a:xfrm>
+            <a:off x="11688775" y="6510528"/>
+            <a:ext cx="411480" cy="274320"/>
+          </a:xfrm>
+          <a:prstGeom prst="rect">
+            <a:avLst/>
+          </a:prstGeom>
+          <a:noFill/>
+        </p:spPr>
+        <p:txBody>
+          <a:bodyPr wrap="square" lIns="0" rIns="0" tIns="0" bIns="0">
+            <a:spAutoFit/>
+          </a:bodyPr>
+          <a:lstStyle/>
+          <a:p>
+            <a:pPr algn="r"/>
+            <a:r>
+              <a:rPr sz="1000" b="0" i="0">
+                <a:solidFill>
+                  <a:srgbClr val="556581"/>
+                </a:solidFill>
+                <a:latin typeface="Calibri"/>
+              </a:rPr>
+              <a:t>7</a:t>
+            </a:r>
+          </a:p>
+        </p:txBody>
+      </p:sp>
+      <p:sp>
+        <p:nvSpPr>
+          <p:cNvPr id="5" name="Rectangle 4"/>
+          <p:cNvSpPr/>
+          <p:nvPr/>
+        </p:nvSpPr>
+        <p:spPr>
+          <a:xfrm>
+            <a:off x="365760" y="868680"/>
+            <a:ext cx="2103120" cy="786384"/>
+          </a:xfrm>
+          <a:prstGeom prst="rect">
+            <a:avLst/>
+          </a:prstGeom>
+          <a:solidFill>
+            <a:srgbClr val="1A237E"/>
+          </a:solidFill>
+          <a:ln>
+            <a:noFill/>
+          </a:ln>
+        </p:spPr>
+        <p:style>
+          <a:lnRef idx="1">
+            <a:schemeClr val="accent1"/>
+          </a:lnRef>
+          <a:fillRef idx="3">
+            <a:schemeClr val="accent1"/>
+          </a:fillRef>
+          <a:effectRef idx="2">
+            <a:schemeClr val="accent1"/>
+          </a:effectRef>
+          <a:fontRef idx="minor">
+            <a:schemeClr val="lt1"/>
+          </a:fontRef>
+        </p:style>
+        <p:txBody>
+          <a:bodyPr rtlCol="0" anchor="ctr"/>
+          <a:lstStyle/>
+          <a:p>
+            <a:pPr algn="ctr"/>
           </a:p>
         </p:txBody>
       </p:sp>
@@ -11910,8 +11264,8 @@
         </p:nvSpPr>
         <p:spPr>
           <a:xfrm>
-            <a:off x="552016" y="1527047"/>
-            <a:ext cx="2468879" cy="585216"/>
+            <a:off x="411480" y="960120"/>
+            <a:ext cx="2011679" cy="603503"/>
           </a:xfrm>
           <a:prstGeom prst="rect">
             <a:avLst/>
@@ -11919,14 +11273,14 @@
           <a:noFill/>
         </p:spPr>
         <p:txBody>
-          <a:bodyPr wrap="square" lIns="0" tIns="0" rIns="0" bIns="0">
+          <a:bodyPr wrap="square" lIns="0" rIns="0" tIns="0" bIns="0">
             <a:spAutoFit/>
           </a:bodyPr>
           <a:lstStyle/>
           <a:p>
             <a:pPr algn="l"/>
             <a:r>
-              <a:rPr sz="1300" b="1" i="0">
+              <a:rPr sz="1200" b="1" i="0">
                 <a:solidFill>
                   <a:srgbClr val="FFFFFF"/>
                 </a:solidFill>
@@ -11945,8 +11299,8 @@
         </p:nvSpPr>
         <p:spPr>
           <a:xfrm>
-            <a:off x="3066616" y="1417320"/>
-            <a:ext cx="8716975" cy="804672"/>
+            <a:off x="2468879" y="868680"/>
+            <a:ext cx="3017520" cy="786384"/>
           </a:xfrm>
           <a:prstGeom prst="rect">
             <a:avLst/>
@@ -11979,7 +11333,6 @@
           <a:lstStyle/>
           <a:p>
             <a:pPr algn="ctr"/>
-            <a:endParaRPr/>
           </a:p>
         </p:txBody>
       </p:sp>
@@ -11991,8 +11344,8 @@
         </p:nvSpPr>
         <p:spPr>
           <a:xfrm>
-            <a:off x="3203775" y="1508760"/>
-            <a:ext cx="8488375" cy="621792"/>
+            <a:off x="2578608" y="960120"/>
+            <a:ext cx="2816351" cy="603503"/>
           </a:xfrm>
           <a:prstGeom prst="rect">
             <a:avLst/>
@@ -12000,70 +11353,35 @@
           <a:noFill/>
         </p:spPr>
         <p:txBody>
-          <a:bodyPr wrap="square" lIns="0" tIns="0" rIns="0" bIns="0">
+          <a:bodyPr wrap="square" lIns="0" rIns="0" tIns="0" bIns="0">
             <a:spAutoFit/>
           </a:bodyPr>
           <a:lstStyle/>
           <a:p>
             <a:pPr algn="l"/>
             <a:r>
-              <a:rPr sz="1200" b="0" i="0">
+              <a:rPr sz="1100" b="0" i="0">
                 <a:solidFill>
                   <a:srgbClr val="1A237E"/>
                 </a:solidFill>
                 <a:latin typeface="Calibri"/>
               </a:rPr>
-              <a:t>UNSW_NB15_training-set.csv  +  UNSW_NB15_testing-set.csv
-82,332 eğitim | 175,341 test | 42 özellik</a:t>
-            </a:r>
-          </a:p>
-        </p:txBody>
-      </p:sp>
-      <p:sp>
-        <p:nvSpPr>
-          <p:cNvPr id="9" name="TextBox 8"/>
-          <p:cNvSpPr txBox="1"/>
-          <p:nvPr/>
-        </p:nvSpPr>
-        <p:spPr>
-          <a:xfrm>
-            <a:off x="1649296" y="2221992"/>
-            <a:ext cx="274320" cy="91440"/>
-          </a:xfrm>
-          <a:prstGeom prst="rect">
-            <a:avLst/>
-          </a:prstGeom>
-          <a:noFill/>
-        </p:spPr>
-        <p:txBody>
-          <a:bodyPr wrap="square" lIns="0" tIns="0" rIns="0" bIns="0">
-            <a:spAutoFit/>
-          </a:bodyPr>
-          <a:lstStyle/>
-          <a:p>
-            <a:pPr algn="ctr"/>
-            <a:r>
-              <a:rPr sz="900" b="0" i="0">
-                <a:solidFill>
-                  <a:srgbClr val="1A237E"/>
-                </a:solidFill>
-                <a:latin typeface="Calibri"/>
-              </a:rPr>
-              <a:t>▼</a:t>
-            </a:r>
-          </a:p>
-        </p:txBody>
-      </p:sp>
-      <p:sp>
-        <p:nvSpPr>
-          <p:cNvPr id="10" name="Rectangle 9"/>
+              <a:t>UNSW_NB15 training + testing CSV
+82,332 eğitim  |  175,341 test</a:t>
+            </a:r>
+          </a:p>
+        </p:txBody>
+      </p:sp>
+      <p:sp>
+        <p:nvSpPr>
+          <p:cNvPr id="9" name="Rectangle 8"/>
           <p:cNvSpPr/>
           <p:nvPr/>
         </p:nvSpPr>
         <p:spPr>
           <a:xfrm>
-            <a:off x="506296" y="2276856"/>
-            <a:ext cx="2560320" cy="804672"/>
+            <a:off x="365760" y="1709928"/>
+            <a:ext cx="2103120" cy="786384"/>
           </a:xfrm>
           <a:prstGeom prst="rect">
             <a:avLst/>
@@ -12094,20 +11412,19 @@
           <a:lstStyle/>
           <a:p>
             <a:pPr algn="ctr"/>
-            <a:endParaRPr/>
-          </a:p>
-        </p:txBody>
-      </p:sp>
-      <p:sp>
-        <p:nvSpPr>
-          <p:cNvPr id="11" name="TextBox 10"/>
+          </a:p>
+        </p:txBody>
+      </p:sp>
+      <p:sp>
+        <p:nvSpPr>
+          <p:cNvPr id="10" name="TextBox 9"/>
           <p:cNvSpPr txBox="1"/>
           <p:nvPr/>
         </p:nvSpPr>
         <p:spPr>
           <a:xfrm>
-            <a:off x="552016" y="2386583"/>
-            <a:ext cx="2468879" cy="585216"/>
+            <a:off x="411480" y="1801368"/>
+            <a:ext cx="2011679" cy="603503"/>
           </a:xfrm>
           <a:prstGeom prst="rect">
             <a:avLst/>
@@ -12115,14 +11432,14 @@
           <a:noFill/>
         </p:spPr>
         <p:txBody>
-          <a:bodyPr wrap="square" lIns="0" tIns="0" rIns="0" bIns="0">
+          <a:bodyPr wrap="square" lIns="0" rIns="0" tIns="0" bIns="0">
             <a:spAutoFit/>
           </a:bodyPr>
           <a:lstStyle/>
           <a:p>
             <a:pPr algn="l"/>
             <a:r>
-              <a:rPr sz="1300" b="1" i="0">
+              <a:rPr sz="1200" b="1" i="0">
                 <a:solidFill>
                   <a:srgbClr val="FFFFFF"/>
                 </a:solidFill>
@@ -12135,14 +11452,14 @@
       </p:sp>
       <p:sp>
         <p:nvSpPr>
-          <p:cNvPr id="12" name="Rectangle 11"/>
+          <p:cNvPr id="11" name="Rectangle 10"/>
           <p:cNvSpPr/>
           <p:nvPr/>
         </p:nvSpPr>
         <p:spPr>
           <a:xfrm>
-            <a:off x="3066616" y="2276856"/>
-            <a:ext cx="8716975" cy="804672"/>
+            <a:off x="2468879" y="1709928"/>
+            <a:ext cx="3017520" cy="786384"/>
           </a:xfrm>
           <a:prstGeom prst="rect">
             <a:avLst/>
@@ -12175,20 +11492,19 @@
           <a:lstStyle/>
           <a:p>
             <a:pPr algn="ctr"/>
-            <a:endParaRPr/>
-          </a:p>
-        </p:txBody>
-      </p:sp>
-      <p:sp>
-        <p:nvSpPr>
-          <p:cNvPr id="13" name="TextBox 12"/>
+          </a:p>
+        </p:txBody>
+      </p:sp>
+      <p:sp>
+        <p:nvSpPr>
+          <p:cNvPr id="12" name="TextBox 11"/>
           <p:cNvSpPr txBox="1"/>
           <p:nvPr/>
         </p:nvSpPr>
         <p:spPr>
           <a:xfrm>
-            <a:off x="3203775" y="2368296"/>
-            <a:ext cx="8488375" cy="621792"/>
+            <a:off x="2578608" y="1801368"/>
+            <a:ext cx="2816351" cy="603503"/>
           </a:xfrm>
           <a:prstGeom prst="rect">
             <a:avLst/>
@@ -12196,20 +11512,20 @@
           <a:noFill/>
         </p:spPr>
         <p:txBody>
-          <a:bodyPr wrap="square" lIns="0" tIns="0" rIns="0" bIns="0">
+          <a:bodyPr wrap="square" lIns="0" rIns="0" tIns="0" bIns="0">
             <a:spAutoFit/>
           </a:bodyPr>
           <a:lstStyle/>
           <a:p>
             <a:pPr algn="l"/>
             <a:r>
-              <a:rPr sz="1200" b="0" i="0">
+              <a:rPr sz="1100" b="0" i="0">
                 <a:solidFill>
                   <a:srgbClr val="1A237E"/>
                 </a:solidFill>
                 <a:latin typeface="Calibri"/>
               </a:rPr>
-              <a:t>Label Encoding (proto, service, state)  •  StandardScaler
+              <a:t>Label Encoding  •  StandardScaler*
 Eksik değer → medyan ile doldurma</a:t>
             </a:r>
           </a:p>
@@ -12217,49 +11533,14 @@
       </p:sp>
       <p:sp>
         <p:nvSpPr>
-          <p:cNvPr id="14" name="TextBox 13"/>
-          <p:cNvSpPr txBox="1"/>
-          <p:nvPr/>
-        </p:nvSpPr>
-        <p:spPr>
-          <a:xfrm>
-            <a:off x="1649296" y="3081528"/>
-            <a:ext cx="274320" cy="91440"/>
-          </a:xfrm>
-          <a:prstGeom prst="rect">
-            <a:avLst/>
-          </a:prstGeom>
-          <a:noFill/>
-        </p:spPr>
-        <p:txBody>
-          <a:bodyPr wrap="square" lIns="0" tIns="0" rIns="0" bIns="0">
-            <a:spAutoFit/>
-          </a:bodyPr>
-          <a:lstStyle/>
-          <a:p>
-            <a:pPr algn="ctr"/>
-            <a:r>
-              <a:rPr sz="900" b="0" i="0">
-                <a:solidFill>
-                  <a:srgbClr val="283593"/>
-                </a:solidFill>
-                <a:latin typeface="Calibri"/>
-              </a:rPr>
-              <a:t>▼</a:t>
-            </a:r>
-          </a:p>
-        </p:txBody>
-      </p:sp>
-      <p:sp>
-        <p:nvSpPr>
-          <p:cNvPr id="15" name="Rectangle 14"/>
+          <p:cNvPr id="13" name="Rectangle 12"/>
           <p:cNvSpPr/>
           <p:nvPr/>
         </p:nvSpPr>
         <p:spPr>
           <a:xfrm>
-            <a:off x="506296" y="3136392"/>
-            <a:ext cx="2560320" cy="804672"/>
+            <a:off x="365760" y="2551176"/>
+            <a:ext cx="2103120" cy="786384"/>
           </a:xfrm>
           <a:prstGeom prst="rect">
             <a:avLst/>
@@ -12290,20 +11571,19 @@
           <a:lstStyle/>
           <a:p>
             <a:pPr algn="ctr"/>
-            <a:endParaRPr/>
-          </a:p>
-        </p:txBody>
-      </p:sp>
-      <p:sp>
-        <p:nvSpPr>
-          <p:cNvPr id="16" name="TextBox 15"/>
+          </a:p>
+        </p:txBody>
+      </p:sp>
+      <p:sp>
+        <p:nvSpPr>
+          <p:cNvPr id="14" name="TextBox 13"/>
           <p:cNvSpPr txBox="1"/>
           <p:nvPr/>
         </p:nvSpPr>
         <p:spPr>
           <a:xfrm>
-            <a:off x="552016" y="3246120"/>
-            <a:ext cx="2468879" cy="585216"/>
+            <a:off x="411480" y="2642616"/>
+            <a:ext cx="2011679" cy="603503"/>
           </a:xfrm>
           <a:prstGeom prst="rect">
             <a:avLst/>
@@ -12311,14 +11591,14 @@
           <a:noFill/>
         </p:spPr>
         <p:txBody>
-          <a:bodyPr wrap="square" lIns="0" tIns="0" rIns="0" bIns="0">
+          <a:bodyPr wrap="square" lIns="0" rIns="0" tIns="0" bIns="0">
             <a:spAutoFit/>
           </a:bodyPr>
           <a:lstStyle/>
           <a:p>
             <a:pPr algn="l"/>
             <a:r>
-              <a:rPr sz="1300" b="1" i="0">
+              <a:rPr sz="1200" b="1" i="0">
                 <a:solidFill>
                   <a:srgbClr val="FFFFFF"/>
                 </a:solidFill>
@@ -12331,14 +11611,14 @@
       </p:sp>
       <p:sp>
         <p:nvSpPr>
-          <p:cNvPr id="17" name="Rectangle 16"/>
+          <p:cNvPr id="15" name="Rectangle 14"/>
           <p:cNvSpPr/>
           <p:nvPr/>
         </p:nvSpPr>
         <p:spPr>
           <a:xfrm>
-            <a:off x="3066616" y="3136392"/>
-            <a:ext cx="8716975" cy="804672"/>
+            <a:off x="2468879" y="2551176"/>
+            <a:ext cx="3017520" cy="786384"/>
           </a:xfrm>
           <a:prstGeom prst="rect">
             <a:avLst/>
@@ -12371,20 +11651,19 @@
           <a:lstStyle/>
           <a:p>
             <a:pPr algn="ctr"/>
-            <a:endParaRPr/>
-          </a:p>
-        </p:txBody>
-      </p:sp>
-      <p:sp>
-        <p:nvSpPr>
-          <p:cNvPr id="18" name="TextBox 17"/>
+          </a:p>
+        </p:txBody>
+      </p:sp>
+      <p:sp>
+        <p:nvSpPr>
+          <p:cNvPr id="16" name="TextBox 15"/>
           <p:cNvSpPr txBox="1"/>
           <p:nvPr/>
         </p:nvSpPr>
         <p:spPr>
           <a:xfrm>
-            <a:off x="3203775" y="3227832"/>
-            <a:ext cx="8488375" cy="621792"/>
+            <a:off x="2578608" y="2642616"/>
+            <a:ext cx="2816351" cy="603503"/>
           </a:xfrm>
           <a:prstGeom prst="rect">
             <a:avLst/>
@@ -12392,70 +11671,35 @@
           <a:noFill/>
         </p:spPr>
         <p:txBody>
-          <a:bodyPr wrap="square" lIns="0" tIns="0" rIns="0" bIns="0">
+          <a:bodyPr wrap="square" lIns="0" rIns="0" tIns="0" bIns="0">
             <a:spAutoFit/>
           </a:bodyPr>
           <a:lstStyle/>
           <a:p>
             <a:pPr algn="l"/>
             <a:r>
-              <a:rPr sz="1200" b="0" i="0">
+              <a:rPr sz="1100" b="0" i="0">
                 <a:solidFill>
                   <a:srgbClr val="1A237E"/>
                 </a:solidFill>
                 <a:latin typeface="Calibri"/>
               </a:rPr>
               <a:t>Random Forest: 100 ağaç, max_depth=20
-Sınıf ağırlıklandırma: class_weight='balanced'</a:t>
-            </a:r>
-          </a:p>
-        </p:txBody>
-      </p:sp>
-      <p:sp>
-        <p:nvSpPr>
-          <p:cNvPr id="19" name="TextBox 18"/>
-          <p:cNvSpPr txBox="1"/>
-          <p:nvPr/>
-        </p:nvSpPr>
-        <p:spPr>
-          <a:xfrm>
-            <a:off x="1649296" y="3941064"/>
-            <a:ext cx="274320" cy="91440"/>
-          </a:xfrm>
-          <a:prstGeom prst="rect">
-            <a:avLst/>
-          </a:prstGeom>
-          <a:noFill/>
-        </p:spPr>
-        <p:txBody>
-          <a:bodyPr wrap="square" lIns="0" tIns="0" rIns="0" bIns="0">
-            <a:spAutoFit/>
-          </a:bodyPr>
-          <a:lstStyle/>
-          <a:p>
-            <a:pPr algn="ctr"/>
-            <a:r>
-              <a:rPr sz="900" b="0" i="0">
-                <a:solidFill>
-                  <a:srgbClr val="1565C0"/>
-                </a:solidFill>
-                <a:latin typeface="Calibri"/>
-              </a:rPr>
-              <a:t>▼</a:t>
-            </a:r>
-          </a:p>
-        </p:txBody>
-      </p:sp>
-      <p:sp>
-        <p:nvSpPr>
-          <p:cNvPr id="20" name="Rectangle 19"/>
+class_weight='balanced'</a:t>
+            </a:r>
+          </a:p>
+        </p:txBody>
+      </p:sp>
+      <p:sp>
+        <p:nvSpPr>
+          <p:cNvPr id="17" name="Rectangle 16"/>
           <p:cNvSpPr/>
           <p:nvPr/>
         </p:nvSpPr>
         <p:spPr>
           <a:xfrm>
-            <a:off x="506296" y="3995927"/>
-            <a:ext cx="2560320" cy="804672"/>
+            <a:off x="365760" y="3392424"/>
+            <a:ext cx="2103120" cy="786384"/>
           </a:xfrm>
           <a:prstGeom prst="rect">
             <a:avLst/>
@@ -12486,20 +11730,19 @@
           <a:lstStyle/>
           <a:p>
             <a:pPr algn="ctr"/>
-            <a:endParaRPr/>
-          </a:p>
-        </p:txBody>
-      </p:sp>
-      <p:sp>
-        <p:nvSpPr>
-          <p:cNvPr id="21" name="TextBox 20"/>
+          </a:p>
+        </p:txBody>
+      </p:sp>
+      <p:sp>
+        <p:nvSpPr>
+          <p:cNvPr id="18" name="TextBox 17"/>
           <p:cNvSpPr txBox="1"/>
           <p:nvPr/>
         </p:nvSpPr>
         <p:spPr>
           <a:xfrm>
-            <a:off x="552016" y="4105655"/>
-            <a:ext cx="2468879" cy="585216"/>
+            <a:off x="411480" y="3483864"/>
+            <a:ext cx="2011679" cy="603503"/>
           </a:xfrm>
           <a:prstGeom prst="rect">
             <a:avLst/>
@@ -12507,14 +11750,14 @@
           <a:noFill/>
         </p:spPr>
         <p:txBody>
-          <a:bodyPr wrap="square" lIns="0" tIns="0" rIns="0" bIns="0">
+          <a:bodyPr wrap="square" lIns="0" rIns="0" tIns="0" bIns="0">
             <a:spAutoFit/>
           </a:bodyPr>
           <a:lstStyle/>
           <a:p>
             <a:pPr algn="l"/>
             <a:r>
-              <a:rPr sz="1300" b="1" i="0">
+              <a:rPr sz="1200" b="1" i="0">
                 <a:solidFill>
                   <a:srgbClr val="FFFFFF"/>
                 </a:solidFill>
@@ -12527,14 +11770,14 @@
       </p:sp>
       <p:sp>
         <p:nvSpPr>
-          <p:cNvPr id="22" name="Rectangle 21"/>
+          <p:cNvPr id="19" name="Rectangle 18"/>
           <p:cNvSpPr/>
           <p:nvPr/>
         </p:nvSpPr>
         <p:spPr>
           <a:xfrm>
-            <a:off x="3066616" y="3995927"/>
-            <a:ext cx="8716975" cy="804672"/>
+            <a:off x="2468879" y="3392424"/>
+            <a:ext cx="3017520" cy="786384"/>
           </a:xfrm>
           <a:prstGeom prst="rect">
             <a:avLst/>
@@ -12567,20 +11810,19 @@
           <a:lstStyle/>
           <a:p>
             <a:pPr algn="ctr"/>
-            <a:endParaRPr/>
-          </a:p>
-        </p:txBody>
-      </p:sp>
-      <p:sp>
-        <p:nvSpPr>
-          <p:cNvPr id="23" name="TextBox 22"/>
+          </a:p>
+        </p:txBody>
+      </p:sp>
+      <p:sp>
+        <p:nvSpPr>
+          <p:cNvPr id="20" name="TextBox 19"/>
           <p:cNvSpPr txBox="1"/>
           <p:nvPr/>
         </p:nvSpPr>
         <p:spPr>
           <a:xfrm>
-            <a:off x="3203775" y="4087367"/>
-            <a:ext cx="8488375" cy="621792"/>
+            <a:off x="2578608" y="3483864"/>
+            <a:ext cx="2816351" cy="603503"/>
           </a:xfrm>
           <a:prstGeom prst="rect">
             <a:avLst/>
@@ -12588,20 +11830,20 @@
           <a:noFill/>
         </p:spPr>
         <p:txBody>
-          <a:bodyPr wrap="square" lIns="0" tIns="0" rIns="0" bIns="0">
+          <a:bodyPr wrap="square" lIns="0" rIns="0" tIns="0" bIns="0">
             <a:spAutoFit/>
           </a:bodyPr>
           <a:lstStyle/>
           <a:p>
             <a:pPr algn="l"/>
             <a:r>
-              <a:rPr sz="1200" b="0" i="0">
+              <a:rPr sz="1100" b="0" i="0">
                 <a:solidFill>
                   <a:srgbClr val="1A237E"/>
                 </a:solidFill>
                 <a:latin typeface="Calibri"/>
               </a:rPr>
-              <a:t>Accuracy, F1-Score, ROC-AUC
+              <a:t>Accuracy, F1, ROC-AUC
 Confusion Matrix  •  Feature Importance</a:t>
             </a:r>
           </a:p>
@@ -12609,49 +11851,14 @@
       </p:sp>
       <p:sp>
         <p:nvSpPr>
-          <p:cNvPr id="24" name="TextBox 23"/>
-          <p:cNvSpPr txBox="1"/>
-          <p:nvPr/>
-        </p:nvSpPr>
-        <p:spPr>
-          <a:xfrm>
-            <a:off x="1649296" y="4800599"/>
-            <a:ext cx="274320" cy="91440"/>
-          </a:xfrm>
-          <a:prstGeom prst="rect">
-            <a:avLst/>
-          </a:prstGeom>
-          <a:noFill/>
-        </p:spPr>
-        <p:txBody>
-          <a:bodyPr wrap="square" lIns="0" tIns="0" rIns="0" bIns="0">
-            <a:spAutoFit/>
-          </a:bodyPr>
-          <a:lstStyle/>
-          <a:p>
-            <a:pPr algn="ctr"/>
-            <a:r>
-              <a:rPr sz="900" b="0" i="0">
-                <a:solidFill>
-                  <a:srgbClr val="1A6D37"/>
-                </a:solidFill>
-                <a:latin typeface="Calibri"/>
-              </a:rPr>
-              <a:t>▼</a:t>
-            </a:r>
-          </a:p>
-        </p:txBody>
-      </p:sp>
-      <p:sp>
-        <p:nvSpPr>
-          <p:cNvPr id="25" name="Rectangle 24"/>
+          <p:cNvPr id="21" name="Rectangle 20"/>
           <p:cNvSpPr/>
           <p:nvPr/>
         </p:nvSpPr>
         <p:spPr>
           <a:xfrm>
-            <a:off x="506296" y="4855464"/>
-            <a:ext cx="2560320" cy="804672"/>
+            <a:off x="365760" y="4233672"/>
+            <a:ext cx="2103120" cy="786384"/>
           </a:xfrm>
           <a:prstGeom prst="rect">
             <a:avLst/>
@@ -12682,20 +11889,19 @@
           <a:lstStyle/>
           <a:p>
             <a:pPr algn="ctr"/>
-            <a:endParaRPr/>
-          </a:p>
-        </p:txBody>
-      </p:sp>
-      <p:sp>
-        <p:nvSpPr>
-          <p:cNvPr id="26" name="TextBox 25"/>
+          </a:p>
+        </p:txBody>
+      </p:sp>
+      <p:sp>
+        <p:nvSpPr>
+          <p:cNvPr id="22" name="TextBox 21"/>
           <p:cNvSpPr txBox="1"/>
           <p:nvPr/>
         </p:nvSpPr>
         <p:spPr>
           <a:xfrm>
-            <a:off x="552016" y="4965192"/>
-            <a:ext cx="2468879" cy="585216"/>
+            <a:off x="411480" y="4325112"/>
+            <a:ext cx="2011679" cy="603503"/>
           </a:xfrm>
           <a:prstGeom prst="rect">
             <a:avLst/>
@@ -12703,14 +11909,14 @@
           <a:noFill/>
         </p:spPr>
         <p:txBody>
-          <a:bodyPr wrap="square" lIns="0" tIns="0" rIns="0" bIns="0">
+          <a:bodyPr wrap="square" lIns="0" rIns="0" tIns="0" bIns="0">
             <a:spAutoFit/>
           </a:bodyPr>
           <a:lstStyle/>
           <a:p>
             <a:pPr algn="l"/>
             <a:r>
-              <a:rPr sz="1300" b="1" i="0">
+              <a:rPr sz="1200" b="1" i="0">
                 <a:solidFill>
                   <a:srgbClr val="FFFFFF"/>
                 </a:solidFill>
@@ -12723,14 +11929,14 @@
       </p:sp>
       <p:sp>
         <p:nvSpPr>
-          <p:cNvPr id="27" name="Rectangle 26"/>
+          <p:cNvPr id="23" name="Rectangle 22"/>
           <p:cNvSpPr/>
           <p:nvPr/>
         </p:nvSpPr>
         <p:spPr>
           <a:xfrm>
-            <a:off x="3066616" y="4855464"/>
-            <a:ext cx="8716975" cy="804672"/>
+            <a:off x="2468879" y="4233672"/>
+            <a:ext cx="3017520" cy="786384"/>
           </a:xfrm>
           <a:prstGeom prst="rect">
             <a:avLst/>
@@ -12763,20 +11969,19 @@
           <a:lstStyle/>
           <a:p>
             <a:pPr algn="ctr"/>
-            <a:endParaRPr/>
-          </a:p>
-        </p:txBody>
-      </p:sp>
-      <p:sp>
-        <p:nvSpPr>
-          <p:cNvPr id="28" name="TextBox 27"/>
+          </a:p>
+        </p:txBody>
+      </p:sp>
+      <p:sp>
+        <p:nvSpPr>
+          <p:cNvPr id="24" name="TextBox 23"/>
           <p:cNvSpPr txBox="1"/>
           <p:nvPr/>
         </p:nvSpPr>
         <p:spPr>
           <a:xfrm>
-            <a:off x="3203775" y="4946904"/>
-            <a:ext cx="8488375" cy="621792"/>
+            <a:off x="2578608" y="4325112"/>
+            <a:ext cx="2816351" cy="603503"/>
           </a:xfrm>
           <a:prstGeom prst="rect">
             <a:avLst/>
@@ -12784,91 +11989,34 @@
           <a:noFill/>
         </p:spPr>
         <p:txBody>
-          <a:bodyPr wrap="square" lIns="0" tIns="0" rIns="0" bIns="0">
+          <a:bodyPr wrap="square" lIns="0" rIns="0" tIns="0" bIns="0">
             <a:spAutoFit/>
           </a:bodyPr>
           <a:lstStyle/>
           <a:p>
             <a:pPr algn="l"/>
             <a:r>
-              <a:rPr sz="1200" b="0" i="0">
+              <a:rPr sz="1100" b="0" i="0">
                 <a:solidFill>
                   <a:srgbClr val="1A237E"/>
                 </a:solidFill>
                 <a:latin typeface="Calibri"/>
               </a:rPr>
-              <a:t>FP/FN risk değerlendirmesi
-GDPR / Mahremiyet ve veri minimizasyonu incelemesi</a:t>
-            </a:r>
-          </a:p>
-        </p:txBody>
-      </p:sp>
-      <p:sp>
-        <p:nvSpPr>
-          <p:cNvPr id="29" name="Rectangle 28">
-            <a:extLst>
-              <a:ext uri="{FF2B5EF4-FFF2-40B4-BE49-F238E27FC236}">
-                <a16:creationId xmlns:a16="http://schemas.microsoft.com/office/drawing/2014/main" id="{3E63E23E-796E-A83F-BE98-90D8F8520684}"/>
-              </a:ext>
-            </a:extLst>
-          </p:cNvPr>
-          <p:cNvSpPr/>
-          <p:nvPr/>
-        </p:nvSpPr>
-        <p:spPr>
-          <a:xfrm>
-            <a:off x="305" y="-676"/>
-            <a:ext cx="12191695" cy="777240"/>
-          </a:xfrm>
-          <a:prstGeom prst="rect">
-            <a:avLst/>
-          </a:prstGeom>
-          <a:solidFill>
-            <a:srgbClr val="1A237E"/>
-          </a:solidFill>
-          <a:ln>
-            <a:noFill/>
-          </a:ln>
-        </p:spPr>
-        <p:style>
-          <a:lnRef idx="1">
-            <a:schemeClr val="accent1"/>
-          </a:lnRef>
-          <a:fillRef idx="3">
-            <a:schemeClr val="accent1"/>
-          </a:fillRef>
-          <a:effectRef idx="2">
-            <a:schemeClr val="accent1"/>
-          </a:effectRef>
-          <a:fontRef idx="minor">
-            <a:schemeClr val="lt1"/>
-          </a:fontRef>
-        </p:style>
-        <p:txBody>
-          <a:bodyPr rtlCol="0" anchor="ctr"/>
-          <a:lstStyle/>
-          <a:p>
-            <a:pPr algn="ctr"/>
-            <a:endParaRPr/>
-          </a:p>
-        </p:txBody>
-      </p:sp>
-      <p:sp>
-        <p:nvSpPr>
-          <p:cNvPr id="30" name="TextBox 29">
-            <a:extLst>
-              <a:ext uri="{FF2B5EF4-FFF2-40B4-BE49-F238E27FC236}">
-                <a16:creationId xmlns:a16="http://schemas.microsoft.com/office/drawing/2014/main" id="{FE616E97-FC74-CC51-EE3C-53E3DB62A451}"/>
-              </a:ext>
-            </a:extLst>
-          </p:cNvPr>
+              <a:t>FP/FN risk  •  GDPR / Mahremiyet</a:t>
+            </a:r>
+          </a:p>
+        </p:txBody>
+      </p:sp>
+      <p:sp>
+        <p:nvSpPr>
+          <p:cNvPr id="25" name="TextBox 24"/>
           <p:cNvSpPr txBox="1"/>
           <p:nvPr/>
         </p:nvSpPr>
         <p:spPr>
           <a:xfrm>
-            <a:off x="274625" y="72476"/>
-            <a:ext cx="11643055" cy="630936"/>
+            <a:off x="365760" y="5120640"/>
+            <a:ext cx="5120640" cy="365760"/>
           </a:xfrm>
           <a:prstGeom prst="rect">
             <a:avLst/>
@@ -12876,34 +12024,34 @@
           <a:noFill/>
         </p:spPr>
         <p:txBody>
-          <a:bodyPr wrap="square" lIns="0" tIns="0" rIns="0" bIns="0">
+          <a:bodyPr wrap="square" lIns="0" rIns="0" tIns="0" bIns="0">
             <a:spAutoFit/>
           </a:bodyPr>
           <a:lstStyle/>
           <a:p>
             <a:pPr algn="l"/>
             <a:r>
-              <a:rPr sz="2600" b="1" i="0">
-                <a:solidFill>
-                  <a:srgbClr val="FFFFFF"/>
+              <a:rPr sz="900" b="0" i="1">
+                <a:solidFill>
+                  <a:srgbClr val="78809A"/>
                 </a:solidFill>
                 <a:latin typeface="Calibri"/>
               </a:rPr>
-              <a:t>Metodoloji: Analiz Boru Hattı</a:t>
-            </a:r>
-          </a:p>
-        </p:txBody>
-      </p:sp>
-      <p:sp>
-        <p:nvSpPr>
-          <p:cNvPr id="31" name="Rectangle 30"/>
+              <a:t>* RF ağaç tabanlıdır; ölçeğe duyarsızdır. Scaler pipeline standardizasyonu için eklenmiştir.</a:t>
+            </a:r>
+          </a:p>
+        </p:txBody>
+      </p:sp>
+      <p:sp>
+        <p:nvSpPr>
+          <p:cNvPr id="26" name="Rectangle 25"/>
           <p:cNvSpPr/>
           <p:nvPr/>
         </p:nvSpPr>
         <p:spPr>
           <a:xfrm>
-            <a:off x="3383280" y="886968"/>
-            <a:ext cx="8442655" cy="5577840"/>
+            <a:off x="5760720" y="868680"/>
+            <a:ext cx="6065215" cy="5715000"/>
           </a:xfrm>
           <a:prstGeom prst="rect">
             <a:avLst/>
@@ -12941,14 +12089,57 @@
       </p:sp>
       <p:sp>
         <p:nvSpPr>
-          <p:cNvPr id="32" name="TextBox 31"/>
+          <p:cNvPr id="27" name="Rectangle 26"/>
+          <p:cNvSpPr/>
+          <p:nvPr/>
+        </p:nvSpPr>
+        <p:spPr>
+          <a:xfrm>
+            <a:off x="5760720" y="868680"/>
+            <a:ext cx="6065215" cy="475488"/>
+          </a:xfrm>
+          <a:prstGeom prst="rect">
+            <a:avLst/>
+          </a:prstGeom>
+          <a:solidFill>
+            <a:srgbClr val="1A237E"/>
+          </a:solidFill>
+          <a:ln>
+            <a:noFill/>
+          </a:ln>
+        </p:spPr>
+        <p:style>
+          <a:lnRef idx="1">
+            <a:schemeClr val="accent1"/>
+          </a:lnRef>
+          <a:fillRef idx="3">
+            <a:schemeClr val="accent1"/>
+          </a:fillRef>
+          <a:effectRef idx="2">
+            <a:schemeClr val="accent1"/>
+          </a:effectRef>
+          <a:fontRef idx="minor">
+            <a:schemeClr val="lt1"/>
+          </a:fontRef>
+        </p:style>
+        <p:txBody>
+          <a:bodyPr rtlCol="0" anchor="ctr"/>
+          <a:lstStyle/>
+          <a:p>
+            <a:pPr algn="ctr"/>
+          </a:p>
+        </p:txBody>
+      </p:sp>
+      <p:sp>
+        <p:nvSpPr>
+          <p:cNvPr id="28" name="TextBox 27"/>
           <p:cNvSpPr txBox="1"/>
           <p:nvPr/>
         </p:nvSpPr>
         <p:spPr>
           <a:xfrm>
-            <a:off x="3493008" y="996695"/>
-            <a:ext cx="8223199" cy="411480"/>
+            <a:off x="5897880" y="941832"/>
+            <a:ext cx="5790895" cy="347472"/>
           </a:xfrm>
           <a:prstGeom prst="rect">
             <a:avLst/>
@@ -12956,7 +12147,7 @@
           <a:noFill/>
         </p:spPr>
         <p:txBody>
-          <a:bodyPr wrap="square" lIns="45720" rIns="45720" tIns="27432" bIns="27432">
+          <a:bodyPr wrap="square" lIns="0" rIns="0" tIns="0" bIns="0">
             <a:spAutoFit/>
           </a:bodyPr>
           <a:lstStyle/>
@@ -12965,7 +12156,7 @@
             <a:r>
               <a:rPr sz="1500" b="1" i="0">
                 <a:solidFill>
-                  <a:srgbClr val="1A237E"/>
+                  <a:srgbClr val="FFFFFF"/>
                 </a:solidFill>
                 <a:latin typeface="Calibri"/>
               </a:rPr>
@@ -12976,14 +12167,14 @@
       </p:sp>
       <p:sp>
         <p:nvSpPr>
-          <p:cNvPr id="33" name="Rectangle 32"/>
+          <p:cNvPr id="29" name="Rectangle 28"/>
           <p:cNvSpPr/>
           <p:nvPr/>
         </p:nvSpPr>
         <p:spPr>
           <a:xfrm>
-            <a:off x="3493008" y="1481328"/>
-            <a:ext cx="8223199" cy="73152"/>
+            <a:off x="5870448" y="1435607"/>
+            <a:ext cx="54864" cy="768095"/>
           </a:xfrm>
           <a:prstGeom prst="rect">
             <a:avLst/>
@@ -13019,14 +12210,14 @@
       </p:sp>
       <p:sp>
         <p:nvSpPr>
-          <p:cNvPr id="34" name="TextBox 33"/>
+          <p:cNvPr id="30" name="TextBox 29"/>
           <p:cNvSpPr txBox="1"/>
           <p:nvPr/>
         </p:nvSpPr>
         <p:spPr>
           <a:xfrm>
-            <a:off x="3493008" y="1536192"/>
-            <a:ext cx="8223199" cy="274320"/>
+            <a:off x="5989320" y="1435607"/>
+            <a:ext cx="5699455" cy="256032"/>
           </a:xfrm>
           <a:prstGeom prst="rect">
             <a:avLst/>
@@ -13034,7 +12225,7 @@
           <a:noFill/>
         </p:spPr>
         <p:txBody>
-          <a:bodyPr wrap="square" lIns="45720" rIns="45720" tIns="27432" bIns="27432">
+          <a:bodyPr wrap="square" lIns="0" rIns="0" tIns="0" bIns="0">
             <a:spAutoFit/>
           </a:bodyPr>
           <a:lstStyle/>
@@ -13043,7 +12234,7 @@
             <a:r>
               <a:rPr sz="1200" b="1" i="0">
                 <a:solidFill>
-                  <a:srgbClr val="1565C0"/>
+                  <a:srgbClr val="1A237E"/>
                 </a:solidFill>
                 <a:latin typeface="Calibri"/>
               </a:rPr>
@@ -13054,14 +12245,14 @@
       </p:sp>
       <p:sp>
         <p:nvSpPr>
-          <p:cNvPr id="35" name="TextBox 34"/>
+          <p:cNvPr id="31" name="TextBox 30"/>
           <p:cNvSpPr txBox="1"/>
           <p:nvPr/>
         </p:nvSpPr>
         <p:spPr>
           <a:xfrm>
-            <a:off x="3566160" y="1801368"/>
-            <a:ext cx="8076895" cy="457200"/>
+            <a:off x="5989320" y="1691639"/>
+            <a:ext cx="5699455" cy="731519"/>
           </a:xfrm>
           <a:prstGeom prst="rect">
             <a:avLst/>
@@ -13069,7 +12260,7 @@
           <a:noFill/>
         </p:spPr>
         <p:txBody>
-          <a:bodyPr wrap="square" lIns="45720" rIns="45720" tIns="27432" bIns="27432">
+          <a:bodyPr wrap="square" lIns="0" rIns="0" tIns="0" bIns="0">
             <a:spAutoFit/>
           </a:bodyPr>
           <a:lstStyle/>
@@ -13082,21 +12273,21 @@
                 </a:solidFill>
                 <a:latin typeface="Calibri"/>
               </a:rPr>
-              <a:t>Yüzlerce ağacın oylama ortalaması alındığından tek ağaca göre çok daha kararlıdır.</a:t>
-            </a:r>
-          </a:p>
-        </p:txBody>
-      </p:sp>
-      <p:sp>
-        <p:nvSpPr>
-          <p:cNvPr id="36" name="Rectangle 35"/>
+              <a:t>Yüzlerce ağacın ortalaması → tek ağaca göre çok daha kararlı</a:t>
+            </a:r>
+          </a:p>
+        </p:txBody>
+      </p:sp>
+      <p:sp>
+        <p:nvSpPr>
+          <p:cNvPr id="32" name="Rectangle 31"/>
           <p:cNvSpPr/>
           <p:nvPr/>
         </p:nvSpPr>
         <p:spPr>
           <a:xfrm>
-            <a:off x="3493008" y="2377440"/>
-            <a:ext cx="8223199" cy="73152"/>
+            <a:off x="5870448" y="2459735"/>
+            <a:ext cx="54864" cy="768095"/>
           </a:xfrm>
           <a:prstGeom prst="rect">
             <a:avLst/>
@@ -13132,14 +12323,14 @@
       </p:sp>
       <p:sp>
         <p:nvSpPr>
-          <p:cNvPr id="37" name="TextBox 36"/>
+          <p:cNvPr id="33" name="TextBox 32"/>
           <p:cNvSpPr txBox="1"/>
           <p:nvPr/>
         </p:nvSpPr>
         <p:spPr>
           <a:xfrm>
-            <a:off x="3493008" y="2432304"/>
-            <a:ext cx="8223199" cy="274320"/>
+            <a:off x="5989320" y="2459735"/>
+            <a:ext cx="5699455" cy="256032"/>
           </a:xfrm>
           <a:prstGeom prst="rect">
             <a:avLst/>
@@ -13147,7 +12338,7 @@
           <a:noFill/>
         </p:spPr>
         <p:txBody>
-          <a:bodyPr wrap="square" lIns="45720" rIns="45720" tIns="27432" bIns="27432">
+          <a:bodyPr wrap="square" lIns="0" rIns="0" tIns="0" bIns="0">
             <a:spAutoFit/>
           </a:bodyPr>
           <a:lstStyle/>
@@ -13156,7 +12347,7 @@
             <a:r>
               <a:rPr sz="1200" b="1" i="0">
                 <a:solidFill>
-                  <a:srgbClr val="1565C0"/>
+                  <a:srgbClr val="1A237E"/>
                 </a:solidFill>
                 <a:latin typeface="Calibri"/>
               </a:rPr>
@@ -13167,14 +12358,14 @@
       </p:sp>
       <p:sp>
         <p:nvSpPr>
-          <p:cNvPr id="38" name="TextBox 37"/>
+          <p:cNvPr id="34" name="TextBox 33"/>
           <p:cNvSpPr txBox="1"/>
           <p:nvPr/>
         </p:nvSpPr>
         <p:spPr>
           <a:xfrm>
-            <a:off x="3566160" y="2697480"/>
-            <a:ext cx="8076895" cy="457200"/>
+            <a:off x="5989320" y="2715768"/>
+            <a:ext cx="5699455" cy="731519"/>
           </a:xfrm>
           <a:prstGeom prst="rect">
             <a:avLst/>
@@ -13182,7 +12373,7 @@
           <a:noFill/>
         </p:spPr>
         <p:txBody>
-          <a:bodyPr wrap="square" lIns="45720" rIns="45720" tIns="27432" bIns="27432">
+          <a:bodyPr wrap="square" lIns="0" rIns="0" tIns="0" bIns="0">
             <a:spAutoFit/>
           </a:bodyPr>
           <a:lstStyle/>
@@ -13195,21 +12386,21 @@
                 </a:solidFill>
                 <a:latin typeface="Calibri"/>
               </a:rPr>
-              <a:t>Lojistik regresyon gibi özellik dağılımı varsayımına ihtiyaç duymaz.</a:t>
-            </a:r>
-          </a:p>
-        </p:txBody>
-      </p:sp>
-      <p:sp>
-        <p:nvSpPr>
-          <p:cNvPr id="39" name="Rectangle 38"/>
+              <a:t>Lojistik regresyon gibi normallik varsayımı gerekmez</a:t>
+            </a:r>
+          </a:p>
+        </p:txBody>
+      </p:sp>
+      <p:sp>
+        <p:nvSpPr>
+          <p:cNvPr id="35" name="Rectangle 34"/>
           <p:cNvSpPr/>
           <p:nvPr/>
         </p:nvSpPr>
         <p:spPr>
           <a:xfrm>
-            <a:off x="3493008" y="3273552"/>
-            <a:ext cx="8223199" cy="73152"/>
+            <a:off x="5870448" y="3483863"/>
+            <a:ext cx="54864" cy="768095"/>
           </a:xfrm>
           <a:prstGeom prst="rect">
             <a:avLst/>
@@ -13245,14 +12436,14 @@
       </p:sp>
       <p:sp>
         <p:nvSpPr>
-          <p:cNvPr id="40" name="TextBox 39"/>
+          <p:cNvPr id="36" name="TextBox 35"/>
           <p:cNvSpPr txBox="1"/>
           <p:nvPr/>
         </p:nvSpPr>
         <p:spPr>
           <a:xfrm>
-            <a:off x="3493008" y="3328416"/>
-            <a:ext cx="8223199" cy="274320"/>
+            <a:off x="5989320" y="3483863"/>
+            <a:ext cx="5699455" cy="256032"/>
           </a:xfrm>
           <a:prstGeom prst="rect">
             <a:avLst/>
@@ -13260,7 +12451,7 @@
           <a:noFill/>
         </p:spPr>
         <p:txBody>
-          <a:bodyPr wrap="square" lIns="45720" rIns="45720" tIns="27432" bIns="27432">
+          <a:bodyPr wrap="square" lIns="0" rIns="0" tIns="0" bIns="0">
             <a:spAutoFit/>
           </a:bodyPr>
           <a:lstStyle/>
@@ -13269,25 +12460,25 @@
             <a:r>
               <a:rPr sz="1200" b="1" i="0">
                 <a:solidFill>
-                  <a:srgbClr val="1565C0"/>
+                  <a:srgbClr val="1A237E"/>
                 </a:solidFill>
                 <a:latin typeface="Calibri"/>
               </a:rPr>
-              <a:t>Karma özellik tipleri</a:t>
-            </a:r>
-          </a:p>
-        </p:txBody>
-      </p:sp>
-      <p:sp>
-        <p:nvSpPr>
-          <p:cNvPr id="41" name="TextBox 40"/>
+              <a:t>Karma özellik desteği</a:t>
+            </a:r>
+          </a:p>
+        </p:txBody>
+      </p:sp>
+      <p:sp>
+        <p:nvSpPr>
+          <p:cNvPr id="37" name="TextBox 36"/>
           <p:cNvSpPr txBox="1"/>
           <p:nvPr/>
         </p:nvSpPr>
         <p:spPr>
           <a:xfrm>
-            <a:off x="3566160" y="3593592"/>
-            <a:ext cx="8076895" cy="457200"/>
+            <a:off x="5989320" y="3739896"/>
+            <a:ext cx="5699455" cy="731519"/>
           </a:xfrm>
           <a:prstGeom prst="rect">
             <a:avLst/>
@@ -13295,7 +12486,7 @@
           <a:noFill/>
         </p:spPr>
         <p:txBody>
-          <a:bodyPr wrap="square" lIns="45720" rIns="45720" tIns="27432" bIns="27432">
+          <a:bodyPr wrap="square" lIns="0" rIns="0" tIns="0" bIns="0">
             <a:spAutoFit/>
           </a:bodyPr>
           <a:lstStyle/>
@@ -13308,21 +12499,21 @@
                 </a:solidFill>
                 <a:latin typeface="Calibri"/>
               </a:rPr>
-              <a:t>Sayısal + kodlanmış kategorik özellikleri aynı anda işleyebilir.</a:t>
-            </a:r>
-          </a:p>
-        </p:txBody>
-      </p:sp>
-      <p:sp>
-        <p:nvSpPr>
-          <p:cNvPr id="42" name="Rectangle 41"/>
+              <a:t>Sayısal + kodlanmış kategorik özellikleri aynı anda işler</a:t>
+            </a:r>
+          </a:p>
+        </p:txBody>
+      </p:sp>
+      <p:sp>
+        <p:nvSpPr>
+          <p:cNvPr id="38" name="Rectangle 37"/>
           <p:cNvSpPr/>
           <p:nvPr/>
         </p:nvSpPr>
         <p:spPr>
           <a:xfrm>
-            <a:off x="3493008" y="4169664"/>
-            <a:ext cx="8223199" cy="73152"/>
+            <a:off x="5870448" y="4507992"/>
+            <a:ext cx="54864" cy="768095"/>
           </a:xfrm>
           <a:prstGeom prst="rect">
             <a:avLst/>
@@ -13358,14 +12549,14 @@
       </p:sp>
       <p:sp>
         <p:nvSpPr>
-          <p:cNvPr id="43" name="TextBox 42"/>
+          <p:cNvPr id="39" name="TextBox 38"/>
           <p:cNvSpPr txBox="1"/>
           <p:nvPr/>
         </p:nvSpPr>
         <p:spPr>
           <a:xfrm>
-            <a:off x="3493008" y="4224528"/>
-            <a:ext cx="8223199" cy="274320"/>
+            <a:off x="5989320" y="4507992"/>
+            <a:ext cx="5699455" cy="256032"/>
           </a:xfrm>
           <a:prstGeom prst="rect">
             <a:avLst/>
@@ -13373,7 +12564,7 @@
           <a:noFill/>
         </p:spPr>
         <p:txBody>
-          <a:bodyPr wrap="square" lIns="45720" rIns="45720" tIns="27432" bIns="27432">
+          <a:bodyPr wrap="square" lIns="0" rIns="0" tIns="0" bIns="0">
             <a:spAutoFit/>
           </a:bodyPr>
           <a:lstStyle/>
@@ -13382,7 +12573,7 @@
             <a:r>
               <a:rPr sz="1200" b="1" i="0">
                 <a:solidFill>
-                  <a:srgbClr val="1565C0"/>
+                  <a:srgbClr val="1A237E"/>
                 </a:solidFill>
                 <a:latin typeface="Calibri"/>
               </a:rPr>
@@ -13393,14 +12584,14 @@
       </p:sp>
       <p:sp>
         <p:nvSpPr>
-          <p:cNvPr id="44" name="TextBox 43"/>
+          <p:cNvPr id="40" name="TextBox 39"/>
           <p:cNvSpPr txBox="1"/>
           <p:nvPr/>
         </p:nvSpPr>
         <p:spPr>
           <a:xfrm>
-            <a:off x="3566160" y="4489704"/>
-            <a:ext cx="8076895" cy="457200"/>
+            <a:off x="5989320" y="4764024"/>
+            <a:ext cx="5699455" cy="731519"/>
           </a:xfrm>
           <a:prstGeom prst="rect">
             <a:avLst/>
@@ -13408,7 +12599,7 @@
           <a:noFill/>
         </p:spPr>
         <p:txBody>
-          <a:bodyPr wrap="square" lIns="45720" rIns="45720" tIns="27432" bIns="27432">
+          <a:bodyPr wrap="square" lIns="0" rIns="0" tIns="0" bIns="0">
             <a:spAutoFit/>
           </a:bodyPr>
           <a:lstStyle/>
@@ -13421,21 +12612,21 @@
                 </a:solidFill>
                 <a:latin typeface="Calibri"/>
               </a:rPr>
-              <a:t>Feature importance skoru sayesinde hangi özelliğin ne kadar katkı verdiği ölçülür.</a:t>
-            </a:r>
-          </a:p>
-        </p:txBody>
-      </p:sp>
-      <p:sp>
-        <p:nvSpPr>
-          <p:cNvPr id="45" name="Rectangle 44"/>
+              <a:t>Feature importance → her özelliğin katkısı ölçülebilir</a:t>
+            </a:r>
+          </a:p>
+        </p:txBody>
+      </p:sp>
+      <p:sp>
+        <p:nvSpPr>
+          <p:cNvPr id="41" name="Rectangle 40"/>
           <p:cNvSpPr/>
           <p:nvPr/>
         </p:nvSpPr>
         <p:spPr>
           <a:xfrm>
-            <a:off x="3493008" y="5065776"/>
-            <a:ext cx="8223199" cy="73152"/>
+            <a:off x="5870448" y="5532119"/>
+            <a:ext cx="54864" cy="768095"/>
           </a:xfrm>
           <a:prstGeom prst="rect">
             <a:avLst/>
@@ -13471,14 +12662,14 @@
       </p:sp>
       <p:sp>
         <p:nvSpPr>
-          <p:cNvPr id="46" name="TextBox 45"/>
+          <p:cNvPr id="42" name="TextBox 41"/>
           <p:cNvSpPr txBox="1"/>
           <p:nvPr/>
         </p:nvSpPr>
         <p:spPr>
           <a:xfrm>
-            <a:off x="3493008" y="5120640"/>
-            <a:ext cx="8223199" cy="274320"/>
+            <a:off x="5989320" y="5532119"/>
+            <a:ext cx="5699455" cy="256032"/>
           </a:xfrm>
           <a:prstGeom prst="rect">
             <a:avLst/>
@@ -13486,7 +12677,7 @@
           <a:noFill/>
         </p:spPr>
         <p:txBody>
-          <a:bodyPr wrap="square" lIns="45720" rIns="45720" tIns="27432" bIns="27432">
+          <a:bodyPr wrap="square" lIns="0" rIns="0" tIns="0" bIns="0">
             <a:spAutoFit/>
           </a:bodyPr>
           <a:lstStyle/>
@@ -13495,25 +12686,25 @@
             <a:r>
               <a:rPr sz="1200" b="1" i="0">
                 <a:solidFill>
-                  <a:srgbClr val="1565C0"/>
+                  <a:srgbClr val="1A237E"/>
                 </a:solidFill>
                 <a:latin typeface="Calibri"/>
               </a:rPr>
-              <a:t>StandardScaler notu</a:t>
-            </a:r>
-          </a:p>
-        </p:txBody>
-      </p:sp>
-      <p:sp>
-        <p:nvSpPr>
-          <p:cNvPr id="47" name="TextBox 46"/>
+              <a:t>Ölçek bağımsızlığı</a:t>
+            </a:r>
+          </a:p>
+        </p:txBody>
+      </p:sp>
+      <p:sp>
+        <p:nvSpPr>
+          <p:cNvPr id="43" name="TextBox 42"/>
           <p:cNvSpPr txBox="1"/>
           <p:nvPr/>
         </p:nvSpPr>
         <p:spPr>
           <a:xfrm>
-            <a:off x="3566160" y="5385816"/>
-            <a:ext cx="8076895" cy="457200"/>
+            <a:off x="5989320" y="5788151"/>
+            <a:ext cx="5699455" cy="731519"/>
           </a:xfrm>
           <a:prstGeom prst="rect">
             <a:avLst/>
@@ -13521,7 +12712,7 @@
           <a:noFill/>
         </p:spPr>
         <p:txBody>
-          <a:bodyPr wrap="square" lIns="45720" rIns="45720" tIns="27432" bIns="27432">
+          <a:bodyPr wrap="square" lIns="0" rIns="0" tIns="0" bIns="0">
             <a:spAutoFit/>
           </a:bodyPr>
           <a:lstStyle/>
@@ -13534,8 +12725,7 @@
                 </a:solidFill>
                 <a:latin typeface="Calibri"/>
               </a:rPr>
-              <a:t>RF ölçeğe duyarsızdır; scaler pipeline standardizasyonu
-için eklenmiştir, modelin zorunluluğundan değil.</a:t>
+              <a:t>Bölünmeler sıralamaya dayalı; StandardScaler modelin zorunluluğu değildir</a:t>
             </a:r>
           </a:p>
         </p:txBody>
@@ -13549,7 +12739,7 @@
 </file>
 
 <file path=ppt/slides/slide8.xml><?xml version="1.0" encoding="utf-8"?>
-<p:sld xmlns:a="http://schemas.openxmlformats.org/drawingml/2006/main" xmlns:r="http://schemas.openxmlformats.org/officeDocument/2006/relationships" xmlns:p="http://schemas.openxmlformats.org/presentationml/2006/main">
+<p:sld xmlns:a="http://schemas.openxmlformats.org/drawingml/2006/main" xmlns:p="http://schemas.openxmlformats.org/presentationml/2006/main" xmlns:r="http://schemas.openxmlformats.org/officeDocument/2006/relationships">
   <p:cSld>
     <p:bg>
       <p:bgPr>
@@ -13565,14 +12755,7 @@
         <p:cNvGrpSpPr/>
         <p:nvPr/>
       </p:nvGrpSpPr>
-      <p:grpSpPr>
-        <a:xfrm>
-          <a:off x="0" y="0"/>
-          <a:ext cx="0" cy="0"/>
-          <a:chOff x="0" y="0"/>
-          <a:chExt cx="0" cy="0"/>
-        </a:xfrm>
-      </p:grpSpPr>
+      <p:grpSpPr/>
       <p:sp>
         <p:nvSpPr>
           <p:cNvPr id="2" name="Rectangle 1"/>
@@ -13613,7 +12796,6 @@
           <a:lstStyle/>
           <a:p>
             <a:pPr algn="ctr"/>
-            <a:endParaRPr/>
           </a:p>
         </p:txBody>
       </p:sp>
@@ -13634,7 +12816,7 @@
           <a:noFill/>
         </p:spPr>
         <p:txBody>
-          <a:bodyPr wrap="square" lIns="0" tIns="0" rIns="0" bIns="0">
+          <a:bodyPr wrap="square" lIns="0" rIns="0" tIns="0" bIns="0">
             <a:spAutoFit/>
           </a:bodyPr>
           <a:lstStyle/>
@@ -13669,7 +12851,7 @@
           <a:noFill/>
         </p:spPr>
         <p:txBody>
-          <a:bodyPr wrap="square" lIns="0" tIns="0" rIns="0" bIns="0">
+          <a:bodyPr wrap="square" lIns="0" rIns="0" tIns="0" bIns="0">
             <a:spAutoFit/>
           </a:bodyPr>
           <a:lstStyle/>
@@ -13727,7 +12909,6 @@
           <a:lstStyle/>
           <a:p>
             <a:pPr algn="ctr"/>
-            <a:endParaRPr/>
           </a:p>
         </p:txBody>
       </p:sp>
@@ -13748,7 +12929,7 @@
           <a:noFill/>
         </p:spPr>
         <p:txBody>
-          <a:bodyPr wrap="square" lIns="0" tIns="0" rIns="0" bIns="0">
+          <a:bodyPr wrap="square" lIns="0" rIns="0" tIns="0" bIns="0">
             <a:spAutoFit/>
           </a:bodyPr>
           <a:lstStyle/>
@@ -13783,7 +12964,7 @@
           <a:noFill/>
         </p:spPr>
         <p:txBody>
-          <a:bodyPr wrap="square" lIns="0" tIns="0" rIns="0" bIns="0">
+          <a:bodyPr wrap="square" lIns="0" rIns="0" tIns="0" bIns="0">
             <a:spAutoFit/>
           </a:bodyPr>
           <a:lstStyle/>
@@ -13841,7 +13022,6 @@
           <a:lstStyle/>
           <a:p>
             <a:pPr algn="ctr"/>
-            <a:endParaRPr/>
           </a:p>
         </p:txBody>
       </p:sp>
@@ -13862,7 +13042,7 @@
           <a:noFill/>
         </p:spPr>
         <p:txBody>
-          <a:bodyPr wrap="square" lIns="0" tIns="0" rIns="0" bIns="0">
+          <a:bodyPr wrap="square" lIns="0" rIns="0" tIns="0" bIns="0">
             <a:spAutoFit/>
           </a:bodyPr>
           <a:lstStyle/>
@@ -13897,7 +13077,7 @@
           <a:noFill/>
         </p:spPr>
         <p:txBody>
-          <a:bodyPr wrap="square" lIns="0" tIns="0" rIns="0" bIns="0">
+          <a:bodyPr wrap="square" lIns="0" rIns="0" tIns="0" bIns="0">
             <a:spAutoFit/>
           </a:bodyPr>
           <a:lstStyle/>
@@ -13955,7 +13135,6 @@
           <a:lstStyle/>
           <a:p>
             <a:pPr algn="ctr"/>
-            <a:endParaRPr/>
           </a:p>
         </p:txBody>
       </p:sp>
@@ -13976,7 +13155,7 @@
           <a:noFill/>
         </p:spPr>
         <p:txBody>
-          <a:bodyPr wrap="square" lIns="0" tIns="0" rIns="0" bIns="0">
+          <a:bodyPr wrap="square" lIns="0" rIns="0" tIns="0" bIns="0">
             <a:spAutoFit/>
           </a:bodyPr>
           <a:lstStyle/>
@@ -14011,7 +13190,7 @@
           <a:noFill/>
         </p:spPr>
         <p:txBody>
-          <a:bodyPr wrap="square" lIns="0" tIns="0" rIns="0" bIns="0">
+          <a:bodyPr wrap="square" lIns="0" rIns="0" tIns="0" bIns="0">
             <a:spAutoFit/>
           </a:bodyPr>
           <a:lstStyle/>
@@ -14069,7 +13248,6 @@
           <a:lstStyle/>
           <a:p>
             <a:pPr algn="ctr"/>
-            <a:endParaRPr/>
           </a:p>
         </p:txBody>
       </p:sp>
@@ -14090,7 +13268,7 @@
           <a:noFill/>
         </p:spPr>
         <p:txBody>
-          <a:bodyPr wrap="square" lIns="0" tIns="0" rIns="0" bIns="0">
+          <a:bodyPr wrap="square" lIns="0" rIns="0" tIns="0" bIns="0">
             <a:spAutoFit/>
           </a:bodyPr>
           <a:lstStyle/>
@@ -14125,7 +13303,7 @@
           <a:noFill/>
         </p:spPr>
         <p:txBody>
-          <a:bodyPr wrap="square" lIns="0" tIns="0" rIns="0" bIns="0">
+          <a:bodyPr wrap="square" lIns="0" rIns="0" tIns="0" bIns="0">
             <a:spAutoFit/>
           </a:bodyPr>
           <a:lstStyle/>
@@ -14160,7 +13338,7 @@
           <a:noFill/>
         </p:spPr>
         <p:txBody>
-          <a:bodyPr wrap="square" lIns="0" tIns="0" rIns="0" bIns="0">
+          <a:bodyPr wrap="square" lIns="0" rIns="0" tIns="0" bIns="0">
             <a:spAutoFit/>
           </a:bodyPr>
           <a:lstStyle/>
@@ -14197,41 +13375,11 @@
                 <a:tableStyleId>{5C22544A-7EE6-4342-B048-85BDC9FD1C3A}</a:tableStyleId>
               </a:tblPr>
               <a:tblGrid>
-                <a:gridCol w="2255459">
-                  <a:extLst>
-                    <a:ext uri="{9D8B030D-6E8A-4147-A177-3AD203B41FA5}">
-                      <a16:colId xmlns:a16="http://schemas.microsoft.com/office/drawing/2014/main" val="20000"/>
-                    </a:ext>
-                  </a:extLst>
-                </a:gridCol>
-                <a:gridCol w="2255459">
-                  <a:extLst>
-                    <a:ext uri="{9D8B030D-6E8A-4147-A177-3AD203B41FA5}">
-                      <a16:colId xmlns:a16="http://schemas.microsoft.com/office/drawing/2014/main" val="20001"/>
-                    </a:ext>
-                  </a:extLst>
-                </a:gridCol>
-                <a:gridCol w="2255459">
-                  <a:extLst>
-                    <a:ext uri="{9D8B030D-6E8A-4147-A177-3AD203B41FA5}">
-                      <a16:colId xmlns:a16="http://schemas.microsoft.com/office/drawing/2014/main" val="20002"/>
-                    </a:ext>
-                  </a:extLst>
-                </a:gridCol>
-                <a:gridCol w="2255459">
-                  <a:extLst>
-                    <a:ext uri="{9D8B030D-6E8A-4147-A177-3AD203B41FA5}">
-                      <a16:colId xmlns:a16="http://schemas.microsoft.com/office/drawing/2014/main" val="20003"/>
-                    </a:ext>
-                  </a:extLst>
-                </a:gridCol>
-                <a:gridCol w="2255459">
-                  <a:extLst>
-                    <a:ext uri="{9D8B030D-6E8A-4147-A177-3AD203B41FA5}">
-                      <a16:colId xmlns:a16="http://schemas.microsoft.com/office/drawing/2014/main" val="20004"/>
-                    </a:ext>
-                  </a:extLst>
-                </a:gridCol>
+                <a:gridCol w="2255459"/>
+                <a:gridCol w="2255459"/>
+                <a:gridCol w="2255459"/>
+                <a:gridCol w="2255459"/>
+                <a:gridCol w="2255459"/>
               </a:tblGrid>
               <a:tr h="539496">
                 <a:tc>
@@ -14241,7 +13389,7 @@
                     <a:p>
                       <a:pPr algn="l"/>
                       <a:r>
-                        <a:rPr sz="1200" b="1">
+                        <a:rPr b="1" sz="1200">
                           <a:solidFill>
                             <a:srgbClr val="FFFFFF"/>
                           </a:solidFill>
@@ -14263,7 +13411,7 @@
                     <a:p>
                       <a:pPr algn="ctr"/>
                       <a:r>
-                        <a:rPr sz="1200" b="1">
+                        <a:rPr b="1" sz="1200">
                           <a:solidFill>
                             <a:srgbClr val="FFFFFF"/>
                           </a:solidFill>
@@ -14285,7 +13433,7 @@
                     <a:p>
                       <a:pPr algn="ctr"/>
                       <a:r>
-                        <a:rPr sz="1200" b="1">
+                        <a:rPr b="1" sz="1200">
                           <a:solidFill>
                             <a:srgbClr val="FFFFFF"/>
                           </a:solidFill>
@@ -14307,7 +13455,7 @@
                     <a:p>
                       <a:pPr algn="ctr"/>
                       <a:r>
-                        <a:rPr sz="1200" b="1">
+                        <a:rPr b="1" sz="1200">
                           <a:solidFill>
                             <a:srgbClr val="FFFFFF"/>
                           </a:solidFill>
@@ -14329,7 +13477,7 @@
                     <a:p>
                       <a:pPr algn="ctr"/>
                       <a:r>
-                        <a:rPr sz="1200" b="1">
+                        <a:rPr b="1" sz="1200">
                           <a:solidFill>
                             <a:srgbClr val="FFFFFF"/>
                           </a:solidFill>
@@ -14344,11 +13492,6 @@
                     </a:solidFill>
                   </a:tcPr>
                 </a:tc>
-                <a:extLst>
-                  <a:ext uri="{0D108BD9-81ED-4DB2-BD59-A6C34878D82A}">
-                    <a16:rowId xmlns:a16="http://schemas.microsoft.com/office/drawing/2014/main" val="10000"/>
-                  </a:ext>
-                </a:extLst>
               </a:tr>
               <a:tr h="539496">
                 <a:tc>
@@ -14461,11 +13604,6 @@
                     </a:solidFill>
                   </a:tcPr>
                 </a:tc>
-                <a:extLst>
-                  <a:ext uri="{0D108BD9-81ED-4DB2-BD59-A6C34878D82A}">
-                    <a16:rowId xmlns:a16="http://schemas.microsoft.com/office/drawing/2014/main" val="10001"/>
-                  </a:ext>
-                </a:extLst>
               </a:tr>
               <a:tr h="539496">
                 <a:tc>
@@ -14578,11 +13716,6 @@
                     </a:solidFill>
                   </a:tcPr>
                 </a:tc>
-                <a:extLst>
-                  <a:ext uri="{0D108BD9-81ED-4DB2-BD59-A6C34878D82A}">
-                    <a16:rowId xmlns:a16="http://schemas.microsoft.com/office/drawing/2014/main" val="10002"/>
-                  </a:ext>
-                </a:extLst>
               </a:tr>
               <a:tr h="539496">
                 <a:tc>
@@ -14695,11 +13828,6 @@
                     </a:solidFill>
                   </a:tcPr>
                 </a:tc>
-                <a:extLst>
-                  <a:ext uri="{0D108BD9-81ED-4DB2-BD59-A6C34878D82A}">
-                    <a16:rowId xmlns:a16="http://schemas.microsoft.com/office/drawing/2014/main" val="10003"/>
-                  </a:ext>
-                </a:extLst>
               </a:tr>
               <a:tr h="539496">
                 <a:tc>
@@ -14812,11 +13940,6 @@
                     </a:solidFill>
                   </a:tcPr>
                 </a:tc>
-                <a:extLst>
-                  <a:ext uri="{0D108BD9-81ED-4DB2-BD59-A6C34878D82A}">
-                    <a16:rowId xmlns:a16="http://schemas.microsoft.com/office/drawing/2014/main" val="10004"/>
-                  </a:ext>
-                </a:extLst>
               </a:tr>
             </a:tbl>
           </a:graphicData>
@@ -14831,7 +13954,7 @@
 </file>
 
 <file path=ppt/slides/slide9.xml><?xml version="1.0" encoding="utf-8"?>
-<p:sld xmlns:a="http://schemas.openxmlformats.org/drawingml/2006/main" xmlns:r="http://schemas.openxmlformats.org/officeDocument/2006/relationships" xmlns:p="http://schemas.openxmlformats.org/presentationml/2006/main">
+<p:sld xmlns:a="http://schemas.openxmlformats.org/drawingml/2006/main" xmlns:p="http://schemas.openxmlformats.org/presentationml/2006/main" xmlns:r="http://schemas.openxmlformats.org/officeDocument/2006/relationships">
   <p:cSld>
     <p:bg>
       <p:bgPr>
@@ -14847,14 +13970,7 @@
         <p:cNvGrpSpPr/>
         <p:nvPr/>
       </p:nvGrpSpPr>
-      <p:grpSpPr>
-        <a:xfrm>
-          <a:off x="0" y="0"/>
-          <a:ext cx="0" cy="0"/>
-          <a:chOff x="0" y="0"/>
-          <a:chExt cx="0" cy="0"/>
-        </a:xfrm>
-      </p:grpSpPr>
+      <p:grpSpPr/>
       <p:sp>
         <p:nvSpPr>
           <p:cNvPr id="2" name="Rectangle 1"/>
@@ -14895,7 +14011,6 @@
           <a:lstStyle/>
           <a:p>
             <a:pPr algn="ctr"/>
-            <a:endParaRPr/>
           </a:p>
         </p:txBody>
       </p:sp>
@@ -14916,7 +14031,7 @@
           <a:noFill/>
         </p:spPr>
         <p:txBody>
-          <a:bodyPr wrap="square" lIns="0" tIns="0" rIns="0" bIns="0">
+          <a:bodyPr wrap="square" lIns="0" rIns="0" tIns="0" bIns="0">
             <a:spAutoFit/>
           </a:bodyPr>
           <a:lstStyle/>
@@ -14951,7 +14066,7 @@
           <a:noFill/>
         </p:spPr>
         <p:txBody>
-          <a:bodyPr wrap="square" lIns="0" tIns="0" rIns="0" bIns="0">
+          <a:bodyPr wrap="square" lIns="0" rIns="0" tIns="0" bIns="0">
             <a:spAutoFit/>
           </a:bodyPr>
           <a:lstStyle/>
@@ -14978,7 +14093,7 @@
           <p:nvPr/>
         </p:nvPicPr>
         <p:blipFill>
-          <a:blip r:embed="rId3"/>
+          <a:blip r:embed="rId2"/>
           <a:stretch>
             <a:fillRect/>
           </a:stretch>
@@ -15035,7 +14150,6 @@
           <a:lstStyle/>
           <a:p>
             <a:pPr algn="ctr"/>
-            <a:endParaRPr/>
           </a:p>
         </p:txBody>
       </p:sp>
@@ -15056,7 +14170,7 @@
           <a:noFill/>
         </p:spPr>
         <p:txBody>
-          <a:bodyPr wrap="square" lIns="0" tIns="0" rIns="0" bIns="0">
+          <a:bodyPr wrap="square" lIns="0" rIns="0" tIns="0" bIns="0">
             <a:spAutoFit/>
           </a:bodyPr>
           <a:lstStyle/>
@@ -15091,7 +14205,7 @@
           <a:noFill/>
         </p:spPr>
         <p:txBody>
-          <a:bodyPr wrap="square" lIns="0" tIns="0" rIns="0" bIns="0">
+          <a:bodyPr wrap="square" lIns="0" rIns="0" tIns="0" bIns="0">
             <a:spAutoFit/>
           </a:bodyPr>
           <a:lstStyle/>
@@ -15151,7 +14265,6 @@
           <a:lstStyle/>
           <a:p>
             <a:pPr algn="ctr"/>
-            <a:endParaRPr/>
           </a:p>
         </p:txBody>
       </p:sp>
@@ -15172,7 +14285,7 @@
           <a:noFill/>
         </p:spPr>
         <p:txBody>
-          <a:bodyPr wrap="square" lIns="0" tIns="0" rIns="0" bIns="0">
+          <a:bodyPr wrap="square" lIns="0" rIns="0" tIns="0" bIns="0">
             <a:spAutoFit/>
           </a:bodyPr>
           <a:lstStyle/>
@@ -15207,7 +14320,7 @@
           <a:noFill/>
         </p:spPr>
         <p:txBody>
-          <a:bodyPr wrap="square" lIns="0" tIns="0" rIns="0" bIns="0">
+          <a:bodyPr wrap="square" lIns="0" rIns="0" tIns="0" bIns="0">
             <a:spAutoFit/>
           </a:bodyPr>
           <a:lstStyle/>
@@ -15267,7 +14380,6 @@
           <a:lstStyle/>
           <a:p>
             <a:pPr algn="ctr"/>
-            <a:endParaRPr/>
           </a:p>
         </p:txBody>
       </p:sp>
@@ -15288,7 +14400,7 @@
           <a:noFill/>
         </p:spPr>
         <p:txBody>
-          <a:bodyPr wrap="square" lIns="0" tIns="0" rIns="0" bIns="0">
+          <a:bodyPr wrap="square" lIns="0" rIns="0" tIns="0" bIns="0">
             <a:spAutoFit/>
           </a:bodyPr>
           <a:lstStyle/>
@@ -15323,7 +14435,7 @@
           <a:noFill/>
         </p:spPr>
         <p:txBody>
-          <a:bodyPr wrap="square" lIns="0" tIns="0" rIns="0" bIns="0">
+          <a:bodyPr wrap="square" lIns="0" rIns="0" tIns="0" bIns="0">
             <a:spAutoFit/>
           </a:bodyPr>
           <a:lstStyle/>
@@ -15383,7 +14495,6 @@
           <a:lstStyle/>
           <a:p>
             <a:pPr algn="ctr"/>
-            <a:endParaRPr/>
           </a:p>
         </p:txBody>
       </p:sp>
@@ -15404,7 +14515,7 @@
           <a:noFill/>
         </p:spPr>
         <p:txBody>
-          <a:bodyPr wrap="square" lIns="0" tIns="0" rIns="0" bIns="0">
+          <a:bodyPr wrap="square" lIns="0" rIns="0" tIns="0" bIns="0">
             <a:spAutoFit/>
           </a:bodyPr>
           <a:lstStyle/>
@@ -15439,7 +14550,7 @@
           <a:noFill/>
         </p:spPr>
         <p:txBody>
-          <a:bodyPr wrap="square" lIns="0" tIns="0" rIns="0" bIns="0">
+          <a:bodyPr wrap="square" lIns="0" rIns="0" tIns="0" bIns="0">
             <a:spAutoFit/>
           </a:bodyPr>
           <a:lstStyle/>
@@ -15796,44 +14907,44 @@
         <a:sysClr val="window" lastClr="FFFFFF"/>
       </a:lt1>
       <a:dk2>
-        <a:srgbClr val="0E2841"/>
+        <a:srgbClr val="1F497D"/>
       </a:dk2>
       <a:lt2>
-        <a:srgbClr val="E8E8E8"/>
+        <a:srgbClr val="EEECE1"/>
       </a:lt2>
       <a:accent1>
-        <a:srgbClr val="156082"/>
+        <a:srgbClr val="4F81BD"/>
       </a:accent1>
       <a:accent2>
-        <a:srgbClr val="E97132"/>
+        <a:srgbClr val="C0504D"/>
       </a:accent2>
       <a:accent3>
-        <a:srgbClr val="196B24"/>
+        <a:srgbClr val="9BBB59"/>
       </a:accent3>
       <a:accent4>
-        <a:srgbClr val="0F9ED5"/>
+        <a:srgbClr val="8064A2"/>
       </a:accent4>
       <a:accent5>
-        <a:srgbClr val="A02B93"/>
+        <a:srgbClr val="4BACC6"/>
       </a:accent5>
       <a:accent6>
-        <a:srgbClr val="4EA72E"/>
+        <a:srgbClr val="F79646"/>
       </a:accent6>
       <a:hlink>
-        <a:srgbClr val="467886"/>
+        <a:srgbClr val="0000FF"/>
       </a:hlink>
       <a:folHlink>
-        <a:srgbClr val="96607D"/>
+        <a:srgbClr val="800080"/>
       </a:folHlink>
     </a:clrScheme>
     <a:fontScheme name="Office">
       <a:majorFont>
-        <a:latin typeface="Aptos Display" panose="02110004020202020204"/>
+        <a:latin typeface="Calibri"/>
         <a:ea typeface=""/>
         <a:cs typeface=""/>
-        <a:font script="Jpan" typeface="游ゴシック Light"/>
+        <a:font script="Jpan" typeface="ＭＳ Ｐゴシック"/>
         <a:font script="Hang" typeface="맑은 고딕"/>
-        <a:font script="Hans" typeface="等线 Light"/>
+        <a:font script="Hans" typeface="宋体"/>
         <a:font script="Hant" typeface="新細明體"/>
         <a:font script="Arab" typeface="Times New Roman"/>
         <a:font script="Hebr" typeface="Times New Roman"/>
@@ -15861,31 +14972,14 @@
         <a:font script="Viet" typeface="Times New Roman"/>
         <a:font script="Uigh" typeface="Microsoft Uighur"/>
         <a:font script="Geor" typeface="Sylfaen"/>
-        <a:font script="Armn" typeface="Arial"/>
-        <a:font script="Bugi" typeface="Leelawadee UI"/>
-        <a:font script="Bopo" typeface="Microsoft JhengHei"/>
-        <a:font script="Java" typeface="Javanese Text"/>
-        <a:font script="Lisu" typeface="Segoe UI"/>
-        <a:font script="Mymr" typeface="Myanmar Text"/>
-        <a:font script="Nkoo" typeface="Ebrima"/>
-        <a:font script="Olck" typeface="Nirmala UI"/>
-        <a:font script="Osma" typeface="Ebrima"/>
-        <a:font script="Phag" typeface="Phagspa"/>
-        <a:font script="Syrn" typeface="Estrangelo Edessa"/>
-        <a:font script="Syrj" typeface="Estrangelo Edessa"/>
-        <a:font script="Syre" typeface="Estrangelo Edessa"/>
-        <a:font script="Sora" typeface="Nirmala UI"/>
-        <a:font script="Tale" typeface="Microsoft Tai Le"/>
-        <a:font script="Talu" typeface="Microsoft New Tai Lue"/>
-        <a:font script="Tfng" typeface="Ebrima"/>
       </a:majorFont>
       <a:minorFont>
-        <a:latin typeface="Aptos" panose="02110004020202020204"/>
+        <a:latin typeface="Calibri"/>
         <a:ea typeface=""/>
         <a:cs typeface=""/>
-        <a:font script="Jpan" typeface="游ゴシック"/>
+        <a:font script="Jpan" typeface="ＭＳ Ｐゴシック"/>
         <a:font script="Hang" typeface="맑은 고딕"/>
-        <a:font script="Hans" typeface="等线"/>
+        <a:font script="Hans" typeface="宋体"/>
         <a:font script="Hant" typeface="新細明體"/>
         <a:font script="Arab" typeface="Arial"/>
         <a:font script="Hebr" typeface="Arial"/>
@@ -15913,23 +15007,6 @@
         <a:font script="Viet" typeface="Arial"/>
         <a:font script="Uigh" typeface="Microsoft Uighur"/>
         <a:font script="Geor" typeface="Sylfaen"/>
-        <a:font script="Armn" typeface="Arial"/>
-        <a:font script="Bugi" typeface="Leelawadee UI"/>
-        <a:font script="Bopo" typeface="Microsoft JhengHei"/>
-        <a:font script="Java" typeface="Javanese Text"/>
-        <a:font script="Lisu" typeface="Segoe UI"/>
-        <a:font script="Mymr" typeface="Myanmar Text"/>
-        <a:font script="Nkoo" typeface="Ebrima"/>
-        <a:font script="Olck" typeface="Nirmala UI"/>
-        <a:font script="Osma" typeface="Ebrima"/>
-        <a:font script="Phag" typeface="Phagspa"/>
-        <a:font script="Syrn" typeface="Estrangelo Edessa"/>
-        <a:font script="Syrj" typeface="Estrangelo Edessa"/>
-        <a:font script="Syre" typeface="Estrangelo Edessa"/>
-        <a:font script="Sora" typeface="Nirmala UI"/>
-        <a:font script="Tale" typeface="Microsoft Tai Le"/>
-        <a:font script="Talu" typeface="Microsoft New Tai Lue"/>
-        <a:font script="Tfng" typeface="Ebrima"/>
       </a:minorFont>
     </a:fontScheme>
     <a:fmtScheme name="Office">
@@ -15941,136 +15018,180 @@
           <a:gsLst>
             <a:gs pos="0">
               <a:schemeClr val="phClr">
-                <a:lumMod val="110000"/>
-                <a:satMod val="105000"/>
-                <a:tint val="67000"/>
+                <a:tint val="50000"/>
+                <a:satMod val="300000"/>
               </a:schemeClr>
             </a:gs>
-            <a:gs pos="50000">
+            <a:gs pos="35000">
               <a:schemeClr val="phClr">
-                <a:lumMod val="105000"/>
-                <a:satMod val="103000"/>
-                <a:tint val="73000"/>
+                <a:tint val="37000"/>
+                <a:satMod val="300000"/>
               </a:schemeClr>
             </a:gs>
             <a:gs pos="100000">
               <a:schemeClr val="phClr">
-                <a:lumMod val="105000"/>
-                <a:satMod val="109000"/>
-                <a:tint val="81000"/>
+                <a:tint val="15000"/>
+                <a:satMod val="350000"/>
               </a:schemeClr>
             </a:gs>
           </a:gsLst>
-          <a:lin ang="5400000" scaled="0"/>
+          <a:lin ang="16200000" scaled="1"/>
         </a:gradFill>
         <a:gradFill rotWithShape="1">
           <a:gsLst>
             <a:gs pos="0">
               <a:schemeClr val="phClr">
-                <a:satMod val="103000"/>
-                <a:lumMod val="102000"/>
-                <a:tint val="94000"/>
-              </a:schemeClr>
-            </a:gs>
-            <a:gs pos="50000">
-              <a:schemeClr val="phClr">
-                <a:satMod val="110000"/>
-                <a:lumMod val="100000"/>
+                <a:tint val="100000"/>
                 <a:shade val="100000"/>
+                <a:satMod val="130000"/>
               </a:schemeClr>
             </a:gs>
             <a:gs pos="100000">
               <a:schemeClr val="phClr">
-                <a:lumMod val="99000"/>
-                <a:satMod val="120000"/>
-                <a:shade val="78000"/>
+                <a:tint val="50000"/>
+                <a:shade val="100000"/>
+                <a:satMod val="350000"/>
               </a:schemeClr>
             </a:gs>
           </a:gsLst>
-          <a:lin ang="5400000" scaled="0"/>
+          <a:lin ang="16200000" scaled="0"/>
         </a:gradFill>
       </a:fillStyleLst>
       <a:lnStyleLst>
-        <a:ln w="12700" cap="flat" cmpd="sng" algn="ctr">
+        <a:ln w="9525" cap="flat" cmpd="sng" algn="ctr">
           <a:solidFill>
-            <a:schemeClr val="phClr"/>
+            <a:schemeClr val="phClr">
+              <a:shade val="95000"/>
+              <a:satMod val="105000"/>
+            </a:schemeClr>
           </a:solidFill>
           <a:prstDash val="solid"/>
-          <a:miter lim="800000"/>
-        </a:ln>
-        <a:ln w="19050" cap="flat" cmpd="sng" algn="ctr">
-          <a:solidFill>
-            <a:schemeClr val="phClr"/>
-          </a:solidFill>
-          <a:prstDash val="solid"/>
-          <a:miter lim="800000"/>
         </a:ln>
         <a:ln w="25400" cap="flat" cmpd="sng" algn="ctr">
           <a:solidFill>
             <a:schemeClr val="phClr"/>
           </a:solidFill>
           <a:prstDash val="solid"/>
-          <a:miter lim="800000"/>
+        </a:ln>
+        <a:ln w="38100" cap="flat" cmpd="sng" algn="ctr">
+          <a:solidFill>
+            <a:schemeClr val="phClr"/>
+          </a:solidFill>
+          <a:prstDash val="solid"/>
         </a:ln>
       </a:lnStyleLst>
       <a:effectStyleLst>
         <a:effectStyle>
-          <a:effectLst/>
-        </a:effectStyle>
-        <a:effectStyle>
-          <a:effectLst/>
+          <a:effectLst>
+            <a:outerShdw blurRad="40000" dist="20000" dir="5400000" rotWithShape="0">
+              <a:srgbClr val="000000">
+                <a:alpha val="38000"/>
+              </a:srgbClr>
+            </a:outerShdw>
+          </a:effectLst>
         </a:effectStyle>
         <a:effectStyle>
           <a:effectLst>
-            <a:outerShdw blurRad="57150" dist="19050" dir="5400000" algn="ctr" rotWithShape="0">
+            <a:outerShdw blurRad="40000" dist="23000" dir="5400000" rotWithShape="0">
               <a:srgbClr val="000000">
-                <a:alpha val="63000"/>
+                <a:alpha val="35000"/>
               </a:srgbClr>
             </a:outerShdw>
           </a:effectLst>
+        </a:effectStyle>
+        <a:effectStyle>
+          <a:effectLst>
+            <a:outerShdw blurRad="40000" dist="23000" dir="5400000" rotWithShape="0">
+              <a:srgbClr val="000000">
+                <a:alpha val="35000"/>
+              </a:srgbClr>
+            </a:outerShdw>
+          </a:effectLst>
+          <a:scene3d>
+            <a:camera prst="orthographicFront">
+              <a:rot lat="0" lon="0" rev="0"/>
+            </a:camera>
+            <a:lightRig rig="threePt" dir="t">
+              <a:rot lat="0" lon="0" rev="1200000"/>
+            </a:lightRig>
+          </a:scene3d>
+          <a:sp3d>
+            <a:bevelT w="63500" h="25400"/>
+          </a:sp3d>
         </a:effectStyle>
       </a:effectStyleLst>
       <a:bgFillStyleLst>
         <a:solidFill>
           <a:schemeClr val="phClr"/>
         </a:solidFill>
-        <a:solidFill>
-          <a:schemeClr val="phClr">
-            <a:tint val="95000"/>
-            <a:satMod val="170000"/>
-          </a:schemeClr>
-        </a:solidFill>
         <a:gradFill rotWithShape="1">
           <a:gsLst>
             <a:gs pos="0">
               <a:schemeClr val="phClr">
-                <a:tint val="93000"/>
-                <a:satMod val="150000"/>
-                <a:shade val="98000"/>
-                <a:lumMod val="102000"/>
+                <a:tint val="40000"/>
+                <a:satMod val="350000"/>
               </a:schemeClr>
             </a:gs>
-            <a:gs pos="50000">
+            <a:gs pos="40000">
               <a:schemeClr val="phClr">
-                <a:tint val="98000"/>
-                <a:satMod val="130000"/>
-                <a:shade val="90000"/>
-                <a:lumMod val="103000"/>
+                <a:tint val="45000"/>
+                <a:shade val="99000"/>
+                <a:satMod val="350000"/>
               </a:schemeClr>
             </a:gs>
             <a:gs pos="100000">
               <a:schemeClr val="phClr">
-                <a:shade val="63000"/>
-                <a:satMod val="120000"/>
+                <a:shade val="20000"/>
+                <a:satMod val="255000"/>
               </a:schemeClr>
             </a:gs>
           </a:gsLst>
-          <a:lin ang="5400000" scaled="0"/>
+          <a:path path="circle">
+            <a:fillToRect l="50000" t="-80000" r="50000" b="180000"/>
+          </a:path>
+        </a:gradFill>
+        <a:gradFill rotWithShape="1">
+          <a:gsLst>
+            <a:gs pos="0">
+              <a:schemeClr val="phClr">
+                <a:tint val="80000"/>
+                <a:satMod val="300000"/>
+              </a:schemeClr>
+            </a:gs>
+            <a:gs pos="100000">
+              <a:schemeClr val="phClr">
+                <a:shade val="30000"/>
+                <a:satMod val="200000"/>
+              </a:schemeClr>
+            </a:gs>
+          </a:gsLst>
+          <a:path path="circle">
+            <a:fillToRect l="50000" t="50000" r="50000" b="50000"/>
+          </a:path>
         </a:gradFill>
       </a:bgFillStyleLst>
     </a:fmtScheme>
   </a:themeElements>
   <a:objectDefaults>
+    <a:spDef>
+      <a:spPr/>
+      <a:bodyPr/>
+      <a:lstStyle/>
+      <a:style>
+        <a:lnRef idx="1">
+          <a:schemeClr val="accent1"/>
+        </a:lnRef>
+        <a:fillRef idx="3">
+          <a:schemeClr val="accent1"/>
+        </a:fillRef>
+        <a:effectRef idx="2">
+          <a:schemeClr val="accent1"/>
+        </a:effectRef>
+        <a:fontRef idx="minor">
+          <a:schemeClr val="lt1"/>
+        </a:fontRef>
+      </a:style>
+    </a:spDef>
     <a:lnDef>
       <a:spPr/>
       <a:bodyPr/>
@@ -16092,10 +15213,5 @@
     </a:lnDef>
   </a:objectDefaults>
   <a:extraClrSchemeLst/>
-  <a:extLst>
-    <a:ext uri="{05A4C25C-085E-4340-85A3-A5531E510DB2}">
-      <thm15:themeFamily xmlns:thm15="http://schemas.microsoft.com/office/thememl/2012/main" name="Office Theme" id="{2E142A2C-CD16-42D6-873A-C26D2A0506FA}" vid="{1BDDFF52-6CD6-40A5-AB3C-68EB2F1E4D0A}"/>
-    </a:ext>
-  </a:extLst>
 </a:theme>
 </file>